--- a/slides/Python Tsunami Local Installations vs code.pptx
+++ b/slides/Python Tsunami Local Installations vs code.pptx
@@ -1,52 +1,52 @@
 
 <file path=ppt/presentation.xml><?xml version="1.0" encoding="utf-8"?>
-<p:presentation xmlns:a="http://schemas.openxmlformats.org/drawingml/2006/main" xmlns:r="http://schemas.openxmlformats.org/officeDocument/2006/relationships" xmlns:mc="http://schemas.openxmlformats.org/markup-compatibility/2006" xmlns:mv="urn:schemas-microsoft-com:mac:vml" xmlns:p="http://schemas.openxmlformats.org/presentationml/2006/main" xmlns:c="http://schemas.openxmlformats.org/drawingml/2006/chart" xmlns:dgm="http://schemas.openxmlformats.org/drawingml/2006/diagram" xmlns:o="urn:schemas-microsoft-com:office:office" xmlns:v="urn:schemas-microsoft-com:vml" xmlns:pvml="urn:schemas-microsoft-com:office:powerpoint" xmlns:com="http://schemas.openxmlformats.org/drawingml/2006/compatibility" xmlns:p14="http://schemas.microsoft.com/office/powerpoint/2010/main" xmlns:p15="http://schemas.microsoft.com/office/powerpoint/2012/main" xmlns:ahyp="http://schemas.microsoft.com/office/drawing/2018/hyperlinkcolor" autoCompressPictures="0" embedTrueTypeFonts="1" strictFirstAndLastChars="0" saveSubsetFonts="1">
+<p:presentation xmlns:a="http://schemas.openxmlformats.org/drawingml/2006/main" xmlns:r="http://schemas.openxmlformats.org/officeDocument/2006/relationships" xmlns:p="http://schemas.openxmlformats.org/presentationml/2006/main" strictFirstAndLastChars="0" embedTrueTypeFonts="1" saveSubsetFonts="1" autoCompressPictures="0">
   <p:sldMasterIdLst>
-    <p:sldMasterId id="2147483659" r:id="rId4"/>
+    <p:sldMasterId id="2147483659" r:id="rId1"/>
   </p:sldMasterIdLst>
   <p:notesMasterIdLst>
-    <p:notesMasterId r:id="rId5"/>
+    <p:notesMasterId r:id="rId13"/>
   </p:notesMasterIdLst>
   <p:sldIdLst>
-    <p:sldId id="256" r:id="rId6"/>
-    <p:sldId id="257" r:id="rId7"/>
-    <p:sldId id="258" r:id="rId8"/>
-    <p:sldId id="259" r:id="rId9"/>
-    <p:sldId id="260" r:id="rId10"/>
-    <p:sldId id="261" r:id="rId11"/>
-    <p:sldId id="262" r:id="rId12"/>
-    <p:sldId id="263" r:id="rId13"/>
-    <p:sldId id="264" r:id="rId14"/>
-    <p:sldId id="265" r:id="rId15"/>
-    <p:sldId id="266" r:id="rId16"/>
+    <p:sldId id="267" r:id="rId2"/>
+    <p:sldId id="257" r:id="rId3"/>
+    <p:sldId id="258" r:id="rId4"/>
+    <p:sldId id="259" r:id="rId5"/>
+    <p:sldId id="260" r:id="rId6"/>
+    <p:sldId id="261" r:id="rId7"/>
+    <p:sldId id="262" r:id="rId8"/>
+    <p:sldId id="263" r:id="rId9"/>
+    <p:sldId id="264" r:id="rId10"/>
+    <p:sldId id="265" r:id="rId11"/>
+    <p:sldId id="266" r:id="rId12"/>
   </p:sldIdLst>
-  <p:sldSz cy="5143500" cx="9144000"/>
+  <p:sldSz cx="9144000" cy="5143500" type="screen16x9"/>
   <p:notesSz cx="6858000" cy="9144000"/>
   <p:embeddedFontLst>
     <p:embeddedFont>
-      <p:font typeface="Raleway"/>
-      <p:regular r:id="rId17"/>
-      <p:bold r:id="rId18"/>
-      <p:italic r:id="rId19"/>
-      <p:boldItalic r:id="rId20"/>
+      <p:font typeface="Helvetica Neue" panose="02000503000000020004" pitchFamily="2" charset="0"/>
+      <p:regular r:id="rId14"/>
+      <p:bold r:id="rId15"/>
+      <p:italic r:id="rId16"/>
+      <p:boldItalic r:id="rId17"/>
     </p:embeddedFont>
     <p:embeddedFont>
-      <p:font typeface="Lato"/>
-      <p:regular r:id="rId21"/>
-      <p:bold r:id="rId22"/>
-      <p:italic r:id="rId23"/>
-      <p:boldItalic r:id="rId24"/>
+      <p:font typeface="Lato" panose="020F0502020204030203" pitchFamily="34" charset="77"/>
+      <p:regular r:id="rId18"/>
+      <p:bold r:id="rId19"/>
+      <p:italic r:id="rId20"/>
+      <p:boldItalic r:id="rId21"/>
     </p:embeddedFont>
     <p:embeddedFont>
-      <p:font typeface="Helvetica Neue"/>
-      <p:regular r:id="rId25"/>
-      <p:bold r:id="rId26"/>
-      <p:italic r:id="rId27"/>
-      <p:boldItalic r:id="rId28"/>
+      <p:font typeface="Raleway" pitchFamily="2" charset="77"/>
+      <p:regular r:id="rId22"/>
+      <p:bold r:id="rId23"/>
+      <p:italic r:id="rId24"/>
+      <p:boldItalic r:id="rId25"/>
     </p:embeddedFont>
   </p:embeddedFontLst>
   <p:defaultTextStyle>
-    <a:defPPr lvl="0" marR="0" rtl="0" algn="l">
+    <a:defPPr marR="0" lvl="0" algn="l" rtl="0">
       <a:lnSpc>
         <a:spcPct val="100000"/>
       </a:lnSpc>
@@ -57,7 +57,7 @@
         <a:spcPts val="0"/>
       </a:spcAft>
     </a:defPPr>
-    <a:lvl1pPr lvl="0" marR="0" rtl="0" algn="l">
+    <a:lvl1pPr marR="0" lvl="0" algn="l" rtl="0">
       <a:lnSpc>
         <a:spcPct val="100000"/>
       </a:lnSpc>
@@ -71,7 +71,7 @@
         <a:srgbClr val="000000"/>
       </a:buClr>
       <a:buFont typeface="Arial"/>
-      <a:defRPr b="0" i="0" sz="1400" u="none" cap="none" strike="noStrike">
+      <a:defRPr sz="1400" b="0" i="0" u="none" strike="noStrike" cap="none">
         <a:solidFill>
           <a:srgbClr val="000000"/>
         </a:solidFill>
@@ -81,7 +81,7 @@
         <a:sym typeface="Arial"/>
       </a:defRPr>
     </a:lvl1pPr>
-    <a:lvl2pPr lvl="1" marR="0" rtl="0" algn="l">
+    <a:lvl2pPr marR="0" lvl="1" algn="l" rtl="0">
       <a:lnSpc>
         <a:spcPct val="100000"/>
       </a:lnSpc>
@@ -95,7 +95,7 @@
         <a:srgbClr val="000000"/>
       </a:buClr>
       <a:buFont typeface="Arial"/>
-      <a:defRPr b="0" i="0" sz="1400" u="none" cap="none" strike="noStrike">
+      <a:defRPr sz="1400" b="0" i="0" u="none" strike="noStrike" cap="none">
         <a:solidFill>
           <a:srgbClr val="000000"/>
         </a:solidFill>
@@ -105,7 +105,7 @@
         <a:sym typeface="Arial"/>
       </a:defRPr>
     </a:lvl2pPr>
-    <a:lvl3pPr lvl="2" marR="0" rtl="0" algn="l">
+    <a:lvl3pPr marR="0" lvl="2" algn="l" rtl="0">
       <a:lnSpc>
         <a:spcPct val="100000"/>
       </a:lnSpc>
@@ -119,7 +119,7 @@
         <a:srgbClr val="000000"/>
       </a:buClr>
       <a:buFont typeface="Arial"/>
-      <a:defRPr b="0" i="0" sz="1400" u="none" cap="none" strike="noStrike">
+      <a:defRPr sz="1400" b="0" i="0" u="none" strike="noStrike" cap="none">
         <a:solidFill>
           <a:srgbClr val="000000"/>
         </a:solidFill>
@@ -129,7 +129,7 @@
         <a:sym typeface="Arial"/>
       </a:defRPr>
     </a:lvl3pPr>
-    <a:lvl4pPr lvl="3" marR="0" rtl="0" algn="l">
+    <a:lvl4pPr marR="0" lvl="3" algn="l" rtl="0">
       <a:lnSpc>
         <a:spcPct val="100000"/>
       </a:lnSpc>
@@ -143,7 +143,7 @@
         <a:srgbClr val="000000"/>
       </a:buClr>
       <a:buFont typeface="Arial"/>
-      <a:defRPr b="0" i="0" sz="1400" u="none" cap="none" strike="noStrike">
+      <a:defRPr sz="1400" b="0" i="0" u="none" strike="noStrike" cap="none">
         <a:solidFill>
           <a:srgbClr val="000000"/>
         </a:solidFill>
@@ -153,7 +153,7 @@
         <a:sym typeface="Arial"/>
       </a:defRPr>
     </a:lvl4pPr>
-    <a:lvl5pPr lvl="4" marR="0" rtl="0" algn="l">
+    <a:lvl5pPr marR="0" lvl="4" algn="l" rtl="0">
       <a:lnSpc>
         <a:spcPct val="100000"/>
       </a:lnSpc>
@@ -167,7 +167,7 @@
         <a:srgbClr val="000000"/>
       </a:buClr>
       <a:buFont typeface="Arial"/>
-      <a:defRPr b="0" i="0" sz="1400" u="none" cap="none" strike="noStrike">
+      <a:defRPr sz="1400" b="0" i="0" u="none" strike="noStrike" cap="none">
         <a:solidFill>
           <a:srgbClr val="000000"/>
         </a:solidFill>
@@ -177,7 +177,7 @@
         <a:sym typeface="Arial"/>
       </a:defRPr>
     </a:lvl5pPr>
-    <a:lvl6pPr lvl="5" marR="0" rtl="0" algn="l">
+    <a:lvl6pPr marR="0" lvl="5" algn="l" rtl="0">
       <a:lnSpc>
         <a:spcPct val="100000"/>
       </a:lnSpc>
@@ -191,7 +191,7 @@
         <a:srgbClr val="000000"/>
       </a:buClr>
       <a:buFont typeface="Arial"/>
-      <a:defRPr b="0" i="0" sz="1400" u="none" cap="none" strike="noStrike">
+      <a:defRPr sz="1400" b="0" i="0" u="none" strike="noStrike" cap="none">
         <a:solidFill>
           <a:srgbClr val="000000"/>
         </a:solidFill>
@@ -201,7 +201,7 @@
         <a:sym typeface="Arial"/>
       </a:defRPr>
     </a:lvl6pPr>
-    <a:lvl7pPr lvl="6" marR="0" rtl="0" algn="l">
+    <a:lvl7pPr marR="0" lvl="6" algn="l" rtl="0">
       <a:lnSpc>
         <a:spcPct val="100000"/>
       </a:lnSpc>
@@ -215,7 +215,7 @@
         <a:srgbClr val="000000"/>
       </a:buClr>
       <a:buFont typeface="Arial"/>
-      <a:defRPr b="0" i="0" sz="1400" u="none" cap="none" strike="noStrike">
+      <a:defRPr sz="1400" b="0" i="0" u="none" strike="noStrike" cap="none">
         <a:solidFill>
           <a:srgbClr val="000000"/>
         </a:solidFill>
@@ -225,7 +225,7 @@
         <a:sym typeface="Arial"/>
       </a:defRPr>
     </a:lvl7pPr>
-    <a:lvl8pPr lvl="7" marR="0" rtl="0" algn="l">
+    <a:lvl8pPr marR="0" lvl="7" algn="l" rtl="0">
       <a:lnSpc>
         <a:spcPct val="100000"/>
       </a:lnSpc>
@@ -239,7 +239,7 @@
         <a:srgbClr val="000000"/>
       </a:buClr>
       <a:buFont typeface="Arial"/>
-      <a:defRPr b="0" i="0" sz="1400" u="none" cap="none" strike="noStrike">
+      <a:defRPr sz="1400" b="0" i="0" u="none" strike="noStrike" cap="none">
         <a:solidFill>
           <a:srgbClr val="000000"/>
         </a:solidFill>
@@ -249,7 +249,7 @@
         <a:sym typeface="Arial"/>
       </a:defRPr>
     </a:lvl8pPr>
-    <a:lvl9pPr lvl="8" marR="0" rtl="0" algn="l">
+    <a:lvl9pPr marR="0" lvl="8" algn="l" rtl="0">
       <a:lnSpc>
         <a:spcPct val="100000"/>
       </a:lnSpc>
@@ -263,7 +263,7 @@
         <a:srgbClr val="000000"/>
       </a:buClr>
       <a:buFont typeface="Arial"/>
-      <a:defRPr b="0" i="0" sz="1400" u="none" cap="none" strike="noStrike">
+      <a:defRPr sz="1400" b="0" i="0" u="none" strike="noStrike" cap="none">
         <a:solidFill>
           <a:srgbClr val="000000"/>
         </a:solidFill>
@@ -276,7 +276,7 @@
   </p:defaultTextStyle>
   <p:extLst>
     <p:ext uri="{EFAFB233-063F-42B5-8137-9DF3F51BA10A}">
-      <p15:sldGuideLst>
+      <p15:sldGuideLst xmlns:p15="http://schemas.microsoft.com/office/powerpoint/2012/main">
         <p15:guide id="1" orient="horz" pos="1620">
           <p15:clr>
             <a:srgbClr val="A4A3A4"/>
@@ -294,11 +294,16 @@
 </file>
 
 <file path=ppt/notesMasters/notesMaster1.xml><?xml version="1.0" encoding="utf-8"?>
-<p:notesMaster xmlns:a="http://schemas.openxmlformats.org/drawingml/2006/main" xmlns:r="http://schemas.openxmlformats.org/officeDocument/2006/relationships" xmlns:mc="http://schemas.openxmlformats.org/markup-compatibility/2006" xmlns:mv="urn:schemas-microsoft-com:mac:vml" xmlns:p="http://schemas.openxmlformats.org/presentationml/2006/main" xmlns:c="http://schemas.openxmlformats.org/drawingml/2006/chart" xmlns:dgm="http://schemas.openxmlformats.org/drawingml/2006/diagram" xmlns:o="urn:schemas-microsoft-com:office:office" xmlns:v="urn:schemas-microsoft-com:vml" xmlns:pvml="urn:schemas-microsoft-com:office:powerpoint" xmlns:com="http://schemas.openxmlformats.org/drawingml/2006/compatibility" xmlns:p14="http://schemas.microsoft.com/office/powerpoint/2010/main" xmlns:p15="http://schemas.microsoft.com/office/powerpoint/2012/main" xmlns:ahyp="http://schemas.microsoft.com/office/drawing/2018/hyperlinkcolor">
+<p:notesMaster xmlns:a="http://schemas.openxmlformats.org/drawingml/2006/main" xmlns:r="http://schemas.openxmlformats.org/officeDocument/2006/relationships" xmlns:p="http://schemas.openxmlformats.org/presentationml/2006/main">
   <p:cSld>
+    <p:bg>
+      <p:bgRef idx="1001">
+        <a:schemeClr val="bg1"/>
+      </p:bgRef>
+    </p:bg>
     <p:spTree>
       <p:nvGrpSpPr>
-        <p:cNvPr id="2" name="Shape 2"/>
+        <p:cNvPr id="1" name="Shape 2"/>
         <p:cNvGrpSpPr/>
         <p:nvPr/>
       </p:nvGrpSpPr>
@@ -313,9 +318,11 @@
       <p:sp>
         <p:nvSpPr>
           <p:cNvPr id="3" name="Google Shape;3;n"/>
-          <p:cNvSpPr/>
+          <p:cNvSpPr>
+            <a:spLocks noGrp="1" noRot="1" noChangeAspect="1"/>
+          </p:cNvSpPr>
           <p:nvPr>
-            <p:ph idx="2" type="sldImg"/>
+            <p:ph type="sldImg" idx="2"/>
           </p:nvPr>
         </p:nvSpPr>
         <p:spPr>
@@ -324,9 +331,13 @@
             <a:ext cx="6096075" cy="3429000"/>
           </a:xfrm>
           <a:custGeom>
-            <a:rect b="b" l="l" r="r" t="t"/>
+            <a:avLst/>
+            <a:gdLst/>
+            <a:ahLst/>
+            <a:cxnLst/>
+            <a:rect l="l" t="t" r="r" b="b"/>
             <a:pathLst>
-              <a:path extrusionOk="0" h="120000" w="120000">
+              <a:path w="120000" h="120000" extrusionOk="0">
                 <a:moveTo>
                   <a:pt x="0" y="0"/>
                 </a:moveTo>
@@ -344,23 +355,25 @@
             </a:pathLst>
           </a:custGeom>
           <a:noFill/>
-          <a:ln cap="flat" cmpd="sng" w="9525">
+          <a:ln w="9525" cap="flat" cmpd="sng">
             <a:solidFill>
               <a:srgbClr val="000000"/>
             </a:solidFill>
             <a:prstDash val="solid"/>
             <a:round/>
-            <a:headEnd len="sm" w="sm" type="none"/>
-            <a:tailEnd len="sm" w="sm" type="none"/>
+            <a:headEnd type="none" w="sm" len="sm"/>
+            <a:tailEnd type="none" w="sm" len="sm"/>
           </a:ln>
         </p:spPr>
       </p:sp>
       <p:sp>
         <p:nvSpPr>
           <p:cNvPr id="4" name="Google Shape;4;n"/>
-          <p:cNvSpPr txBox="1"/>
+          <p:cNvSpPr txBox="1">
+            <a:spLocks noGrp="1"/>
+          </p:cNvSpPr>
           <p:nvPr>
-            <p:ph idx="1" type="body"/>
+            <p:ph type="body" idx="1"/>
           </p:nvPr>
         </p:nvSpPr>
         <p:spPr>
@@ -377,11 +390,11 @@
           </a:ln>
         </p:spPr>
         <p:txBody>
-          <a:bodyPr anchorCtr="0" anchor="t" bIns="91425" lIns="91425" spcFirstLastPara="1" rIns="91425" wrap="square" tIns="91425">
+          <a:bodyPr spcFirstLastPara="1" wrap="square" lIns="91425" tIns="91425" rIns="91425" bIns="91425" anchor="t" anchorCtr="0">
             <a:noAutofit/>
           </a:bodyPr>
           <a:lstStyle>
-            <a:lvl1pPr indent="-298450" lvl="0" marL="457200">
+            <a:lvl1pPr marL="457200" lvl="0" indent="-298450">
               <a:spcBef>
                 <a:spcPts val="0"/>
               </a:spcBef>
@@ -392,7 +405,7 @@
               <a:buChar char="●"/>
               <a:defRPr sz="1100"/>
             </a:lvl1pPr>
-            <a:lvl2pPr indent="-298450" lvl="1" marL="914400">
+            <a:lvl2pPr marL="914400" lvl="1" indent="-298450">
               <a:spcBef>
                 <a:spcPts val="0"/>
               </a:spcBef>
@@ -403,7 +416,7 @@
               <a:buChar char="○"/>
               <a:defRPr sz="1100"/>
             </a:lvl2pPr>
-            <a:lvl3pPr indent="-298450" lvl="2" marL="1371600">
+            <a:lvl3pPr marL="1371600" lvl="2" indent="-298450">
               <a:spcBef>
                 <a:spcPts val="0"/>
               </a:spcBef>
@@ -414,7 +427,7 @@
               <a:buChar char="■"/>
               <a:defRPr sz="1100"/>
             </a:lvl3pPr>
-            <a:lvl4pPr indent="-298450" lvl="3" marL="1828800">
+            <a:lvl4pPr marL="1828800" lvl="3" indent="-298450">
               <a:spcBef>
                 <a:spcPts val="0"/>
               </a:spcBef>
@@ -425,7 +438,7 @@
               <a:buChar char="●"/>
               <a:defRPr sz="1100"/>
             </a:lvl4pPr>
-            <a:lvl5pPr indent="-298450" lvl="4" marL="2286000">
+            <a:lvl5pPr marL="2286000" lvl="4" indent="-298450">
               <a:spcBef>
                 <a:spcPts val="0"/>
               </a:spcBef>
@@ -436,7 +449,7 @@
               <a:buChar char="○"/>
               <a:defRPr sz="1100"/>
             </a:lvl5pPr>
-            <a:lvl6pPr indent="-298450" lvl="5" marL="2743200">
+            <a:lvl6pPr marL="2743200" lvl="5" indent="-298450">
               <a:spcBef>
                 <a:spcPts val="0"/>
               </a:spcBef>
@@ -447,7 +460,7 @@
               <a:buChar char="■"/>
               <a:defRPr sz="1100"/>
             </a:lvl6pPr>
-            <a:lvl7pPr indent="-298450" lvl="6" marL="3200400">
+            <a:lvl7pPr marL="3200400" lvl="6" indent="-298450">
               <a:spcBef>
                 <a:spcPts val="0"/>
               </a:spcBef>
@@ -458,7 +471,7 @@
               <a:buChar char="●"/>
               <a:defRPr sz="1100"/>
             </a:lvl7pPr>
-            <a:lvl8pPr indent="-298450" lvl="7" marL="3657600">
+            <a:lvl8pPr marL="3657600" lvl="7" indent="-298450">
               <a:spcBef>
                 <a:spcPts val="0"/>
               </a:spcBef>
@@ -469,7 +482,7 @@
               <a:buChar char="○"/>
               <a:defRPr sz="1100"/>
             </a:lvl8pPr>
-            <a:lvl9pPr indent="-298450" lvl="8" marL="4114800">
+            <a:lvl9pPr marL="4114800" lvl="8" indent="-298450">
               <a:spcBef>
                 <a:spcPts val="0"/>
               </a:spcBef>
@@ -481,14 +494,16 @@
               <a:defRPr sz="1100"/>
             </a:lvl9pPr>
           </a:lstStyle>
-          <a:p/>
+          <a:p>
+            <a:endParaRPr/>
+          </a:p>
         </p:txBody>
       </p:sp>
     </p:spTree>
   </p:cSld>
-  <p:clrMap accent1="accent1" accent2="accent2" accent3="accent3" accent4="accent4" accent5="accent5" accent6="accent6" bg1="lt1" bg2="dk2" tx1="dk1" tx2="lt2" folHlink="folHlink" hlink="hlink"/>
+  <p:clrMap bg1="lt1" tx1="dk1" bg2="dk2" tx2="lt2" accent1="accent1" accent2="accent2" accent3="accent3" accent4="accent4" accent5="accent5" accent6="accent6" hlink="hlink" folHlink="folHlink"/>
   <p:notesStyle>
-    <a:defPPr lvl="0" marR="0" rtl="0" algn="l">
+    <a:defPPr marR="0" lvl="0" algn="l" rtl="0">
       <a:lnSpc>
         <a:spcPct val="100000"/>
       </a:lnSpc>
@@ -499,7 +514,7 @@
         <a:spcPts val="0"/>
       </a:spcAft>
     </a:defPPr>
-    <a:lvl1pPr lvl="0" marR="0" rtl="0" algn="l">
+    <a:lvl1pPr marR="0" lvl="0" algn="l" rtl="0">
       <a:lnSpc>
         <a:spcPct val="100000"/>
       </a:lnSpc>
@@ -513,7 +528,7 @@
         <a:srgbClr val="000000"/>
       </a:buClr>
       <a:buFont typeface="Arial"/>
-      <a:defRPr b="0" i="0" sz="1400" u="none" cap="none" strike="noStrike">
+      <a:defRPr sz="1400" b="0" i="0" u="none" strike="noStrike" cap="none">
         <a:solidFill>
           <a:srgbClr val="000000"/>
         </a:solidFill>
@@ -523,7 +538,7 @@
         <a:sym typeface="Arial"/>
       </a:defRPr>
     </a:lvl1pPr>
-    <a:lvl2pPr lvl="1" marR="0" rtl="0" algn="l">
+    <a:lvl2pPr marR="0" lvl="1" algn="l" rtl="0">
       <a:lnSpc>
         <a:spcPct val="100000"/>
       </a:lnSpc>
@@ -537,7 +552,7 @@
         <a:srgbClr val="000000"/>
       </a:buClr>
       <a:buFont typeface="Arial"/>
-      <a:defRPr b="0" i="0" sz="1400" u="none" cap="none" strike="noStrike">
+      <a:defRPr sz="1400" b="0" i="0" u="none" strike="noStrike" cap="none">
         <a:solidFill>
           <a:srgbClr val="000000"/>
         </a:solidFill>
@@ -547,7 +562,7 @@
         <a:sym typeface="Arial"/>
       </a:defRPr>
     </a:lvl2pPr>
-    <a:lvl3pPr lvl="2" marR="0" rtl="0" algn="l">
+    <a:lvl3pPr marR="0" lvl="2" algn="l" rtl="0">
       <a:lnSpc>
         <a:spcPct val="100000"/>
       </a:lnSpc>
@@ -561,7 +576,7 @@
         <a:srgbClr val="000000"/>
       </a:buClr>
       <a:buFont typeface="Arial"/>
-      <a:defRPr b="0" i="0" sz="1400" u="none" cap="none" strike="noStrike">
+      <a:defRPr sz="1400" b="0" i="0" u="none" strike="noStrike" cap="none">
         <a:solidFill>
           <a:srgbClr val="000000"/>
         </a:solidFill>
@@ -571,7 +586,7 @@
         <a:sym typeface="Arial"/>
       </a:defRPr>
     </a:lvl3pPr>
-    <a:lvl4pPr lvl="3" marR="0" rtl="0" algn="l">
+    <a:lvl4pPr marR="0" lvl="3" algn="l" rtl="0">
       <a:lnSpc>
         <a:spcPct val="100000"/>
       </a:lnSpc>
@@ -585,7 +600,7 @@
         <a:srgbClr val="000000"/>
       </a:buClr>
       <a:buFont typeface="Arial"/>
-      <a:defRPr b="0" i="0" sz="1400" u="none" cap="none" strike="noStrike">
+      <a:defRPr sz="1400" b="0" i="0" u="none" strike="noStrike" cap="none">
         <a:solidFill>
           <a:srgbClr val="000000"/>
         </a:solidFill>
@@ -595,7 +610,7 @@
         <a:sym typeface="Arial"/>
       </a:defRPr>
     </a:lvl4pPr>
-    <a:lvl5pPr lvl="4" marR="0" rtl="0" algn="l">
+    <a:lvl5pPr marR="0" lvl="4" algn="l" rtl="0">
       <a:lnSpc>
         <a:spcPct val="100000"/>
       </a:lnSpc>
@@ -609,7 +624,7 @@
         <a:srgbClr val="000000"/>
       </a:buClr>
       <a:buFont typeface="Arial"/>
-      <a:defRPr b="0" i="0" sz="1400" u="none" cap="none" strike="noStrike">
+      <a:defRPr sz="1400" b="0" i="0" u="none" strike="noStrike" cap="none">
         <a:solidFill>
           <a:srgbClr val="000000"/>
         </a:solidFill>
@@ -619,7 +634,7 @@
         <a:sym typeface="Arial"/>
       </a:defRPr>
     </a:lvl5pPr>
-    <a:lvl6pPr lvl="5" marR="0" rtl="0" algn="l">
+    <a:lvl6pPr marR="0" lvl="5" algn="l" rtl="0">
       <a:lnSpc>
         <a:spcPct val="100000"/>
       </a:lnSpc>
@@ -633,7 +648,7 @@
         <a:srgbClr val="000000"/>
       </a:buClr>
       <a:buFont typeface="Arial"/>
-      <a:defRPr b="0" i="0" sz="1400" u="none" cap="none" strike="noStrike">
+      <a:defRPr sz="1400" b="0" i="0" u="none" strike="noStrike" cap="none">
         <a:solidFill>
           <a:srgbClr val="000000"/>
         </a:solidFill>
@@ -643,7 +658,7 @@
         <a:sym typeface="Arial"/>
       </a:defRPr>
     </a:lvl6pPr>
-    <a:lvl7pPr lvl="6" marR="0" rtl="0" algn="l">
+    <a:lvl7pPr marR="0" lvl="6" algn="l" rtl="0">
       <a:lnSpc>
         <a:spcPct val="100000"/>
       </a:lnSpc>
@@ -657,7 +672,7 @@
         <a:srgbClr val="000000"/>
       </a:buClr>
       <a:buFont typeface="Arial"/>
-      <a:defRPr b="0" i="0" sz="1400" u="none" cap="none" strike="noStrike">
+      <a:defRPr sz="1400" b="0" i="0" u="none" strike="noStrike" cap="none">
         <a:solidFill>
           <a:srgbClr val="000000"/>
         </a:solidFill>
@@ -667,7 +682,7 @@
         <a:sym typeface="Arial"/>
       </a:defRPr>
     </a:lvl7pPr>
-    <a:lvl8pPr lvl="7" marR="0" rtl="0" algn="l">
+    <a:lvl8pPr marR="0" lvl="7" algn="l" rtl="0">
       <a:lnSpc>
         <a:spcPct val="100000"/>
       </a:lnSpc>
@@ -681,7 +696,7 @@
         <a:srgbClr val="000000"/>
       </a:buClr>
       <a:buFont typeface="Arial"/>
-      <a:defRPr b="0" i="0" sz="1400" u="none" cap="none" strike="noStrike">
+      <a:defRPr sz="1400" b="0" i="0" u="none" strike="noStrike" cap="none">
         <a:solidFill>
           <a:srgbClr val="000000"/>
         </a:solidFill>
@@ -691,7 +706,7 @@
         <a:sym typeface="Arial"/>
       </a:defRPr>
     </a:lvl8pPr>
-    <a:lvl9pPr lvl="8" marR="0" rtl="0" algn="l">
+    <a:lvl9pPr marR="0" lvl="8" algn="l" rtl="0">
       <a:lnSpc>
         <a:spcPct val="100000"/>
       </a:lnSpc>
@@ -705,7 +720,7 @@
         <a:srgbClr val="000000"/>
       </a:buClr>
       <a:buFont typeface="Arial"/>
-      <a:defRPr b="0" i="0" sz="1400" u="none" cap="none" strike="noStrike">
+      <a:defRPr sz="1400" b="0" i="0" u="none" strike="noStrike" cap="none">
         <a:solidFill>
           <a:srgbClr val="000000"/>
         </a:solidFill>
@@ -720,11 +735,11 @@
 </file>
 
 <file path=ppt/notesSlides/notesSlide1.xml><?xml version="1.0" encoding="utf-8"?>
-<p:notes xmlns:a="http://schemas.openxmlformats.org/drawingml/2006/main" xmlns:r="http://schemas.openxmlformats.org/officeDocument/2006/relationships" xmlns:mc="http://schemas.openxmlformats.org/markup-compatibility/2006" xmlns:mv="urn:schemas-microsoft-com:mac:vml" xmlns:p="http://schemas.openxmlformats.org/presentationml/2006/main" xmlns:c="http://schemas.openxmlformats.org/drawingml/2006/chart" xmlns:dgm="http://schemas.openxmlformats.org/drawingml/2006/diagram" xmlns:o="urn:schemas-microsoft-com:office:office" xmlns:v="urn:schemas-microsoft-com:vml" xmlns:pvml="urn:schemas-microsoft-com:office:powerpoint" xmlns:com="http://schemas.openxmlformats.org/drawingml/2006/compatibility" xmlns:p14="http://schemas.microsoft.com/office/powerpoint/2010/main" xmlns:p15="http://schemas.microsoft.com/office/powerpoint/2012/main" xmlns:ahyp="http://schemas.microsoft.com/office/drawing/2018/hyperlinkcolor" showMasterPhAnim="0" showMasterSp="0">
+<p:notes xmlns:a="http://schemas.openxmlformats.org/drawingml/2006/main" xmlns:r="http://schemas.openxmlformats.org/officeDocument/2006/relationships" xmlns:p="http://schemas.openxmlformats.org/presentationml/2006/main" showMasterSp="0" showMasterPhAnim="0">
   <p:cSld>
     <p:spTree>
       <p:nvGrpSpPr>
-        <p:cNvPr id="93" name="Shape 93"/>
+        <p:cNvPr id="1" name="Shape 99"/>
         <p:cNvGrpSpPr/>
         <p:nvPr/>
       </p:nvGrpSpPr>
@@ -738,21 +753,27 @@
       </p:grpSpPr>
       <p:sp>
         <p:nvSpPr>
-          <p:cNvPr id="94" name="Google Shape;94;p:notes"/>
-          <p:cNvSpPr/>
+          <p:cNvPr id="100" name="Google Shape;100;p:notes"/>
+          <p:cNvSpPr>
+            <a:spLocks noGrp="1" noRot="1" noChangeAspect="1"/>
+          </p:cNvSpPr>
           <p:nvPr>
-            <p:ph idx="2" type="sldImg"/>
+            <p:ph type="sldImg" idx="2"/>
           </p:nvPr>
         </p:nvSpPr>
         <p:spPr>
           <a:xfrm>
-            <a:off x="381300" y="685800"/>
-            <a:ext cx="6096075" cy="3429000"/>
+            <a:off x="381000" y="685800"/>
+            <a:ext cx="6096000" cy="3429000"/>
           </a:xfrm>
           <a:custGeom>
-            <a:rect b="b" l="l" r="r" t="t"/>
+            <a:avLst/>
+            <a:gdLst/>
+            <a:ahLst/>
+            <a:cxnLst/>
+            <a:rect l="l" t="t" r="r" b="b"/>
             <a:pathLst>
-              <a:path extrusionOk="0" h="120000" w="120000">
+              <a:path w="120000" h="120000" extrusionOk="0">
                 <a:moveTo>
                   <a:pt x="0" y="0"/>
                 </a:moveTo>
@@ -773,10 +794,12 @@
       </p:sp>
       <p:sp>
         <p:nvSpPr>
-          <p:cNvPr id="95" name="Google Shape;95;p:notes"/>
-          <p:cNvSpPr txBox="1"/>
+          <p:cNvPr id="101" name="Google Shape;101;p:notes"/>
+          <p:cNvSpPr txBox="1">
+            <a:spLocks noGrp="1"/>
+          </p:cNvSpPr>
           <p:nvPr>
-            <p:ph idx="1" type="body"/>
+            <p:ph type="body" idx="1"/>
           </p:nvPr>
         </p:nvSpPr>
         <p:spPr>
@@ -789,12 +812,12 @@
           </a:prstGeom>
         </p:spPr>
         <p:txBody>
-          <a:bodyPr anchorCtr="0" anchor="t" bIns="91425" lIns="91425" spcFirstLastPara="1" rIns="91425" wrap="square" tIns="91425">
+          <a:bodyPr spcFirstLastPara="1" wrap="square" lIns="91425" tIns="91425" rIns="91425" bIns="91425" anchor="t" anchorCtr="0">
             <a:noAutofit/>
           </a:bodyPr>
           <a:lstStyle/>
           <a:p>
-            <a:pPr indent="0" lvl="0" marL="0" rtl="0" algn="l">
+            <a:pPr marL="0" lvl="0" indent="0" algn="l" rtl="0">
               <a:spcBef>
                 <a:spcPts val="0"/>
               </a:spcBef>
@@ -803,9 +826,6 @@
               </a:spcAft>
               <a:buNone/>
             </a:pPr>
-            <a:r>
-              <a:t/>
-            </a:r>
             <a:endParaRPr/>
           </a:p>
         </p:txBody>
@@ -819,11 +839,11 @@
 </file>
 
 <file path=ppt/notesSlides/notesSlide10.xml><?xml version="1.0" encoding="utf-8"?>
-<p:notes xmlns:a="http://schemas.openxmlformats.org/drawingml/2006/main" xmlns:r="http://schemas.openxmlformats.org/officeDocument/2006/relationships" xmlns:mc="http://schemas.openxmlformats.org/markup-compatibility/2006" xmlns:mv="urn:schemas-microsoft-com:mac:vml" xmlns:p="http://schemas.openxmlformats.org/presentationml/2006/main" xmlns:c="http://schemas.openxmlformats.org/drawingml/2006/chart" xmlns:dgm="http://schemas.openxmlformats.org/drawingml/2006/diagram" xmlns:o="urn:schemas-microsoft-com:office:office" xmlns:v="urn:schemas-microsoft-com:vml" xmlns:pvml="urn:schemas-microsoft-com:office:powerpoint" xmlns:com="http://schemas.openxmlformats.org/drawingml/2006/compatibility" xmlns:p14="http://schemas.microsoft.com/office/powerpoint/2010/main" xmlns:p15="http://schemas.microsoft.com/office/powerpoint/2012/main" xmlns:ahyp="http://schemas.microsoft.com/office/drawing/2018/hyperlinkcolor" showMasterPhAnim="0" showMasterSp="0">
+<p:notes xmlns:a="http://schemas.openxmlformats.org/drawingml/2006/main" xmlns:r="http://schemas.openxmlformats.org/officeDocument/2006/relationships" xmlns:p="http://schemas.openxmlformats.org/presentationml/2006/main" showMasterSp="0" showMasterPhAnim="0">
   <p:cSld>
     <p:spTree>
       <p:nvGrpSpPr>
-        <p:cNvPr id="161" name="Shape 161"/>
+        <p:cNvPr id="1" name="Shape 161"/>
         <p:cNvGrpSpPr/>
         <p:nvPr/>
       </p:nvGrpSpPr>
@@ -838,20 +858,26 @@
       <p:sp>
         <p:nvSpPr>
           <p:cNvPr id="162" name="Google Shape;162;g2ffdf2aa039_0_9:notes"/>
-          <p:cNvSpPr/>
+          <p:cNvSpPr>
+            <a:spLocks noGrp="1" noRot="1" noChangeAspect="1"/>
+          </p:cNvSpPr>
           <p:nvPr>
-            <p:ph idx="2" type="sldImg"/>
+            <p:ph type="sldImg" idx="2"/>
           </p:nvPr>
         </p:nvSpPr>
         <p:spPr>
           <a:xfrm>
-            <a:off x="381300" y="685800"/>
+            <a:off x="381000" y="685800"/>
             <a:ext cx="6096000" cy="3429000"/>
           </a:xfrm>
           <a:custGeom>
-            <a:rect b="b" l="l" r="r" t="t"/>
+            <a:avLst/>
+            <a:gdLst/>
+            <a:ahLst/>
+            <a:cxnLst/>
+            <a:rect l="l" t="t" r="r" b="b"/>
             <a:pathLst>
-              <a:path extrusionOk="0" h="120000" w="120000">
+              <a:path w="120000" h="120000" extrusionOk="0">
                 <a:moveTo>
                   <a:pt x="0" y="0"/>
                 </a:moveTo>
@@ -873,9 +899,11 @@
       <p:sp>
         <p:nvSpPr>
           <p:cNvPr id="163" name="Google Shape;163;g2ffdf2aa039_0_9:notes"/>
-          <p:cNvSpPr txBox="1"/>
+          <p:cNvSpPr txBox="1">
+            <a:spLocks noGrp="1"/>
+          </p:cNvSpPr>
           <p:nvPr>
-            <p:ph idx="1" type="body"/>
+            <p:ph type="body" idx="1"/>
           </p:nvPr>
         </p:nvSpPr>
         <p:spPr>
@@ -888,12 +916,12 @@
           </a:prstGeom>
         </p:spPr>
         <p:txBody>
-          <a:bodyPr anchorCtr="0" anchor="t" bIns="91425" lIns="91425" spcFirstLastPara="1" rIns="91425" wrap="square" tIns="91425">
+          <a:bodyPr spcFirstLastPara="1" wrap="square" lIns="91425" tIns="91425" rIns="91425" bIns="91425" anchor="t" anchorCtr="0">
             <a:noAutofit/>
           </a:bodyPr>
           <a:lstStyle/>
           <a:p>
-            <a:pPr indent="0" lvl="0" marL="0" rtl="0" algn="l">
+            <a:pPr marL="0" lvl="0" indent="0" algn="l" rtl="0">
               <a:spcBef>
                 <a:spcPts val="0"/>
               </a:spcBef>
@@ -902,9 +930,6 @@
               </a:spcAft>
               <a:buNone/>
             </a:pPr>
-            <a:r>
-              <a:t/>
-            </a:r>
             <a:endParaRPr/>
           </a:p>
         </p:txBody>
@@ -918,11 +943,11 @@
 </file>
 
 <file path=ppt/notesSlides/notesSlide11.xml><?xml version="1.0" encoding="utf-8"?>
-<p:notes xmlns:a="http://schemas.openxmlformats.org/drawingml/2006/main" xmlns:r="http://schemas.openxmlformats.org/officeDocument/2006/relationships" xmlns:mc="http://schemas.openxmlformats.org/markup-compatibility/2006" xmlns:mv="urn:schemas-microsoft-com:mac:vml" xmlns:p="http://schemas.openxmlformats.org/presentationml/2006/main" xmlns:c="http://schemas.openxmlformats.org/drawingml/2006/chart" xmlns:dgm="http://schemas.openxmlformats.org/drawingml/2006/diagram" xmlns:o="urn:schemas-microsoft-com:office:office" xmlns:v="urn:schemas-microsoft-com:vml" xmlns:pvml="urn:schemas-microsoft-com:office:powerpoint" xmlns:com="http://schemas.openxmlformats.org/drawingml/2006/compatibility" xmlns:p14="http://schemas.microsoft.com/office/powerpoint/2010/main" xmlns:p15="http://schemas.microsoft.com/office/powerpoint/2012/main" xmlns:ahyp="http://schemas.microsoft.com/office/drawing/2018/hyperlinkcolor" showMasterPhAnim="0" showMasterSp="0">
+<p:notes xmlns:a="http://schemas.openxmlformats.org/drawingml/2006/main" xmlns:r="http://schemas.openxmlformats.org/officeDocument/2006/relationships" xmlns:p="http://schemas.openxmlformats.org/presentationml/2006/main" showMasterSp="0" showMasterPhAnim="0">
   <p:cSld>
     <p:spTree>
       <p:nvGrpSpPr>
-        <p:cNvPr id="174" name="Shape 174"/>
+        <p:cNvPr id="1" name="Shape 174"/>
         <p:cNvGrpSpPr/>
         <p:nvPr/>
       </p:nvGrpSpPr>
@@ -937,20 +962,26 @@
       <p:sp>
         <p:nvSpPr>
           <p:cNvPr id="175" name="Google Shape;175;g1244962144d_0_392:notes"/>
-          <p:cNvSpPr/>
+          <p:cNvSpPr>
+            <a:spLocks noGrp="1" noRot="1" noChangeAspect="1"/>
+          </p:cNvSpPr>
           <p:nvPr>
-            <p:ph idx="2" type="sldImg"/>
+            <p:ph type="sldImg" idx="2"/>
           </p:nvPr>
         </p:nvSpPr>
         <p:spPr>
           <a:xfrm>
-            <a:off x="381300" y="685800"/>
+            <a:off x="381000" y="685800"/>
             <a:ext cx="6096000" cy="3429000"/>
           </a:xfrm>
           <a:custGeom>
-            <a:rect b="b" l="l" r="r" t="t"/>
+            <a:avLst/>
+            <a:gdLst/>
+            <a:ahLst/>
+            <a:cxnLst/>
+            <a:rect l="l" t="t" r="r" b="b"/>
             <a:pathLst>
-              <a:path extrusionOk="0" h="120000" w="120000">
+              <a:path w="120000" h="120000" extrusionOk="0">
                 <a:moveTo>
                   <a:pt x="0" y="0"/>
                 </a:moveTo>
@@ -972,9 +1003,11 @@
       <p:sp>
         <p:nvSpPr>
           <p:cNvPr id="176" name="Google Shape;176;g1244962144d_0_392:notes"/>
-          <p:cNvSpPr txBox="1"/>
+          <p:cNvSpPr txBox="1">
+            <a:spLocks noGrp="1"/>
+          </p:cNvSpPr>
           <p:nvPr>
-            <p:ph idx="1" type="body"/>
+            <p:ph type="body" idx="1"/>
           </p:nvPr>
         </p:nvSpPr>
         <p:spPr>
@@ -987,12 +1020,12 @@
           </a:prstGeom>
         </p:spPr>
         <p:txBody>
-          <a:bodyPr anchorCtr="0" anchor="t" bIns="91425" lIns="91425" spcFirstLastPara="1" rIns="91425" wrap="square" tIns="91425">
+          <a:bodyPr spcFirstLastPara="1" wrap="square" lIns="91425" tIns="91425" rIns="91425" bIns="91425" anchor="t" anchorCtr="0">
             <a:noAutofit/>
           </a:bodyPr>
           <a:lstStyle/>
           <a:p>
-            <a:pPr indent="0" lvl="0" marL="0" rtl="0" algn="l">
+            <a:pPr marL="0" lvl="0" indent="0" algn="l" rtl="0">
               <a:spcBef>
                 <a:spcPts val="0"/>
               </a:spcBef>
@@ -1001,9 +1034,6 @@
               </a:spcAft>
               <a:buNone/>
             </a:pPr>
-            <a:r>
-              <a:t/>
-            </a:r>
             <a:endParaRPr/>
           </a:p>
         </p:txBody>
@@ -1017,11 +1047,11 @@
 </file>
 
 <file path=ppt/notesSlides/notesSlide2.xml><?xml version="1.0" encoding="utf-8"?>
-<p:notes xmlns:a="http://schemas.openxmlformats.org/drawingml/2006/main" xmlns:r="http://schemas.openxmlformats.org/officeDocument/2006/relationships" xmlns:mc="http://schemas.openxmlformats.org/markup-compatibility/2006" xmlns:mv="urn:schemas-microsoft-com:mac:vml" xmlns:p="http://schemas.openxmlformats.org/presentationml/2006/main" xmlns:c="http://schemas.openxmlformats.org/drawingml/2006/chart" xmlns:dgm="http://schemas.openxmlformats.org/drawingml/2006/diagram" xmlns:o="urn:schemas-microsoft-com:office:office" xmlns:v="urn:schemas-microsoft-com:vml" xmlns:pvml="urn:schemas-microsoft-com:office:powerpoint" xmlns:com="http://schemas.openxmlformats.org/drawingml/2006/compatibility" xmlns:p14="http://schemas.microsoft.com/office/powerpoint/2010/main" xmlns:p15="http://schemas.microsoft.com/office/powerpoint/2012/main" xmlns:ahyp="http://schemas.microsoft.com/office/drawing/2018/hyperlinkcolor" showMasterPhAnim="0" showMasterSp="0">
+<p:notes xmlns:a="http://schemas.openxmlformats.org/drawingml/2006/main" xmlns:r="http://schemas.openxmlformats.org/officeDocument/2006/relationships" xmlns:p="http://schemas.openxmlformats.org/presentationml/2006/main" showMasterSp="0" showMasterPhAnim="0">
   <p:cSld>
     <p:spTree>
       <p:nvGrpSpPr>
-        <p:cNvPr id="99" name="Shape 99"/>
+        <p:cNvPr id="1" name="Shape 99"/>
         <p:cNvGrpSpPr/>
         <p:nvPr/>
       </p:nvGrpSpPr>
@@ -1036,20 +1066,26 @@
       <p:sp>
         <p:nvSpPr>
           <p:cNvPr id="100" name="Google Shape;100;g1244962144d_0_5:notes"/>
-          <p:cNvSpPr/>
+          <p:cNvSpPr>
+            <a:spLocks noGrp="1" noRot="1" noChangeAspect="1"/>
+          </p:cNvSpPr>
           <p:nvPr>
-            <p:ph idx="2" type="sldImg"/>
+            <p:ph type="sldImg" idx="2"/>
           </p:nvPr>
         </p:nvSpPr>
         <p:spPr>
           <a:xfrm>
-            <a:off x="381300" y="685800"/>
+            <a:off x="381000" y="685800"/>
             <a:ext cx="6096000" cy="3429000"/>
           </a:xfrm>
           <a:custGeom>
-            <a:rect b="b" l="l" r="r" t="t"/>
+            <a:avLst/>
+            <a:gdLst/>
+            <a:ahLst/>
+            <a:cxnLst/>
+            <a:rect l="l" t="t" r="r" b="b"/>
             <a:pathLst>
-              <a:path extrusionOk="0" h="120000" w="120000">
+              <a:path w="120000" h="120000" extrusionOk="0">
                 <a:moveTo>
                   <a:pt x="0" y="0"/>
                 </a:moveTo>
@@ -1071,9 +1107,11 @@
       <p:sp>
         <p:nvSpPr>
           <p:cNvPr id="101" name="Google Shape;101;g1244962144d_0_5:notes"/>
-          <p:cNvSpPr txBox="1"/>
+          <p:cNvSpPr txBox="1">
+            <a:spLocks noGrp="1"/>
+          </p:cNvSpPr>
           <p:nvPr>
-            <p:ph idx="1" type="body"/>
+            <p:ph type="body" idx="1"/>
           </p:nvPr>
         </p:nvSpPr>
         <p:spPr>
@@ -1086,12 +1124,12 @@
           </a:prstGeom>
         </p:spPr>
         <p:txBody>
-          <a:bodyPr anchorCtr="0" anchor="t" bIns="91425" lIns="91425" spcFirstLastPara="1" rIns="91425" wrap="square" tIns="91425">
+          <a:bodyPr spcFirstLastPara="1" wrap="square" lIns="91425" tIns="91425" rIns="91425" bIns="91425" anchor="t" anchorCtr="0">
             <a:noAutofit/>
           </a:bodyPr>
           <a:lstStyle/>
           <a:p>
-            <a:pPr indent="0" lvl="0" marL="0" rtl="0" algn="l">
+            <a:pPr marL="0" lvl="0" indent="0" algn="l" rtl="0">
               <a:spcBef>
                 <a:spcPts val="0"/>
               </a:spcBef>
@@ -1100,9 +1138,6 @@
               </a:spcAft>
               <a:buNone/>
             </a:pPr>
-            <a:r>
-              <a:t/>
-            </a:r>
             <a:endParaRPr/>
           </a:p>
         </p:txBody>
@@ -1116,11 +1151,11 @@
 </file>
 
 <file path=ppt/notesSlides/notesSlide3.xml><?xml version="1.0" encoding="utf-8"?>
-<p:notes xmlns:a="http://schemas.openxmlformats.org/drawingml/2006/main" xmlns:r="http://schemas.openxmlformats.org/officeDocument/2006/relationships" xmlns:mc="http://schemas.openxmlformats.org/markup-compatibility/2006" xmlns:mv="urn:schemas-microsoft-com:mac:vml" xmlns:p="http://schemas.openxmlformats.org/presentationml/2006/main" xmlns:c="http://schemas.openxmlformats.org/drawingml/2006/chart" xmlns:dgm="http://schemas.openxmlformats.org/drawingml/2006/diagram" xmlns:o="urn:schemas-microsoft-com:office:office" xmlns:v="urn:schemas-microsoft-com:vml" xmlns:pvml="urn:schemas-microsoft-com:office:powerpoint" xmlns:com="http://schemas.openxmlformats.org/drawingml/2006/compatibility" xmlns:p14="http://schemas.microsoft.com/office/powerpoint/2010/main" xmlns:p15="http://schemas.microsoft.com/office/powerpoint/2012/main" xmlns:ahyp="http://schemas.microsoft.com/office/drawing/2018/hyperlinkcolor" showMasterPhAnim="0" showMasterSp="0">
+<p:notes xmlns:a="http://schemas.openxmlformats.org/drawingml/2006/main" xmlns:r="http://schemas.openxmlformats.org/officeDocument/2006/relationships" xmlns:p="http://schemas.openxmlformats.org/presentationml/2006/main" showMasterSp="0" showMasterPhAnim="0">
   <p:cSld>
     <p:spTree>
       <p:nvGrpSpPr>
-        <p:cNvPr id="108" name="Shape 108"/>
+        <p:cNvPr id="1" name="Shape 108"/>
         <p:cNvGrpSpPr/>
         <p:nvPr/>
       </p:nvGrpSpPr>
@@ -1135,20 +1170,26 @@
       <p:sp>
         <p:nvSpPr>
           <p:cNvPr id="109" name="Google Shape;109;g1244962144d_0_364:notes"/>
-          <p:cNvSpPr/>
+          <p:cNvSpPr>
+            <a:spLocks noGrp="1" noRot="1" noChangeAspect="1"/>
+          </p:cNvSpPr>
           <p:nvPr>
-            <p:ph idx="2" type="sldImg"/>
+            <p:ph type="sldImg" idx="2"/>
           </p:nvPr>
         </p:nvSpPr>
         <p:spPr>
           <a:xfrm>
-            <a:off x="381300" y="685800"/>
+            <a:off x="381000" y="685800"/>
             <a:ext cx="6096000" cy="3429000"/>
           </a:xfrm>
           <a:custGeom>
-            <a:rect b="b" l="l" r="r" t="t"/>
+            <a:avLst/>
+            <a:gdLst/>
+            <a:ahLst/>
+            <a:cxnLst/>
+            <a:rect l="l" t="t" r="r" b="b"/>
             <a:pathLst>
-              <a:path extrusionOk="0" h="120000" w="120000">
+              <a:path w="120000" h="120000" extrusionOk="0">
                 <a:moveTo>
                   <a:pt x="0" y="0"/>
                 </a:moveTo>
@@ -1170,9 +1211,11 @@
       <p:sp>
         <p:nvSpPr>
           <p:cNvPr id="110" name="Google Shape;110;g1244962144d_0_364:notes"/>
-          <p:cNvSpPr txBox="1"/>
+          <p:cNvSpPr txBox="1">
+            <a:spLocks noGrp="1"/>
+          </p:cNvSpPr>
           <p:nvPr>
-            <p:ph idx="1" type="body"/>
+            <p:ph type="body" idx="1"/>
           </p:nvPr>
         </p:nvSpPr>
         <p:spPr>
@@ -1185,12 +1228,12 @@
           </a:prstGeom>
         </p:spPr>
         <p:txBody>
-          <a:bodyPr anchorCtr="0" anchor="t" bIns="91425" lIns="91425" spcFirstLastPara="1" rIns="91425" wrap="square" tIns="91425">
+          <a:bodyPr spcFirstLastPara="1" wrap="square" lIns="91425" tIns="91425" rIns="91425" bIns="91425" anchor="t" anchorCtr="0">
             <a:noAutofit/>
           </a:bodyPr>
           <a:lstStyle/>
           <a:p>
-            <a:pPr indent="0" lvl="0" marL="0" rtl="0" algn="l">
+            <a:pPr marL="0" lvl="0" indent="0" algn="l" rtl="0">
               <a:spcBef>
                 <a:spcPts val="0"/>
               </a:spcBef>
@@ -1199,9 +1242,6 @@
               </a:spcAft>
               <a:buNone/>
             </a:pPr>
-            <a:r>
-              <a:t/>
-            </a:r>
             <a:endParaRPr/>
           </a:p>
         </p:txBody>
@@ -1215,11 +1255,11 @@
 </file>
 
 <file path=ppt/notesSlides/notesSlide4.xml><?xml version="1.0" encoding="utf-8"?>
-<p:notes xmlns:a="http://schemas.openxmlformats.org/drawingml/2006/main" xmlns:r="http://schemas.openxmlformats.org/officeDocument/2006/relationships" xmlns:mc="http://schemas.openxmlformats.org/markup-compatibility/2006" xmlns:mv="urn:schemas-microsoft-com:mac:vml" xmlns:p="http://schemas.openxmlformats.org/presentationml/2006/main" xmlns:c="http://schemas.openxmlformats.org/drawingml/2006/chart" xmlns:dgm="http://schemas.openxmlformats.org/drawingml/2006/diagram" xmlns:o="urn:schemas-microsoft-com:office:office" xmlns:v="urn:schemas-microsoft-com:vml" xmlns:pvml="urn:schemas-microsoft-com:office:powerpoint" xmlns:com="http://schemas.openxmlformats.org/drawingml/2006/compatibility" xmlns:p14="http://schemas.microsoft.com/office/powerpoint/2010/main" xmlns:p15="http://schemas.microsoft.com/office/powerpoint/2012/main" xmlns:ahyp="http://schemas.microsoft.com/office/drawing/2018/hyperlinkcolor" showMasterPhAnim="0" showMasterSp="0">
+<p:notes xmlns:a="http://schemas.openxmlformats.org/drawingml/2006/main" xmlns:r="http://schemas.openxmlformats.org/officeDocument/2006/relationships" xmlns:p="http://schemas.openxmlformats.org/presentationml/2006/main" showMasterSp="0" showMasterPhAnim="0">
   <p:cSld>
     <p:spTree>
       <p:nvGrpSpPr>
-        <p:cNvPr id="116" name="Shape 116"/>
+        <p:cNvPr id="1" name="Shape 116"/>
         <p:cNvGrpSpPr/>
         <p:nvPr/>
       </p:nvGrpSpPr>
@@ -1234,20 +1274,26 @@
       <p:sp>
         <p:nvSpPr>
           <p:cNvPr id="117" name="Google Shape;117;g2226e6258e1_0_9:notes"/>
-          <p:cNvSpPr/>
+          <p:cNvSpPr>
+            <a:spLocks noGrp="1" noRot="1" noChangeAspect="1"/>
+          </p:cNvSpPr>
           <p:nvPr>
-            <p:ph idx="2" type="sldImg"/>
+            <p:ph type="sldImg" idx="2"/>
           </p:nvPr>
         </p:nvSpPr>
         <p:spPr>
           <a:xfrm>
-            <a:off x="381300" y="685800"/>
+            <a:off x="381000" y="685800"/>
             <a:ext cx="6096000" cy="3429000"/>
           </a:xfrm>
           <a:custGeom>
-            <a:rect b="b" l="l" r="r" t="t"/>
+            <a:avLst/>
+            <a:gdLst/>
+            <a:ahLst/>
+            <a:cxnLst/>
+            <a:rect l="l" t="t" r="r" b="b"/>
             <a:pathLst>
-              <a:path extrusionOk="0" h="120000" w="120000">
+              <a:path w="120000" h="120000" extrusionOk="0">
                 <a:moveTo>
                   <a:pt x="0" y="0"/>
                 </a:moveTo>
@@ -1269,9 +1315,11 @@
       <p:sp>
         <p:nvSpPr>
           <p:cNvPr id="118" name="Google Shape;118;g2226e6258e1_0_9:notes"/>
-          <p:cNvSpPr txBox="1"/>
+          <p:cNvSpPr txBox="1">
+            <a:spLocks noGrp="1"/>
+          </p:cNvSpPr>
           <p:nvPr>
-            <p:ph idx="1" type="body"/>
+            <p:ph type="body" idx="1"/>
           </p:nvPr>
         </p:nvSpPr>
         <p:spPr>
@@ -1284,12 +1332,12 @@
           </a:prstGeom>
         </p:spPr>
         <p:txBody>
-          <a:bodyPr anchorCtr="0" anchor="t" bIns="91425" lIns="91425" spcFirstLastPara="1" rIns="91425" wrap="square" tIns="91425">
+          <a:bodyPr spcFirstLastPara="1" wrap="square" lIns="91425" tIns="91425" rIns="91425" bIns="91425" anchor="t" anchorCtr="0">
             <a:noAutofit/>
           </a:bodyPr>
           <a:lstStyle/>
           <a:p>
-            <a:pPr indent="0" lvl="0" marL="0" rtl="0" algn="l">
+            <a:pPr marL="0" lvl="0" indent="0" algn="l" rtl="0">
               <a:spcBef>
                 <a:spcPts val="0"/>
               </a:spcBef>
@@ -1298,9 +1346,6 @@
               </a:spcAft>
               <a:buNone/>
             </a:pPr>
-            <a:r>
-              <a:t/>
-            </a:r>
             <a:endParaRPr/>
           </a:p>
         </p:txBody>
@@ -1314,11 +1359,11 @@
 </file>
 
 <file path=ppt/notesSlides/notesSlide5.xml><?xml version="1.0" encoding="utf-8"?>
-<p:notes xmlns:a="http://schemas.openxmlformats.org/drawingml/2006/main" xmlns:r="http://schemas.openxmlformats.org/officeDocument/2006/relationships" xmlns:mc="http://schemas.openxmlformats.org/markup-compatibility/2006" xmlns:mv="urn:schemas-microsoft-com:mac:vml" xmlns:p="http://schemas.openxmlformats.org/presentationml/2006/main" xmlns:c="http://schemas.openxmlformats.org/drawingml/2006/chart" xmlns:dgm="http://schemas.openxmlformats.org/drawingml/2006/diagram" xmlns:o="urn:schemas-microsoft-com:office:office" xmlns:v="urn:schemas-microsoft-com:vml" xmlns:pvml="urn:schemas-microsoft-com:office:powerpoint" xmlns:com="http://schemas.openxmlformats.org/drawingml/2006/compatibility" xmlns:p14="http://schemas.microsoft.com/office/powerpoint/2010/main" xmlns:p15="http://schemas.microsoft.com/office/powerpoint/2012/main" xmlns:ahyp="http://schemas.microsoft.com/office/drawing/2018/hyperlinkcolor" showMasterPhAnim="0" showMasterSp="0">
+<p:notes xmlns:a="http://schemas.openxmlformats.org/drawingml/2006/main" xmlns:r="http://schemas.openxmlformats.org/officeDocument/2006/relationships" xmlns:p="http://schemas.openxmlformats.org/presentationml/2006/main" showMasterSp="0" showMasterPhAnim="0">
   <p:cSld>
     <p:spTree>
       <p:nvGrpSpPr>
-        <p:cNvPr id="124" name="Shape 124"/>
+        <p:cNvPr id="1" name="Shape 124"/>
         <p:cNvGrpSpPr/>
         <p:nvPr/>
       </p:nvGrpSpPr>
@@ -1333,20 +1378,26 @@
       <p:sp>
         <p:nvSpPr>
           <p:cNvPr id="125" name="Google Shape;125;g2ffdf2aa039_0_0:notes"/>
-          <p:cNvSpPr/>
+          <p:cNvSpPr>
+            <a:spLocks noGrp="1" noRot="1" noChangeAspect="1"/>
+          </p:cNvSpPr>
           <p:nvPr>
-            <p:ph idx="2" type="sldImg"/>
+            <p:ph type="sldImg" idx="2"/>
           </p:nvPr>
         </p:nvSpPr>
         <p:spPr>
           <a:xfrm>
-            <a:off x="381300" y="685800"/>
+            <a:off x="381000" y="685800"/>
             <a:ext cx="6096000" cy="3429000"/>
           </a:xfrm>
           <a:custGeom>
-            <a:rect b="b" l="l" r="r" t="t"/>
+            <a:avLst/>
+            <a:gdLst/>
+            <a:ahLst/>
+            <a:cxnLst/>
+            <a:rect l="l" t="t" r="r" b="b"/>
             <a:pathLst>
-              <a:path extrusionOk="0" h="120000" w="120000">
+              <a:path w="120000" h="120000" extrusionOk="0">
                 <a:moveTo>
                   <a:pt x="0" y="0"/>
                 </a:moveTo>
@@ -1368,9 +1419,11 @@
       <p:sp>
         <p:nvSpPr>
           <p:cNvPr id="126" name="Google Shape;126;g2ffdf2aa039_0_0:notes"/>
-          <p:cNvSpPr txBox="1"/>
+          <p:cNvSpPr txBox="1">
+            <a:spLocks noGrp="1"/>
+          </p:cNvSpPr>
           <p:nvPr>
-            <p:ph idx="1" type="body"/>
+            <p:ph type="body" idx="1"/>
           </p:nvPr>
         </p:nvSpPr>
         <p:spPr>
@@ -1383,12 +1436,12 @@
           </a:prstGeom>
         </p:spPr>
         <p:txBody>
-          <a:bodyPr anchorCtr="0" anchor="t" bIns="91425" lIns="91425" spcFirstLastPara="1" rIns="91425" wrap="square" tIns="91425">
+          <a:bodyPr spcFirstLastPara="1" wrap="square" lIns="91425" tIns="91425" rIns="91425" bIns="91425" anchor="t" anchorCtr="0">
             <a:noAutofit/>
           </a:bodyPr>
           <a:lstStyle/>
           <a:p>
-            <a:pPr indent="0" lvl="0" marL="0" rtl="0" algn="l">
+            <a:pPr marL="0" lvl="0" indent="0" algn="l" rtl="0">
               <a:spcBef>
                 <a:spcPts val="0"/>
               </a:spcBef>
@@ -1397,9 +1450,6 @@
               </a:spcAft>
               <a:buNone/>
             </a:pPr>
-            <a:r>
-              <a:t/>
-            </a:r>
             <a:endParaRPr/>
           </a:p>
         </p:txBody>
@@ -1413,11 +1463,11 @@
 </file>
 
 <file path=ppt/notesSlides/notesSlide6.xml><?xml version="1.0" encoding="utf-8"?>
-<p:notes xmlns:a="http://schemas.openxmlformats.org/drawingml/2006/main" xmlns:r="http://schemas.openxmlformats.org/officeDocument/2006/relationships" xmlns:mc="http://schemas.openxmlformats.org/markup-compatibility/2006" xmlns:mv="urn:schemas-microsoft-com:mac:vml" xmlns:p="http://schemas.openxmlformats.org/presentationml/2006/main" xmlns:c="http://schemas.openxmlformats.org/drawingml/2006/chart" xmlns:dgm="http://schemas.openxmlformats.org/drawingml/2006/diagram" xmlns:o="urn:schemas-microsoft-com:office:office" xmlns:v="urn:schemas-microsoft-com:vml" xmlns:pvml="urn:schemas-microsoft-com:office:powerpoint" xmlns:com="http://schemas.openxmlformats.org/drawingml/2006/compatibility" xmlns:p14="http://schemas.microsoft.com/office/powerpoint/2010/main" xmlns:p15="http://schemas.microsoft.com/office/powerpoint/2012/main" xmlns:ahyp="http://schemas.microsoft.com/office/drawing/2018/hyperlinkcolor" showMasterPhAnim="0" showMasterSp="0">
+<p:notes xmlns:a="http://schemas.openxmlformats.org/drawingml/2006/main" xmlns:r="http://schemas.openxmlformats.org/officeDocument/2006/relationships" xmlns:p="http://schemas.openxmlformats.org/presentationml/2006/main" showMasterSp="0" showMasterPhAnim="0">
   <p:cSld>
     <p:spTree>
       <p:nvGrpSpPr>
-        <p:cNvPr id="132" name="Shape 132"/>
+        <p:cNvPr id="1" name="Shape 132"/>
         <p:cNvGrpSpPr/>
         <p:nvPr/>
       </p:nvGrpSpPr>
@@ -1432,20 +1482,26 @@
       <p:sp>
         <p:nvSpPr>
           <p:cNvPr id="133" name="Google Shape;133;g2226e6258e1_0_18:notes"/>
-          <p:cNvSpPr/>
+          <p:cNvSpPr>
+            <a:spLocks noGrp="1" noRot="1" noChangeAspect="1"/>
+          </p:cNvSpPr>
           <p:nvPr>
-            <p:ph idx="2" type="sldImg"/>
+            <p:ph type="sldImg" idx="2"/>
           </p:nvPr>
         </p:nvSpPr>
         <p:spPr>
           <a:xfrm>
-            <a:off x="381300" y="685800"/>
+            <a:off x="381000" y="685800"/>
             <a:ext cx="6096000" cy="3429000"/>
           </a:xfrm>
           <a:custGeom>
-            <a:rect b="b" l="l" r="r" t="t"/>
+            <a:avLst/>
+            <a:gdLst/>
+            <a:ahLst/>
+            <a:cxnLst/>
+            <a:rect l="l" t="t" r="r" b="b"/>
             <a:pathLst>
-              <a:path extrusionOk="0" h="120000" w="120000">
+              <a:path w="120000" h="120000" extrusionOk="0">
                 <a:moveTo>
                   <a:pt x="0" y="0"/>
                 </a:moveTo>
@@ -1467,9 +1523,11 @@
       <p:sp>
         <p:nvSpPr>
           <p:cNvPr id="134" name="Google Shape;134;g2226e6258e1_0_18:notes"/>
-          <p:cNvSpPr txBox="1"/>
+          <p:cNvSpPr txBox="1">
+            <a:spLocks noGrp="1"/>
+          </p:cNvSpPr>
           <p:nvPr>
-            <p:ph idx="1" type="body"/>
+            <p:ph type="body" idx="1"/>
           </p:nvPr>
         </p:nvSpPr>
         <p:spPr>
@@ -1482,12 +1540,12 @@
           </a:prstGeom>
         </p:spPr>
         <p:txBody>
-          <a:bodyPr anchorCtr="0" anchor="t" bIns="91425" lIns="91425" spcFirstLastPara="1" rIns="91425" wrap="square" tIns="91425">
+          <a:bodyPr spcFirstLastPara="1" wrap="square" lIns="91425" tIns="91425" rIns="91425" bIns="91425" anchor="t" anchorCtr="0">
             <a:noAutofit/>
           </a:bodyPr>
           <a:lstStyle/>
           <a:p>
-            <a:pPr indent="0" lvl="0" marL="0" rtl="0" algn="l">
+            <a:pPr marL="0" lvl="0" indent="0" algn="l" rtl="0">
               <a:spcBef>
                 <a:spcPts val="0"/>
               </a:spcBef>
@@ -1496,9 +1554,6 @@
               </a:spcAft>
               <a:buNone/>
             </a:pPr>
-            <a:r>
-              <a:t/>
-            </a:r>
             <a:endParaRPr/>
           </a:p>
         </p:txBody>
@@ -1512,11 +1567,11 @@
 </file>
 
 <file path=ppt/notesSlides/notesSlide7.xml><?xml version="1.0" encoding="utf-8"?>
-<p:notes xmlns:a="http://schemas.openxmlformats.org/drawingml/2006/main" xmlns:r="http://schemas.openxmlformats.org/officeDocument/2006/relationships" xmlns:mc="http://schemas.openxmlformats.org/markup-compatibility/2006" xmlns:mv="urn:schemas-microsoft-com:mac:vml" xmlns:p="http://schemas.openxmlformats.org/presentationml/2006/main" xmlns:c="http://schemas.openxmlformats.org/drawingml/2006/chart" xmlns:dgm="http://schemas.openxmlformats.org/drawingml/2006/diagram" xmlns:o="urn:schemas-microsoft-com:office:office" xmlns:v="urn:schemas-microsoft-com:vml" xmlns:pvml="urn:schemas-microsoft-com:office:powerpoint" xmlns:com="http://schemas.openxmlformats.org/drawingml/2006/compatibility" xmlns:p14="http://schemas.microsoft.com/office/powerpoint/2010/main" xmlns:p15="http://schemas.microsoft.com/office/powerpoint/2012/main" xmlns:ahyp="http://schemas.microsoft.com/office/drawing/2018/hyperlinkcolor" showMasterPhAnim="0" showMasterSp="0">
+<p:notes xmlns:a="http://schemas.openxmlformats.org/drawingml/2006/main" xmlns:r="http://schemas.openxmlformats.org/officeDocument/2006/relationships" xmlns:p="http://schemas.openxmlformats.org/presentationml/2006/main" showMasterSp="0" showMasterPhAnim="0">
   <p:cSld>
     <p:spTree>
       <p:nvGrpSpPr>
-        <p:cNvPr id="140" name="Shape 140"/>
+        <p:cNvPr id="1" name="Shape 140"/>
         <p:cNvGrpSpPr/>
         <p:nvPr/>
       </p:nvGrpSpPr>
@@ -1531,20 +1586,26 @@
       <p:sp>
         <p:nvSpPr>
           <p:cNvPr id="141" name="Google Shape;141;g2226e6258e1_0_85:notes"/>
-          <p:cNvSpPr/>
+          <p:cNvSpPr>
+            <a:spLocks noGrp="1" noRot="1" noChangeAspect="1"/>
+          </p:cNvSpPr>
           <p:nvPr>
-            <p:ph idx="2" type="sldImg"/>
+            <p:ph type="sldImg" idx="2"/>
           </p:nvPr>
         </p:nvSpPr>
         <p:spPr>
           <a:xfrm>
-            <a:off x="381300" y="685800"/>
+            <a:off x="381000" y="685800"/>
             <a:ext cx="6096000" cy="3429000"/>
           </a:xfrm>
           <a:custGeom>
-            <a:rect b="b" l="l" r="r" t="t"/>
+            <a:avLst/>
+            <a:gdLst/>
+            <a:ahLst/>
+            <a:cxnLst/>
+            <a:rect l="l" t="t" r="r" b="b"/>
             <a:pathLst>
-              <a:path extrusionOk="0" h="120000" w="120000">
+              <a:path w="120000" h="120000" extrusionOk="0">
                 <a:moveTo>
                   <a:pt x="0" y="0"/>
                 </a:moveTo>
@@ -1566,9 +1627,11 @@
       <p:sp>
         <p:nvSpPr>
           <p:cNvPr id="142" name="Google Shape;142;g2226e6258e1_0_85:notes"/>
-          <p:cNvSpPr txBox="1"/>
+          <p:cNvSpPr txBox="1">
+            <a:spLocks noGrp="1"/>
+          </p:cNvSpPr>
           <p:nvPr>
-            <p:ph idx="1" type="body"/>
+            <p:ph type="body" idx="1"/>
           </p:nvPr>
         </p:nvSpPr>
         <p:spPr>
@@ -1581,12 +1644,12 @@
           </a:prstGeom>
         </p:spPr>
         <p:txBody>
-          <a:bodyPr anchorCtr="0" anchor="t" bIns="91425" lIns="91425" spcFirstLastPara="1" rIns="91425" wrap="square" tIns="91425">
+          <a:bodyPr spcFirstLastPara="1" wrap="square" lIns="91425" tIns="91425" rIns="91425" bIns="91425" anchor="t" anchorCtr="0">
             <a:noAutofit/>
           </a:bodyPr>
           <a:lstStyle/>
           <a:p>
-            <a:pPr indent="0" lvl="0" marL="0" rtl="0" algn="l">
+            <a:pPr marL="0" lvl="0" indent="0" algn="l" rtl="0">
               <a:spcBef>
                 <a:spcPts val="0"/>
               </a:spcBef>
@@ -1595,9 +1658,6 @@
               </a:spcAft>
               <a:buNone/>
             </a:pPr>
-            <a:r>
-              <a:t/>
-            </a:r>
             <a:endParaRPr/>
           </a:p>
         </p:txBody>
@@ -1611,11 +1671,11 @@
 </file>
 
 <file path=ppt/notesSlides/notesSlide8.xml><?xml version="1.0" encoding="utf-8"?>
-<p:notes xmlns:a="http://schemas.openxmlformats.org/drawingml/2006/main" xmlns:r="http://schemas.openxmlformats.org/officeDocument/2006/relationships" xmlns:mc="http://schemas.openxmlformats.org/markup-compatibility/2006" xmlns:mv="urn:schemas-microsoft-com:mac:vml" xmlns:p="http://schemas.openxmlformats.org/presentationml/2006/main" xmlns:c="http://schemas.openxmlformats.org/drawingml/2006/chart" xmlns:dgm="http://schemas.openxmlformats.org/drawingml/2006/diagram" xmlns:o="urn:schemas-microsoft-com:office:office" xmlns:v="urn:schemas-microsoft-com:vml" xmlns:pvml="urn:schemas-microsoft-com:office:powerpoint" xmlns:com="http://schemas.openxmlformats.org/drawingml/2006/compatibility" xmlns:p14="http://schemas.microsoft.com/office/powerpoint/2010/main" xmlns:p15="http://schemas.microsoft.com/office/powerpoint/2012/main" xmlns:ahyp="http://schemas.microsoft.com/office/drawing/2018/hyperlinkcolor" showMasterPhAnim="0" showMasterSp="0">
+<p:notes xmlns:a="http://schemas.openxmlformats.org/drawingml/2006/main" xmlns:r="http://schemas.openxmlformats.org/officeDocument/2006/relationships" xmlns:p="http://schemas.openxmlformats.org/presentationml/2006/main" showMasterSp="0" showMasterPhAnim="0">
   <p:cSld>
     <p:spTree>
       <p:nvGrpSpPr>
-        <p:cNvPr id="148" name="Shape 148"/>
+        <p:cNvPr id="1" name="Shape 148"/>
         <p:cNvGrpSpPr/>
         <p:nvPr/>
       </p:nvGrpSpPr>
@@ -1630,20 +1690,26 @@
       <p:sp>
         <p:nvSpPr>
           <p:cNvPr id="149" name="Google Shape;149;g2ffdf2aa039_0_19:notes"/>
-          <p:cNvSpPr/>
+          <p:cNvSpPr>
+            <a:spLocks noGrp="1" noRot="1" noChangeAspect="1"/>
+          </p:cNvSpPr>
           <p:nvPr>
-            <p:ph idx="2" type="sldImg"/>
+            <p:ph type="sldImg" idx="2"/>
           </p:nvPr>
         </p:nvSpPr>
         <p:spPr>
           <a:xfrm>
-            <a:off x="381300" y="685800"/>
+            <a:off x="381000" y="685800"/>
             <a:ext cx="6096000" cy="3429000"/>
           </a:xfrm>
           <a:custGeom>
-            <a:rect b="b" l="l" r="r" t="t"/>
+            <a:avLst/>
+            <a:gdLst/>
+            <a:ahLst/>
+            <a:cxnLst/>
+            <a:rect l="l" t="t" r="r" b="b"/>
             <a:pathLst>
-              <a:path extrusionOk="0" h="120000" w="120000">
+              <a:path w="120000" h="120000" extrusionOk="0">
                 <a:moveTo>
                   <a:pt x="0" y="0"/>
                 </a:moveTo>
@@ -1665,9 +1731,11 @@
       <p:sp>
         <p:nvSpPr>
           <p:cNvPr id="150" name="Google Shape;150;g2ffdf2aa039_0_19:notes"/>
-          <p:cNvSpPr txBox="1"/>
+          <p:cNvSpPr txBox="1">
+            <a:spLocks noGrp="1"/>
+          </p:cNvSpPr>
           <p:nvPr>
-            <p:ph idx="1" type="body"/>
+            <p:ph type="body" idx="1"/>
           </p:nvPr>
         </p:nvSpPr>
         <p:spPr>
@@ -1680,12 +1748,12 @@
           </a:prstGeom>
         </p:spPr>
         <p:txBody>
-          <a:bodyPr anchorCtr="0" anchor="t" bIns="91425" lIns="91425" spcFirstLastPara="1" rIns="91425" wrap="square" tIns="91425">
+          <a:bodyPr spcFirstLastPara="1" wrap="square" lIns="91425" tIns="91425" rIns="91425" bIns="91425" anchor="t" anchorCtr="0">
             <a:noAutofit/>
           </a:bodyPr>
           <a:lstStyle/>
           <a:p>
-            <a:pPr indent="0" lvl="0" marL="0" rtl="0" algn="l">
+            <a:pPr marL="0" lvl="0" indent="0" algn="l" rtl="0">
               <a:spcBef>
                 <a:spcPts val="0"/>
               </a:spcBef>
@@ -1694,9 +1762,6 @@
               </a:spcAft>
               <a:buNone/>
             </a:pPr>
-            <a:r>
-              <a:t/>
-            </a:r>
             <a:endParaRPr/>
           </a:p>
         </p:txBody>
@@ -1710,11 +1775,11 @@
 </file>
 
 <file path=ppt/notesSlides/notesSlide9.xml><?xml version="1.0" encoding="utf-8"?>
-<p:notes xmlns:a="http://schemas.openxmlformats.org/drawingml/2006/main" xmlns:r="http://schemas.openxmlformats.org/officeDocument/2006/relationships" xmlns:mc="http://schemas.openxmlformats.org/markup-compatibility/2006" xmlns:mv="urn:schemas-microsoft-com:mac:vml" xmlns:p="http://schemas.openxmlformats.org/presentationml/2006/main" xmlns:c="http://schemas.openxmlformats.org/drawingml/2006/chart" xmlns:dgm="http://schemas.openxmlformats.org/drawingml/2006/diagram" xmlns:o="urn:schemas-microsoft-com:office:office" xmlns:v="urn:schemas-microsoft-com:vml" xmlns:pvml="urn:schemas-microsoft-com:office:powerpoint" xmlns:com="http://schemas.openxmlformats.org/drawingml/2006/compatibility" xmlns:p14="http://schemas.microsoft.com/office/powerpoint/2010/main" xmlns:p15="http://schemas.microsoft.com/office/powerpoint/2012/main" xmlns:ahyp="http://schemas.microsoft.com/office/drawing/2018/hyperlinkcolor" showMasterPhAnim="0" showMasterSp="0">
+<p:notes xmlns:a="http://schemas.openxmlformats.org/drawingml/2006/main" xmlns:r="http://schemas.openxmlformats.org/officeDocument/2006/relationships" xmlns:p="http://schemas.openxmlformats.org/presentationml/2006/main" showMasterSp="0" showMasterPhAnim="0">
   <p:cSld>
     <p:spTree>
       <p:nvGrpSpPr>
-        <p:cNvPr id="155" name="Shape 155"/>
+        <p:cNvPr id="1" name="Shape 155"/>
         <p:cNvGrpSpPr/>
         <p:nvPr/>
       </p:nvGrpSpPr>
@@ -1729,20 +1794,26 @@
       <p:sp>
         <p:nvSpPr>
           <p:cNvPr id="156" name="Google Shape;156;g1244962144d_0_373:notes"/>
-          <p:cNvSpPr/>
+          <p:cNvSpPr>
+            <a:spLocks noGrp="1" noRot="1" noChangeAspect="1"/>
+          </p:cNvSpPr>
           <p:nvPr>
-            <p:ph idx="2" type="sldImg"/>
+            <p:ph type="sldImg" idx="2"/>
           </p:nvPr>
         </p:nvSpPr>
         <p:spPr>
           <a:xfrm>
-            <a:off x="381300" y="685800"/>
+            <a:off x="381000" y="685800"/>
             <a:ext cx="6096000" cy="3429000"/>
           </a:xfrm>
           <a:custGeom>
-            <a:rect b="b" l="l" r="r" t="t"/>
+            <a:avLst/>
+            <a:gdLst/>
+            <a:ahLst/>
+            <a:cxnLst/>
+            <a:rect l="l" t="t" r="r" b="b"/>
             <a:pathLst>
-              <a:path extrusionOk="0" h="120000" w="120000">
+              <a:path w="120000" h="120000" extrusionOk="0">
                 <a:moveTo>
                   <a:pt x="0" y="0"/>
                 </a:moveTo>
@@ -1764,9 +1835,11 @@
       <p:sp>
         <p:nvSpPr>
           <p:cNvPr id="157" name="Google Shape;157;g1244962144d_0_373:notes"/>
-          <p:cNvSpPr txBox="1"/>
+          <p:cNvSpPr txBox="1">
+            <a:spLocks noGrp="1"/>
+          </p:cNvSpPr>
           <p:nvPr>
-            <p:ph idx="1" type="body"/>
+            <p:ph type="body" idx="1"/>
           </p:nvPr>
         </p:nvSpPr>
         <p:spPr>
@@ -1779,12 +1852,12 @@
           </a:prstGeom>
         </p:spPr>
         <p:txBody>
-          <a:bodyPr anchorCtr="0" anchor="t" bIns="91425" lIns="91425" spcFirstLastPara="1" rIns="91425" wrap="square" tIns="91425">
+          <a:bodyPr spcFirstLastPara="1" wrap="square" lIns="91425" tIns="91425" rIns="91425" bIns="91425" anchor="t" anchorCtr="0">
             <a:noAutofit/>
           </a:bodyPr>
           <a:lstStyle/>
           <a:p>
-            <a:pPr indent="0" lvl="0" marL="0" rtl="0" algn="l">
+            <a:pPr marL="0" lvl="0" indent="0" algn="l" rtl="0">
               <a:spcBef>
                 <a:spcPts val="0"/>
               </a:spcBef>
@@ -1793,9 +1866,6 @@
               </a:spcAft>
               <a:buNone/>
             </a:pPr>
-            <a:r>
-              <a:t/>
-            </a:r>
             <a:endParaRPr/>
           </a:p>
         </p:txBody>
@@ -1809,18 +1879,19 @@
 </file>
 
 <file path=ppt/slideLayouts/slideLayout1.xml><?xml version="1.0" encoding="utf-8"?>
-<p:sldLayout xmlns:a="http://schemas.openxmlformats.org/drawingml/2006/main" xmlns:r="http://schemas.openxmlformats.org/officeDocument/2006/relationships" xmlns:mc="http://schemas.openxmlformats.org/markup-compatibility/2006" xmlns:mv="urn:schemas-microsoft-com:mac:vml" xmlns:p="http://schemas.openxmlformats.org/presentationml/2006/main" xmlns:c="http://schemas.openxmlformats.org/drawingml/2006/chart" xmlns:dgm="http://schemas.openxmlformats.org/drawingml/2006/diagram" xmlns:o="urn:schemas-microsoft-com:office:office" xmlns:v="urn:schemas-microsoft-com:vml" xmlns:pvml="urn:schemas-microsoft-com:office:powerpoint" xmlns:com="http://schemas.openxmlformats.org/drawingml/2006/compatibility" xmlns:p14="http://schemas.microsoft.com/office/powerpoint/2010/main" xmlns:p15="http://schemas.microsoft.com/office/powerpoint/2012/main" xmlns:ahyp="http://schemas.microsoft.com/office/drawing/2018/hyperlinkcolor" matchingName="title" type="title">
+<p:sldLayout xmlns:a="http://schemas.openxmlformats.org/drawingml/2006/main" xmlns:r="http://schemas.openxmlformats.org/officeDocument/2006/relationships" xmlns:p="http://schemas.openxmlformats.org/presentationml/2006/main" matchingName="title" type="title">
   <p:cSld name="TITLE">
     <p:bg>
       <p:bgPr>
         <a:solidFill>
           <a:schemeClr val="lt2"/>
         </a:solidFill>
+        <a:effectLst/>
       </p:bgPr>
     </p:bg>
     <p:spTree>
       <p:nvGrpSpPr>
-        <p:cNvPr id="9" name="Shape 9"/>
+        <p:cNvPr id="1" name="Shape 9"/>
         <p:cNvGrpSpPr/>
         <p:nvPr/>
       </p:nvGrpSpPr>
@@ -1854,12 +1925,12 @@
           </a:ln>
         </p:spPr>
         <p:txBody>
-          <a:bodyPr anchorCtr="0" anchor="ctr" bIns="91425" lIns="91425" spcFirstLastPara="1" rIns="91425" wrap="square" tIns="91425">
+          <a:bodyPr spcFirstLastPara="1" wrap="square" lIns="91425" tIns="91425" rIns="91425" bIns="91425" anchor="ctr" anchorCtr="0">
             <a:noAutofit/>
           </a:bodyPr>
           <a:lstStyle/>
           <a:p>
-            <a:pPr indent="0" lvl="0" marL="0" rtl="0" algn="l">
+            <a:pPr marL="0" lvl="0" indent="0" algn="l" rtl="0">
               <a:spcBef>
                 <a:spcPts val="0"/>
               </a:spcBef>
@@ -1868,9 +1939,6 @@
               </a:spcAft>
               <a:buNone/>
             </a:pPr>
-            <a:r>
-              <a:t/>
-            </a:r>
             <a:endParaRPr/>
           </a:p>
         </p:txBody>
@@ -1911,12 +1979,12 @@
             </a:ln>
           </p:spPr>
           <p:txBody>
-            <a:bodyPr anchorCtr="0" anchor="ctr" bIns="91425" lIns="91425" spcFirstLastPara="1" rIns="91425" wrap="square" tIns="91425">
+            <a:bodyPr spcFirstLastPara="1" wrap="square" lIns="91425" tIns="91425" rIns="91425" bIns="91425" anchor="ctr" anchorCtr="0">
               <a:noAutofit/>
             </a:bodyPr>
             <a:lstStyle/>
             <a:p>
-              <a:pPr indent="0" lvl="0" marL="0" rtl="0" algn="l">
+              <a:pPr marL="0" lvl="0" indent="0" algn="l" rtl="0">
                 <a:spcBef>
                   <a:spcPts val="0"/>
                 </a:spcBef>
@@ -1925,9 +1993,6 @@
                 </a:spcAft>
                 <a:buNone/>
               </a:pPr>
-              <a:r>
-                <a:t/>
-              </a:r>
               <a:endParaRPr/>
             </a:p>
           </p:txBody>
@@ -1954,12 +2019,12 @@
             </a:ln>
           </p:spPr>
           <p:txBody>
-            <a:bodyPr anchorCtr="0" anchor="ctr" bIns="91425" lIns="91425" spcFirstLastPara="1" rIns="91425" wrap="square" tIns="91425">
+            <a:bodyPr spcFirstLastPara="1" wrap="square" lIns="91425" tIns="91425" rIns="91425" bIns="91425" anchor="ctr" anchorCtr="0">
               <a:noAutofit/>
             </a:bodyPr>
             <a:lstStyle/>
             <a:p>
-              <a:pPr indent="0" lvl="0" marL="0" rtl="0" algn="l">
+              <a:pPr marL="0" lvl="0" indent="0" algn="l" rtl="0">
                 <a:spcBef>
                   <a:spcPts val="0"/>
                 </a:spcBef>
@@ -1968,9 +2033,6 @@
                 </a:spcAft>
                 <a:buNone/>
               </a:pPr>
-              <a:r>
-                <a:t/>
-              </a:r>
               <a:endParaRPr/>
             </a:p>
           </p:txBody>
@@ -1979,7 +2041,9 @@
       <p:sp>
         <p:nvSpPr>
           <p:cNvPr id="14" name="Google Shape;14;p2"/>
-          <p:cNvSpPr txBox="1"/>
+          <p:cNvSpPr txBox="1">
+            <a:spLocks noGrp="1"/>
+          </p:cNvSpPr>
           <p:nvPr>
             <p:ph type="ctrTitle"/>
           </p:nvPr>
@@ -1994,7 +2058,7 @@
           </a:prstGeom>
         </p:spPr>
         <p:txBody>
-          <a:bodyPr anchorCtr="0" anchor="t" bIns="91425" lIns="91425" spcFirstLastPara="1" rIns="91425" wrap="square" tIns="91425">
+          <a:bodyPr spcFirstLastPara="1" wrap="square" lIns="91425" tIns="91425" rIns="91425" bIns="91425" anchor="t" anchorCtr="0">
             <a:normAutofit/>
           </a:bodyPr>
           <a:lstStyle>
@@ -2098,15 +2162,19 @@
               <a:defRPr sz="4200"/>
             </a:lvl9pPr>
           </a:lstStyle>
-          <a:p/>
+          <a:p>
+            <a:endParaRPr/>
+          </a:p>
         </p:txBody>
       </p:sp>
       <p:sp>
         <p:nvSpPr>
           <p:cNvPr id="15" name="Google Shape;15;p2"/>
-          <p:cNvSpPr txBox="1"/>
+          <p:cNvSpPr txBox="1">
+            <a:spLocks noGrp="1"/>
+          </p:cNvSpPr>
           <p:nvPr>
-            <p:ph idx="1" type="subTitle"/>
+            <p:ph type="subTitle" idx="1"/>
           </p:nvPr>
         </p:nvSpPr>
         <p:spPr>
@@ -2119,7 +2187,7 @@
           </a:prstGeom>
         </p:spPr>
         <p:txBody>
-          <a:bodyPr anchorCtr="0" anchor="t" bIns="91425" lIns="91425" spcFirstLastPara="1" rIns="91425" wrap="square" tIns="91425">
+          <a:bodyPr spcFirstLastPara="1" wrap="square" lIns="91425" tIns="91425" rIns="91425" bIns="91425" anchor="t" anchorCtr="0">
             <a:normAutofit/>
           </a:bodyPr>
           <a:lstStyle>
@@ -2250,15 +2318,19 @@
               <a:defRPr sz="1600"/>
             </a:lvl9pPr>
           </a:lstStyle>
-          <a:p/>
+          <a:p>
+            <a:endParaRPr/>
+          </a:p>
         </p:txBody>
       </p:sp>
       <p:sp>
         <p:nvSpPr>
           <p:cNvPr id="16" name="Google Shape;16;p2"/>
-          <p:cNvSpPr txBox="1"/>
+          <p:cNvSpPr txBox="1">
+            <a:spLocks noGrp="1"/>
+          </p:cNvSpPr>
           <p:nvPr>
-            <p:ph idx="12" type="sldNum"/>
+            <p:ph type="sldNum" idx="12"/>
           </p:nvPr>
         </p:nvSpPr>
         <p:spPr>
@@ -2271,7 +2343,7 @@
           </a:prstGeom>
         </p:spPr>
         <p:txBody>
-          <a:bodyPr anchorCtr="0" anchor="ctr" bIns="91425" lIns="91425" spcFirstLastPara="1" rIns="91425" wrap="square" tIns="91425">
+          <a:bodyPr spcFirstLastPara="1" wrap="square" lIns="91425" tIns="91425" rIns="91425" bIns="91425" anchor="ctr" anchorCtr="0">
             <a:normAutofit/>
           </a:bodyPr>
           <a:lstStyle>
@@ -2313,7 +2385,7 @@
             </a:lvl9pPr>
           </a:lstStyle>
           <a:p>
-            <a:pPr indent="0" lvl="0" marL="0" rtl="0" algn="r">
+            <a:pPr marL="0" lvl="0" indent="0" algn="r" rtl="0">
               <a:spcBef>
                 <a:spcPts val="0"/>
               </a:spcBef>
@@ -2367,18 +2439,19 @@
 </file>
 
 <file path=ppt/slideLayouts/slideLayout10.xml><?xml version="1.0" encoding="utf-8"?>
-<p:sldLayout xmlns:a="http://schemas.openxmlformats.org/drawingml/2006/main" xmlns:r="http://schemas.openxmlformats.org/officeDocument/2006/relationships" xmlns:mc="http://schemas.openxmlformats.org/markup-compatibility/2006" xmlns:mv="urn:schemas-microsoft-com:mac:vml" xmlns:p="http://schemas.openxmlformats.org/presentationml/2006/main" xmlns:c="http://schemas.openxmlformats.org/drawingml/2006/chart" xmlns:dgm="http://schemas.openxmlformats.org/drawingml/2006/diagram" xmlns:o="urn:schemas-microsoft-com:office:office" xmlns:v="urn:schemas-microsoft-com:vml" xmlns:pvml="urn:schemas-microsoft-com:office:powerpoint" xmlns:com="http://schemas.openxmlformats.org/drawingml/2006/compatibility" xmlns:p14="http://schemas.microsoft.com/office/powerpoint/2010/main" xmlns:p15="http://schemas.microsoft.com/office/powerpoint/2012/main" xmlns:ahyp="http://schemas.microsoft.com/office/drawing/2018/hyperlinkcolor" matchingName="Big number">
+<p:sldLayout xmlns:a="http://schemas.openxmlformats.org/drawingml/2006/main" xmlns:r="http://schemas.openxmlformats.org/officeDocument/2006/relationships" xmlns:p="http://schemas.openxmlformats.org/presentationml/2006/main" matchingName="Big number">
   <p:cSld name="BIG_NUMBER">
     <p:bg>
       <p:bgPr>
         <a:solidFill>
           <a:schemeClr val="dk1"/>
         </a:solidFill>
+        <a:effectLst/>
       </p:bgPr>
     </p:bg>
     <p:spTree>
       <p:nvGrpSpPr>
-        <p:cNvPr id="84" name="Shape 84"/>
+        <p:cNvPr id="1" name="Shape 84"/>
         <p:cNvGrpSpPr/>
         <p:nvPr/>
       </p:nvGrpSpPr>
@@ -2426,12 +2499,12 @@
             </a:ln>
           </p:spPr>
           <p:txBody>
-            <a:bodyPr anchorCtr="0" anchor="ctr" bIns="91425" lIns="91425" spcFirstLastPara="1" rIns="91425" wrap="square" tIns="91425">
+            <a:bodyPr spcFirstLastPara="1" wrap="square" lIns="91425" tIns="91425" rIns="91425" bIns="91425" anchor="ctr" anchorCtr="0">
               <a:noAutofit/>
             </a:bodyPr>
             <a:lstStyle/>
             <a:p>
-              <a:pPr indent="0" lvl="0" marL="0" rtl="0" algn="l">
+              <a:pPr marL="0" lvl="0" indent="0" algn="l" rtl="0">
                 <a:spcBef>
                   <a:spcPts val="0"/>
                 </a:spcBef>
@@ -2440,9 +2513,6 @@
                 </a:spcAft>
                 <a:buNone/>
               </a:pPr>
-              <a:r>
-                <a:t/>
-              </a:r>
               <a:endParaRPr/>
             </a:p>
           </p:txBody>
@@ -2469,12 +2539,12 @@
             </a:ln>
           </p:spPr>
           <p:txBody>
-            <a:bodyPr anchorCtr="0" anchor="ctr" bIns="91425" lIns="91425" spcFirstLastPara="1" rIns="91425" wrap="square" tIns="91425">
+            <a:bodyPr spcFirstLastPara="1" wrap="square" lIns="91425" tIns="91425" rIns="91425" bIns="91425" anchor="ctr" anchorCtr="0">
               <a:noAutofit/>
             </a:bodyPr>
             <a:lstStyle/>
             <a:p>
-              <a:pPr indent="0" lvl="0" marL="0" rtl="0" algn="l">
+              <a:pPr marL="0" lvl="0" indent="0" algn="l" rtl="0">
                 <a:spcBef>
                   <a:spcPts val="0"/>
                 </a:spcBef>
@@ -2483,9 +2553,6 @@
                 </a:spcAft>
                 <a:buNone/>
               </a:pPr>
-              <a:r>
-                <a:t/>
-              </a:r>
               <a:endParaRPr/>
             </a:p>
           </p:txBody>
@@ -2494,9 +2561,11 @@
       <p:sp>
         <p:nvSpPr>
           <p:cNvPr id="88" name="Google Shape;88;p11"/>
-          <p:cNvSpPr txBox="1"/>
+          <p:cNvSpPr txBox="1">
+            <a:spLocks noGrp="1"/>
+          </p:cNvSpPr>
           <p:nvPr>
-            <p:ph hasCustomPrompt="1" type="title"/>
+            <p:ph type="title" hasCustomPrompt="1"/>
           </p:nvPr>
         </p:nvSpPr>
         <p:spPr>
@@ -2509,7 +2578,7 @@
           </a:prstGeom>
         </p:spPr>
         <p:txBody>
-          <a:bodyPr anchorCtr="0" anchor="t" bIns="91425" lIns="91425" spcFirstLastPara="1" rIns="91425" wrap="square" tIns="91425">
+          <a:bodyPr spcFirstLastPara="1" wrap="square" lIns="91425" tIns="91425" rIns="91425" bIns="91425" anchor="t" anchorCtr="0">
             <a:normAutofit/>
           </a:bodyPr>
           <a:lstStyle>
@@ -2686,9 +2755,11 @@
       <p:sp>
         <p:nvSpPr>
           <p:cNvPr id="89" name="Google Shape;89;p11"/>
-          <p:cNvSpPr txBox="1"/>
+          <p:cNvSpPr txBox="1">
+            <a:spLocks noGrp="1"/>
+          </p:cNvSpPr>
           <p:nvPr>
-            <p:ph idx="1" type="body"/>
+            <p:ph type="body" idx="1"/>
           </p:nvPr>
         </p:nvSpPr>
         <p:spPr>
@@ -2701,11 +2772,11 @@
           </a:prstGeom>
         </p:spPr>
         <p:txBody>
-          <a:bodyPr anchorCtr="0" anchor="t" bIns="91425" lIns="91425" spcFirstLastPara="1" rIns="91425" wrap="square" tIns="91425">
+          <a:bodyPr spcFirstLastPara="1" wrap="square" lIns="91425" tIns="91425" rIns="91425" bIns="91425" anchor="t" anchorCtr="0">
             <a:normAutofit/>
           </a:bodyPr>
           <a:lstStyle>
-            <a:lvl1pPr indent="-311150" lvl="0" marL="457200">
+            <a:lvl1pPr marL="457200" lvl="0" indent="-311150">
               <a:spcBef>
                 <a:spcPts val="0"/>
               </a:spcBef>
@@ -2723,7 +2794,7 @@
                 </a:solidFill>
               </a:defRPr>
             </a:lvl1pPr>
-            <a:lvl2pPr indent="-298450" lvl="1" marL="914400">
+            <a:lvl2pPr marL="914400" lvl="1" indent="-298450">
               <a:spcBef>
                 <a:spcPts val="0"/>
               </a:spcBef>
@@ -2741,7 +2812,7 @@
                 </a:solidFill>
               </a:defRPr>
             </a:lvl2pPr>
-            <a:lvl3pPr indent="-298450" lvl="2" marL="1371600">
+            <a:lvl3pPr marL="1371600" lvl="2" indent="-298450">
               <a:spcBef>
                 <a:spcPts val="0"/>
               </a:spcBef>
@@ -2759,7 +2830,7 @@
                 </a:solidFill>
               </a:defRPr>
             </a:lvl3pPr>
-            <a:lvl4pPr indent="-298450" lvl="3" marL="1828800">
+            <a:lvl4pPr marL="1828800" lvl="3" indent="-298450">
               <a:spcBef>
                 <a:spcPts val="0"/>
               </a:spcBef>
@@ -2777,7 +2848,7 @@
                 </a:solidFill>
               </a:defRPr>
             </a:lvl4pPr>
-            <a:lvl5pPr indent="-298450" lvl="4" marL="2286000">
+            <a:lvl5pPr marL="2286000" lvl="4" indent="-298450">
               <a:spcBef>
                 <a:spcPts val="0"/>
               </a:spcBef>
@@ -2795,7 +2866,7 @@
                 </a:solidFill>
               </a:defRPr>
             </a:lvl5pPr>
-            <a:lvl6pPr indent="-298450" lvl="5" marL="2743200">
+            <a:lvl6pPr marL="2743200" lvl="5" indent="-298450">
               <a:spcBef>
                 <a:spcPts val="0"/>
               </a:spcBef>
@@ -2813,7 +2884,7 @@
                 </a:solidFill>
               </a:defRPr>
             </a:lvl6pPr>
-            <a:lvl7pPr indent="-298450" lvl="6" marL="3200400">
+            <a:lvl7pPr marL="3200400" lvl="6" indent="-298450">
               <a:spcBef>
                 <a:spcPts val="0"/>
               </a:spcBef>
@@ -2831,7 +2902,7 @@
                 </a:solidFill>
               </a:defRPr>
             </a:lvl7pPr>
-            <a:lvl8pPr indent="-298450" lvl="7" marL="3657600">
+            <a:lvl8pPr marL="3657600" lvl="7" indent="-298450">
               <a:spcBef>
                 <a:spcPts val="0"/>
               </a:spcBef>
@@ -2849,7 +2920,7 @@
                 </a:solidFill>
               </a:defRPr>
             </a:lvl8pPr>
-            <a:lvl9pPr indent="-298450" lvl="8" marL="4114800">
+            <a:lvl9pPr marL="4114800" lvl="8" indent="-298450">
               <a:spcBef>
                 <a:spcPts val="0"/>
               </a:spcBef>
@@ -2868,15 +2939,19 @@
               </a:defRPr>
             </a:lvl9pPr>
           </a:lstStyle>
-          <a:p/>
+          <a:p>
+            <a:endParaRPr/>
+          </a:p>
         </p:txBody>
       </p:sp>
       <p:sp>
         <p:nvSpPr>
           <p:cNvPr id="90" name="Google Shape;90;p11"/>
-          <p:cNvSpPr txBox="1"/>
+          <p:cNvSpPr txBox="1">
+            <a:spLocks noGrp="1"/>
+          </p:cNvSpPr>
           <p:nvPr>
-            <p:ph idx="12" type="sldNum"/>
+            <p:ph type="sldNum" idx="12"/>
           </p:nvPr>
         </p:nvSpPr>
         <p:spPr>
@@ -2889,7 +2964,7 @@
           </a:prstGeom>
         </p:spPr>
         <p:txBody>
-          <a:bodyPr anchorCtr="0" anchor="ctr" bIns="91425" lIns="91425" spcFirstLastPara="1" rIns="91425" wrap="square" tIns="91425">
+          <a:bodyPr spcFirstLastPara="1" wrap="square" lIns="91425" tIns="91425" rIns="91425" bIns="91425" anchor="ctr" anchorCtr="0">
             <a:normAutofit/>
           </a:bodyPr>
           <a:lstStyle>
@@ -2967,7 +3042,7 @@
             </a:lvl9pPr>
           </a:lstStyle>
           <a:p>
-            <a:pPr indent="0" lvl="0" marL="0" rtl="0" algn="r">
+            <a:pPr marL="0" lvl="0" indent="0" algn="r" rtl="0">
               <a:spcBef>
                 <a:spcPts val="0"/>
               </a:spcBef>
@@ -2993,11 +3068,11 @@
 </file>
 
 <file path=ppt/slideLayouts/slideLayout11.xml><?xml version="1.0" encoding="utf-8"?>
-<p:sldLayout xmlns:a="http://schemas.openxmlformats.org/drawingml/2006/main" xmlns:r="http://schemas.openxmlformats.org/officeDocument/2006/relationships" xmlns:mc="http://schemas.openxmlformats.org/markup-compatibility/2006" xmlns:mv="urn:schemas-microsoft-com:mac:vml" xmlns:p="http://schemas.openxmlformats.org/presentationml/2006/main" xmlns:c="http://schemas.openxmlformats.org/drawingml/2006/chart" xmlns:dgm="http://schemas.openxmlformats.org/drawingml/2006/diagram" xmlns:o="urn:schemas-microsoft-com:office:office" xmlns:v="urn:schemas-microsoft-com:vml" xmlns:pvml="urn:schemas-microsoft-com:office:powerpoint" xmlns:com="http://schemas.openxmlformats.org/drawingml/2006/compatibility" xmlns:p14="http://schemas.microsoft.com/office/powerpoint/2010/main" xmlns:p15="http://schemas.microsoft.com/office/powerpoint/2012/main" xmlns:ahyp="http://schemas.microsoft.com/office/drawing/2018/hyperlinkcolor" matchingName="Blank" type="blank">
+<p:sldLayout xmlns:a="http://schemas.openxmlformats.org/drawingml/2006/main" xmlns:r="http://schemas.openxmlformats.org/officeDocument/2006/relationships" xmlns:p="http://schemas.openxmlformats.org/presentationml/2006/main" matchingName="Blank" type="blank">
   <p:cSld name="BLANK">
     <p:spTree>
       <p:nvGrpSpPr>
-        <p:cNvPr id="91" name="Shape 91"/>
+        <p:cNvPr id="1" name="Shape 91"/>
         <p:cNvGrpSpPr/>
         <p:nvPr/>
       </p:nvGrpSpPr>
@@ -3012,9 +3087,11 @@
       <p:sp>
         <p:nvSpPr>
           <p:cNvPr id="92" name="Google Shape;92;p12"/>
-          <p:cNvSpPr txBox="1"/>
+          <p:cNvSpPr txBox="1">
+            <a:spLocks noGrp="1"/>
+          </p:cNvSpPr>
           <p:nvPr>
-            <p:ph idx="12" type="sldNum"/>
+            <p:ph type="sldNum" idx="12"/>
           </p:nvPr>
         </p:nvSpPr>
         <p:spPr>
@@ -3027,7 +3104,7 @@
           </a:prstGeom>
         </p:spPr>
         <p:txBody>
-          <a:bodyPr anchorCtr="0" anchor="ctr" bIns="91425" lIns="91425" spcFirstLastPara="1" rIns="91425" wrap="square" tIns="91425">
+          <a:bodyPr spcFirstLastPara="1" wrap="square" lIns="91425" tIns="91425" rIns="91425" bIns="91425" anchor="ctr" anchorCtr="0">
             <a:normAutofit/>
           </a:bodyPr>
           <a:lstStyle>
@@ -3069,7 +3146,7 @@
             </a:lvl9pPr>
           </a:lstStyle>
           <a:p>
-            <a:pPr indent="0" lvl="0" marL="0" rtl="0" algn="r">
+            <a:pPr marL="0" lvl="0" indent="0" algn="r" rtl="0">
               <a:spcBef>
                 <a:spcPts val="0"/>
               </a:spcBef>
@@ -3095,18 +3172,19 @@
 </file>
 
 <file path=ppt/slideLayouts/slideLayout2.xml><?xml version="1.0" encoding="utf-8"?>
-<p:sldLayout xmlns:a="http://schemas.openxmlformats.org/drawingml/2006/main" xmlns:r="http://schemas.openxmlformats.org/officeDocument/2006/relationships" xmlns:mc="http://schemas.openxmlformats.org/markup-compatibility/2006" xmlns:mv="urn:schemas-microsoft-com:mac:vml" xmlns:p="http://schemas.openxmlformats.org/presentationml/2006/main" xmlns:c="http://schemas.openxmlformats.org/drawingml/2006/chart" xmlns:dgm="http://schemas.openxmlformats.org/drawingml/2006/diagram" xmlns:o="urn:schemas-microsoft-com:office:office" xmlns:v="urn:schemas-microsoft-com:vml" xmlns:pvml="urn:schemas-microsoft-com:office:powerpoint" xmlns:com="http://schemas.openxmlformats.org/drawingml/2006/compatibility" xmlns:p14="http://schemas.microsoft.com/office/powerpoint/2010/main" xmlns:p15="http://schemas.microsoft.com/office/powerpoint/2012/main" xmlns:ahyp="http://schemas.microsoft.com/office/drawing/2018/hyperlinkcolor" matchingName="Section header" type="secHead">
+<p:sldLayout xmlns:a="http://schemas.openxmlformats.org/drawingml/2006/main" xmlns:r="http://schemas.openxmlformats.org/officeDocument/2006/relationships" xmlns:p="http://schemas.openxmlformats.org/presentationml/2006/main" matchingName="Section header" type="secHead">
   <p:cSld name="SECTION_HEADER">
     <p:bg>
       <p:bgPr>
         <a:solidFill>
           <a:schemeClr val="lt1"/>
         </a:solidFill>
+        <a:effectLst/>
       </p:bgPr>
     </p:bg>
     <p:spTree>
       <p:nvGrpSpPr>
-        <p:cNvPr id="18" name="Shape 18"/>
+        <p:cNvPr id="1" name="Shape 18"/>
         <p:cNvGrpSpPr/>
         <p:nvPr/>
       </p:nvGrpSpPr>
@@ -3135,23 +3213,23 @@
           <a:solidFill>
             <a:schemeClr val="lt2"/>
           </a:solidFill>
-          <a:ln cap="flat" cmpd="sng" w="9525">
+          <a:ln w="9525" cap="flat" cmpd="sng">
             <a:solidFill>
               <a:schemeClr val="dk2"/>
             </a:solidFill>
             <a:prstDash val="solid"/>
             <a:round/>
-            <a:headEnd len="sm" w="sm" type="none"/>
-            <a:tailEnd len="sm" w="sm" type="none"/>
+            <a:headEnd type="none" w="sm" len="sm"/>
+            <a:tailEnd type="none" w="sm" len="sm"/>
           </a:ln>
         </p:spPr>
         <p:txBody>
-          <a:bodyPr anchorCtr="0" anchor="ctr" bIns="91425" lIns="91425" spcFirstLastPara="1" rIns="91425" wrap="square" tIns="91425">
+          <a:bodyPr spcFirstLastPara="1" wrap="square" lIns="91425" tIns="91425" rIns="91425" bIns="91425" anchor="ctr" anchorCtr="0">
             <a:noAutofit/>
           </a:bodyPr>
           <a:lstStyle/>
           <a:p>
-            <a:pPr indent="0" lvl="0" marL="0" rtl="0" algn="l">
+            <a:pPr marL="0" lvl="0" indent="0" algn="l" rtl="0">
               <a:spcBef>
                 <a:spcPts val="0"/>
               </a:spcBef>
@@ -3160,9 +3238,6 @@
               </a:spcAft>
               <a:buNone/>
             </a:pPr>
-            <a:r>
-              <a:t/>
-            </a:r>
             <a:endParaRPr/>
           </a:p>
         </p:txBody>
@@ -3203,12 +3278,12 @@
             </a:ln>
           </p:spPr>
           <p:txBody>
-            <a:bodyPr anchorCtr="0" anchor="ctr" bIns="91425" lIns="91425" spcFirstLastPara="1" rIns="91425" wrap="square" tIns="91425">
+            <a:bodyPr spcFirstLastPara="1" wrap="square" lIns="91425" tIns="91425" rIns="91425" bIns="91425" anchor="ctr" anchorCtr="0">
               <a:noAutofit/>
             </a:bodyPr>
             <a:lstStyle/>
             <a:p>
-              <a:pPr indent="0" lvl="0" marL="0" rtl="0" algn="l">
+              <a:pPr marL="0" lvl="0" indent="0" algn="l" rtl="0">
                 <a:spcBef>
                   <a:spcPts val="0"/>
                 </a:spcBef>
@@ -3217,9 +3292,6 @@
                 </a:spcAft>
                 <a:buNone/>
               </a:pPr>
-              <a:r>
-                <a:t/>
-              </a:r>
               <a:endParaRPr/>
             </a:p>
           </p:txBody>
@@ -3246,12 +3318,12 @@
             </a:ln>
           </p:spPr>
           <p:txBody>
-            <a:bodyPr anchorCtr="0" anchor="ctr" bIns="91425" lIns="91425" spcFirstLastPara="1" rIns="91425" wrap="square" tIns="91425">
+            <a:bodyPr spcFirstLastPara="1" wrap="square" lIns="91425" tIns="91425" rIns="91425" bIns="91425" anchor="ctr" anchorCtr="0">
               <a:noAutofit/>
             </a:bodyPr>
             <a:lstStyle/>
             <a:p>
-              <a:pPr indent="0" lvl="0" marL="0" rtl="0" algn="l">
+              <a:pPr marL="0" lvl="0" indent="0" algn="l" rtl="0">
                 <a:spcBef>
                   <a:spcPts val="0"/>
                 </a:spcBef>
@@ -3260,9 +3332,6 @@
                 </a:spcAft>
                 <a:buNone/>
               </a:pPr>
-              <a:r>
-                <a:t/>
-              </a:r>
               <a:endParaRPr/>
             </a:p>
           </p:txBody>
@@ -3271,7 +3340,9 @@
       <p:sp>
         <p:nvSpPr>
           <p:cNvPr id="23" name="Google Shape;23;p3"/>
-          <p:cNvSpPr txBox="1"/>
+          <p:cNvSpPr txBox="1">
+            <a:spLocks noGrp="1"/>
+          </p:cNvSpPr>
           <p:nvPr>
             <p:ph type="title"/>
           </p:nvPr>
@@ -3286,7 +3357,7 @@
           </a:prstGeom>
         </p:spPr>
         <p:txBody>
-          <a:bodyPr anchorCtr="0" anchor="t" bIns="91425" lIns="91425" spcFirstLastPara="1" rIns="91425" wrap="square" tIns="91425">
+          <a:bodyPr spcFirstLastPara="1" wrap="square" lIns="91425" tIns="91425" rIns="91425" bIns="91425" anchor="t" anchorCtr="0">
             <a:normAutofit/>
           </a:bodyPr>
           <a:lstStyle>
@@ -3453,15 +3524,19 @@
               </a:defRPr>
             </a:lvl9pPr>
           </a:lstStyle>
-          <a:p/>
+          <a:p>
+            <a:endParaRPr/>
+          </a:p>
         </p:txBody>
       </p:sp>
       <p:sp>
         <p:nvSpPr>
           <p:cNvPr id="24" name="Google Shape;24;p3"/>
-          <p:cNvSpPr txBox="1"/>
+          <p:cNvSpPr txBox="1">
+            <a:spLocks noGrp="1"/>
+          </p:cNvSpPr>
           <p:nvPr>
-            <p:ph idx="12" type="sldNum"/>
+            <p:ph type="sldNum" idx="12"/>
           </p:nvPr>
         </p:nvSpPr>
         <p:spPr>
@@ -3474,7 +3549,7 @@
           </a:prstGeom>
         </p:spPr>
         <p:txBody>
-          <a:bodyPr anchorCtr="0" anchor="ctr" bIns="91425" lIns="91425" spcFirstLastPara="1" rIns="91425" wrap="square" tIns="91425">
+          <a:bodyPr spcFirstLastPara="1" wrap="square" lIns="91425" tIns="91425" rIns="91425" bIns="91425" anchor="ctr" anchorCtr="0">
             <a:normAutofit/>
           </a:bodyPr>
           <a:lstStyle>
@@ -3552,7 +3627,7 @@
             </a:lvl9pPr>
           </a:lstStyle>
           <a:p>
-            <a:pPr indent="0" lvl="0" marL="0" rtl="0" algn="r">
+            <a:pPr marL="0" lvl="0" indent="0" algn="r" rtl="0">
               <a:spcBef>
                 <a:spcPts val="0"/>
               </a:spcBef>
@@ -3606,11 +3681,11 @@
 </file>
 
 <file path=ppt/slideLayouts/slideLayout3.xml><?xml version="1.0" encoding="utf-8"?>
-<p:sldLayout xmlns:a="http://schemas.openxmlformats.org/drawingml/2006/main" xmlns:r="http://schemas.openxmlformats.org/officeDocument/2006/relationships" xmlns:mc="http://schemas.openxmlformats.org/markup-compatibility/2006" xmlns:mv="urn:schemas-microsoft-com:mac:vml" xmlns:p="http://schemas.openxmlformats.org/presentationml/2006/main" xmlns:c="http://schemas.openxmlformats.org/drawingml/2006/chart" xmlns:dgm="http://schemas.openxmlformats.org/drawingml/2006/diagram" xmlns:o="urn:schemas-microsoft-com:office:office" xmlns:v="urn:schemas-microsoft-com:vml" xmlns:pvml="urn:schemas-microsoft-com:office:powerpoint" xmlns:com="http://schemas.openxmlformats.org/drawingml/2006/compatibility" xmlns:p14="http://schemas.microsoft.com/office/powerpoint/2010/main" xmlns:p15="http://schemas.microsoft.com/office/powerpoint/2012/main" xmlns:ahyp="http://schemas.microsoft.com/office/drawing/2018/hyperlinkcolor" matchingName="Title and body" type="tx">
+<p:sldLayout xmlns:a="http://schemas.openxmlformats.org/drawingml/2006/main" xmlns:r="http://schemas.openxmlformats.org/officeDocument/2006/relationships" xmlns:p="http://schemas.openxmlformats.org/presentationml/2006/main" matchingName="Title and body" type="tx">
   <p:cSld name="TITLE_AND_BODY">
     <p:spTree>
       <p:nvGrpSpPr>
-        <p:cNvPr id="26" name="Shape 26"/>
+        <p:cNvPr id="1" name="Shape 26"/>
         <p:cNvGrpSpPr/>
         <p:nvPr/>
       </p:nvGrpSpPr>
@@ -3637,19 +3712,22 @@
             <a:avLst/>
           </a:prstGeom>
           <a:solidFill>
-            <a:schemeClr val="lt2"/>
+            <a:schemeClr val="accent1">
+              <a:lumMod val="20000"/>
+              <a:lumOff val="80000"/>
+            </a:schemeClr>
           </a:solidFill>
           <a:ln>
             <a:noFill/>
           </a:ln>
         </p:spPr>
         <p:txBody>
-          <a:bodyPr anchorCtr="0" anchor="ctr" bIns="91425" lIns="91425" spcFirstLastPara="1" rIns="91425" wrap="square" tIns="91425">
+          <a:bodyPr spcFirstLastPara="1" wrap="square" lIns="91425" tIns="91425" rIns="91425" bIns="91425" anchor="ctr" anchorCtr="0">
             <a:noAutofit/>
           </a:bodyPr>
           <a:lstStyle/>
           <a:p>
-            <a:pPr indent="0" lvl="0" marL="0" rtl="0" algn="l">
+            <a:pPr marL="0" lvl="0" indent="0" algn="l" rtl="0">
               <a:spcBef>
                 <a:spcPts val="0"/>
               </a:spcBef>
@@ -3658,282 +3736,289 @@
               </a:spcAft>
               <a:buNone/>
             </a:pPr>
-            <a:r>
-              <a:t/>
-            </a:r>
+            <a:endParaRPr dirty="0"/>
+          </a:p>
+        </p:txBody>
+      </p:sp>
+      <p:sp>
+        <p:nvSpPr>
+          <p:cNvPr id="28" name="Google Shape;28;p4"/>
+          <p:cNvSpPr txBox="1">
+            <a:spLocks noGrp="1"/>
+          </p:cNvSpPr>
+          <p:nvPr>
+            <p:ph type="title"/>
+          </p:nvPr>
+        </p:nvSpPr>
+        <p:spPr>
+          <a:xfrm>
+            <a:off x="460750" y="-23700"/>
+            <a:ext cx="7688700" cy="535200"/>
+          </a:xfrm>
+          <a:prstGeom prst="rect">
+            <a:avLst/>
+          </a:prstGeom>
+        </p:spPr>
+        <p:txBody>
+          <a:bodyPr spcFirstLastPara="1" wrap="square" lIns="91425" tIns="91425" rIns="91425" bIns="91425" anchor="t" anchorCtr="0">
+            <a:normAutofit/>
+          </a:bodyPr>
+          <a:lstStyle>
+            <a:lvl1pPr lvl="0">
+              <a:spcBef>
+                <a:spcPts val="0"/>
+              </a:spcBef>
+              <a:spcAft>
+                <a:spcPts val="0"/>
+              </a:spcAft>
+              <a:buSzPts val="2600"/>
+              <a:buNone/>
+              <a:defRPr sz="2600"/>
+            </a:lvl1pPr>
+            <a:lvl2pPr lvl="1">
+              <a:spcBef>
+                <a:spcPts val="0"/>
+              </a:spcBef>
+              <a:spcAft>
+                <a:spcPts val="0"/>
+              </a:spcAft>
+              <a:buSzPts val="2600"/>
+              <a:buNone/>
+              <a:defRPr sz="2600"/>
+            </a:lvl2pPr>
+            <a:lvl3pPr lvl="2">
+              <a:spcBef>
+                <a:spcPts val="0"/>
+              </a:spcBef>
+              <a:spcAft>
+                <a:spcPts val="0"/>
+              </a:spcAft>
+              <a:buSzPts val="2600"/>
+              <a:buNone/>
+              <a:defRPr sz="2600"/>
+            </a:lvl3pPr>
+            <a:lvl4pPr lvl="3">
+              <a:spcBef>
+                <a:spcPts val="0"/>
+              </a:spcBef>
+              <a:spcAft>
+                <a:spcPts val="0"/>
+              </a:spcAft>
+              <a:buSzPts val="2600"/>
+              <a:buNone/>
+              <a:defRPr sz="2600"/>
+            </a:lvl4pPr>
+            <a:lvl5pPr lvl="4">
+              <a:spcBef>
+                <a:spcPts val="0"/>
+              </a:spcBef>
+              <a:spcAft>
+                <a:spcPts val="0"/>
+              </a:spcAft>
+              <a:buSzPts val="2600"/>
+              <a:buNone/>
+              <a:defRPr sz="2600"/>
+            </a:lvl5pPr>
+            <a:lvl6pPr lvl="5">
+              <a:spcBef>
+                <a:spcPts val="0"/>
+              </a:spcBef>
+              <a:spcAft>
+                <a:spcPts val="0"/>
+              </a:spcAft>
+              <a:buSzPts val="2600"/>
+              <a:buNone/>
+              <a:defRPr sz="2600"/>
+            </a:lvl6pPr>
+            <a:lvl7pPr lvl="6">
+              <a:spcBef>
+                <a:spcPts val="0"/>
+              </a:spcBef>
+              <a:spcAft>
+                <a:spcPts val="0"/>
+              </a:spcAft>
+              <a:buSzPts val="2600"/>
+              <a:buNone/>
+              <a:defRPr sz="2600"/>
+            </a:lvl7pPr>
+            <a:lvl8pPr lvl="7">
+              <a:spcBef>
+                <a:spcPts val="0"/>
+              </a:spcBef>
+              <a:spcAft>
+                <a:spcPts val="0"/>
+              </a:spcAft>
+              <a:buSzPts val="2600"/>
+              <a:buNone/>
+              <a:defRPr sz="2600"/>
+            </a:lvl8pPr>
+            <a:lvl9pPr lvl="8">
+              <a:spcBef>
+                <a:spcPts val="0"/>
+              </a:spcBef>
+              <a:spcAft>
+                <a:spcPts val="0"/>
+              </a:spcAft>
+              <a:buSzPts val="2600"/>
+              <a:buNone/>
+              <a:defRPr sz="2600"/>
+            </a:lvl9pPr>
+          </a:lstStyle>
+          <a:p>
             <a:endParaRPr/>
           </a:p>
         </p:txBody>
       </p:sp>
       <p:sp>
         <p:nvSpPr>
-          <p:cNvPr id="28" name="Google Shape;28;p4"/>
-          <p:cNvSpPr txBox="1"/>
+          <p:cNvPr id="29" name="Google Shape;29;p4"/>
+          <p:cNvSpPr txBox="1">
+            <a:spLocks noGrp="1"/>
+          </p:cNvSpPr>
           <p:nvPr>
-            <p:ph type="title"/>
+            <p:ph type="body" idx="1"/>
           </p:nvPr>
         </p:nvSpPr>
         <p:spPr>
           <a:xfrm>
-            <a:off x="460750" y="-23700"/>
-            <a:ext cx="7688700" cy="535200"/>
+            <a:off x="729450" y="1297975"/>
+            <a:ext cx="7688700" cy="3042000"/>
           </a:xfrm>
           <a:prstGeom prst="rect">
             <a:avLst/>
           </a:prstGeom>
         </p:spPr>
         <p:txBody>
-          <a:bodyPr anchorCtr="0" anchor="t" bIns="91425" lIns="91425" spcFirstLastPara="1" rIns="91425" wrap="square" tIns="91425">
+          <a:bodyPr spcFirstLastPara="1" wrap="square" lIns="91425" tIns="91425" rIns="91425" bIns="91425" anchor="t" anchorCtr="0">
             <a:normAutofit/>
           </a:bodyPr>
           <a:lstStyle>
-            <a:lvl1pPr lvl="0">
-              <a:spcBef>
-                <a:spcPts val="0"/>
-              </a:spcBef>
-              <a:spcAft>
-                <a:spcPts val="0"/>
-              </a:spcAft>
-              <a:buSzPts val="2600"/>
-              <a:buNone/>
-              <a:defRPr sz="2600"/>
+            <a:lvl1pPr marL="457200" lvl="0" indent="-311150">
+              <a:spcBef>
+                <a:spcPts val="0"/>
+              </a:spcBef>
+              <a:spcAft>
+                <a:spcPts val="0"/>
+              </a:spcAft>
+              <a:buSzPts val="1300"/>
+              <a:buChar char="●"/>
+              <a:defRPr/>
             </a:lvl1pPr>
-            <a:lvl2pPr lvl="1">
-              <a:spcBef>
-                <a:spcPts val="0"/>
-              </a:spcBef>
-              <a:spcAft>
-                <a:spcPts val="0"/>
-              </a:spcAft>
-              <a:buSzPts val="2600"/>
-              <a:buNone/>
-              <a:defRPr sz="2600"/>
+            <a:lvl2pPr marL="914400" lvl="1" indent="-298450">
+              <a:spcBef>
+                <a:spcPts val="0"/>
+              </a:spcBef>
+              <a:spcAft>
+                <a:spcPts val="0"/>
+              </a:spcAft>
+              <a:buSzPts val="1100"/>
+              <a:buChar char="○"/>
+              <a:defRPr/>
             </a:lvl2pPr>
-            <a:lvl3pPr lvl="2">
-              <a:spcBef>
-                <a:spcPts val="0"/>
-              </a:spcBef>
-              <a:spcAft>
-                <a:spcPts val="0"/>
-              </a:spcAft>
-              <a:buSzPts val="2600"/>
-              <a:buNone/>
-              <a:defRPr sz="2600"/>
+            <a:lvl3pPr marL="1371600" lvl="2" indent="-298450">
+              <a:spcBef>
+                <a:spcPts val="0"/>
+              </a:spcBef>
+              <a:spcAft>
+                <a:spcPts val="0"/>
+              </a:spcAft>
+              <a:buSzPts val="1100"/>
+              <a:buChar char="■"/>
+              <a:defRPr/>
             </a:lvl3pPr>
-            <a:lvl4pPr lvl="3">
-              <a:spcBef>
-                <a:spcPts val="0"/>
-              </a:spcBef>
-              <a:spcAft>
-                <a:spcPts val="0"/>
-              </a:spcAft>
-              <a:buSzPts val="2600"/>
-              <a:buNone/>
-              <a:defRPr sz="2600"/>
+            <a:lvl4pPr marL="1828800" lvl="3" indent="-298450">
+              <a:spcBef>
+                <a:spcPts val="0"/>
+              </a:spcBef>
+              <a:spcAft>
+                <a:spcPts val="0"/>
+              </a:spcAft>
+              <a:buSzPts val="1100"/>
+              <a:buChar char="●"/>
+              <a:defRPr/>
             </a:lvl4pPr>
-            <a:lvl5pPr lvl="4">
-              <a:spcBef>
-                <a:spcPts val="0"/>
-              </a:spcBef>
-              <a:spcAft>
-                <a:spcPts val="0"/>
-              </a:spcAft>
-              <a:buSzPts val="2600"/>
-              <a:buNone/>
-              <a:defRPr sz="2600"/>
+            <a:lvl5pPr marL="2286000" lvl="4" indent="-298450">
+              <a:spcBef>
+                <a:spcPts val="0"/>
+              </a:spcBef>
+              <a:spcAft>
+                <a:spcPts val="0"/>
+              </a:spcAft>
+              <a:buSzPts val="1100"/>
+              <a:buChar char="○"/>
+              <a:defRPr/>
             </a:lvl5pPr>
-            <a:lvl6pPr lvl="5">
-              <a:spcBef>
-                <a:spcPts val="0"/>
-              </a:spcBef>
-              <a:spcAft>
-                <a:spcPts val="0"/>
-              </a:spcAft>
-              <a:buSzPts val="2600"/>
-              <a:buNone/>
-              <a:defRPr sz="2600"/>
+            <a:lvl6pPr marL="2743200" lvl="5" indent="-298450">
+              <a:spcBef>
+                <a:spcPts val="0"/>
+              </a:spcBef>
+              <a:spcAft>
+                <a:spcPts val="0"/>
+              </a:spcAft>
+              <a:buSzPts val="1100"/>
+              <a:buChar char="■"/>
+              <a:defRPr/>
             </a:lvl6pPr>
-            <a:lvl7pPr lvl="6">
-              <a:spcBef>
-                <a:spcPts val="0"/>
-              </a:spcBef>
-              <a:spcAft>
-                <a:spcPts val="0"/>
-              </a:spcAft>
-              <a:buSzPts val="2600"/>
-              <a:buNone/>
-              <a:defRPr sz="2600"/>
+            <a:lvl7pPr marL="3200400" lvl="6" indent="-298450">
+              <a:spcBef>
+                <a:spcPts val="0"/>
+              </a:spcBef>
+              <a:spcAft>
+                <a:spcPts val="0"/>
+              </a:spcAft>
+              <a:buSzPts val="1100"/>
+              <a:buChar char="●"/>
+              <a:defRPr/>
             </a:lvl7pPr>
-            <a:lvl8pPr lvl="7">
-              <a:spcBef>
-                <a:spcPts val="0"/>
-              </a:spcBef>
-              <a:spcAft>
-                <a:spcPts val="0"/>
-              </a:spcAft>
-              <a:buSzPts val="2600"/>
-              <a:buNone/>
-              <a:defRPr sz="2600"/>
+            <a:lvl8pPr marL="3657600" lvl="7" indent="-298450">
+              <a:spcBef>
+                <a:spcPts val="0"/>
+              </a:spcBef>
+              <a:spcAft>
+                <a:spcPts val="0"/>
+              </a:spcAft>
+              <a:buSzPts val="1100"/>
+              <a:buChar char="○"/>
+              <a:defRPr/>
             </a:lvl8pPr>
-            <a:lvl9pPr lvl="8">
-              <a:spcBef>
-                <a:spcPts val="0"/>
-              </a:spcBef>
-              <a:spcAft>
-                <a:spcPts val="0"/>
-              </a:spcAft>
-              <a:buSzPts val="2600"/>
-              <a:buNone/>
-              <a:defRPr sz="2600"/>
+            <a:lvl9pPr marL="4114800" lvl="8" indent="-298450">
+              <a:spcBef>
+                <a:spcPts val="0"/>
+              </a:spcBef>
+              <a:spcAft>
+                <a:spcPts val="0"/>
+              </a:spcAft>
+              <a:buSzPts val="1100"/>
+              <a:buChar char="■"/>
+              <a:defRPr/>
             </a:lvl9pPr>
           </a:lstStyle>
-          <a:p/>
+          <a:p>
+            <a:endParaRPr/>
+          </a:p>
         </p:txBody>
       </p:sp>
       <p:sp>
         <p:nvSpPr>
-          <p:cNvPr id="29" name="Google Shape;29;p4"/>
-          <p:cNvSpPr txBox="1"/>
+          <p:cNvPr id="30" name="Google Shape;30;p4"/>
+          <p:cNvSpPr txBox="1">
+            <a:spLocks noGrp="1"/>
+          </p:cNvSpPr>
           <p:nvPr>
-            <p:ph idx="1" type="body"/>
+            <p:ph type="sldNum" idx="12"/>
           </p:nvPr>
         </p:nvSpPr>
         <p:spPr>
           <a:xfrm>
-            <a:off x="729450" y="1297975"/>
-            <a:ext cx="7688700" cy="3042000"/>
+            <a:off x="8536302" y="4749851"/>
+            <a:ext cx="548700" cy="393600"/>
           </a:xfrm>
           <a:prstGeom prst="rect">
             <a:avLst/>
           </a:prstGeom>
         </p:spPr>
         <p:txBody>
-          <a:bodyPr anchorCtr="0" anchor="t" bIns="91425" lIns="91425" spcFirstLastPara="1" rIns="91425" wrap="square" tIns="91425">
-            <a:normAutofit/>
-          </a:bodyPr>
-          <a:lstStyle>
-            <a:lvl1pPr indent="-311150" lvl="0" marL="457200">
-              <a:spcBef>
-                <a:spcPts val="0"/>
-              </a:spcBef>
-              <a:spcAft>
-                <a:spcPts val="0"/>
-              </a:spcAft>
-              <a:buSzPts val="1300"/>
-              <a:buChar char="●"/>
-              <a:defRPr/>
-            </a:lvl1pPr>
-            <a:lvl2pPr indent="-298450" lvl="1" marL="914400">
-              <a:spcBef>
-                <a:spcPts val="0"/>
-              </a:spcBef>
-              <a:spcAft>
-                <a:spcPts val="0"/>
-              </a:spcAft>
-              <a:buSzPts val="1100"/>
-              <a:buChar char="○"/>
-              <a:defRPr/>
-            </a:lvl2pPr>
-            <a:lvl3pPr indent="-298450" lvl="2" marL="1371600">
-              <a:spcBef>
-                <a:spcPts val="0"/>
-              </a:spcBef>
-              <a:spcAft>
-                <a:spcPts val="0"/>
-              </a:spcAft>
-              <a:buSzPts val="1100"/>
-              <a:buChar char="■"/>
-              <a:defRPr/>
-            </a:lvl3pPr>
-            <a:lvl4pPr indent="-298450" lvl="3" marL="1828800">
-              <a:spcBef>
-                <a:spcPts val="0"/>
-              </a:spcBef>
-              <a:spcAft>
-                <a:spcPts val="0"/>
-              </a:spcAft>
-              <a:buSzPts val="1100"/>
-              <a:buChar char="●"/>
-              <a:defRPr/>
-            </a:lvl4pPr>
-            <a:lvl5pPr indent="-298450" lvl="4" marL="2286000">
-              <a:spcBef>
-                <a:spcPts val="0"/>
-              </a:spcBef>
-              <a:spcAft>
-                <a:spcPts val="0"/>
-              </a:spcAft>
-              <a:buSzPts val="1100"/>
-              <a:buChar char="○"/>
-              <a:defRPr/>
-            </a:lvl5pPr>
-            <a:lvl6pPr indent="-298450" lvl="5" marL="2743200">
-              <a:spcBef>
-                <a:spcPts val="0"/>
-              </a:spcBef>
-              <a:spcAft>
-                <a:spcPts val="0"/>
-              </a:spcAft>
-              <a:buSzPts val="1100"/>
-              <a:buChar char="■"/>
-              <a:defRPr/>
-            </a:lvl6pPr>
-            <a:lvl7pPr indent="-298450" lvl="6" marL="3200400">
-              <a:spcBef>
-                <a:spcPts val="0"/>
-              </a:spcBef>
-              <a:spcAft>
-                <a:spcPts val="0"/>
-              </a:spcAft>
-              <a:buSzPts val="1100"/>
-              <a:buChar char="●"/>
-              <a:defRPr/>
-            </a:lvl7pPr>
-            <a:lvl8pPr indent="-298450" lvl="7" marL="3657600">
-              <a:spcBef>
-                <a:spcPts val="0"/>
-              </a:spcBef>
-              <a:spcAft>
-                <a:spcPts val="0"/>
-              </a:spcAft>
-              <a:buSzPts val="1100"/>
-              <a:buChar char="○"/>
-              <a:defRPr/>
-            </a:lvl8pPr>
-            <a:lvl9pPr indent="-298450" lvl="8" marL="4114800">
-              <a:spcBef>
-                <a:spcPts val="0"/>
-              </a:spcBef>
-              <a:spcAft>
-                <a:spcPts val="0"/>
-              </a:spcAft>
-              <a:buSzPts val="1100"/>
-              <a:buChar char="■"/>
-              <a:defRPr/>
-            </a:lvl9pPr>
-          </a:lstStyle>
-          <a:p/>
-        </p:txBody>
-      </p:sp>
-      <p:sp>
-        <p:nvSpPr>
-          <p:cNvPr id="30" name="Google Shape;30;p4"/>
-          <p:cNvSpPr txBox="1"/>
-          <p:nvPr>
-            <p:ph idx="12" type="sldNum"/>
-          </p:nvPr>
-        </p:nvSpPr>
-        <p:spPr>
-          <a:xfrm>
-            <a:off x="8536302" y="4749851"/>
-            <a:ext cx="548700" cy="393600"/>
-          </a:xfrm>
-          <a:prstGeom prst="rect">
-            <a:avLst/>
-          </a:prstGeom>
-        </p:spPr>
-        <p:txBody>
-          <a:bodyPr anchorCtr="0" anchor="ctr" bIns="91425" lIns="91425" spcFirstLastPara="1" rIns="91425" wrap="square" tIns="91425">
+          <a:bodyPr spcFirstLastPara="1" wrap="square" lIns="91425" tIns="91425" rIns="91425" bIns="91425" anchor="ctr" anchorCtr="0">
             <a:normAutofit/>
           </a:bodyPr>
           <a:lstStyle>
@@ -3975,7 +4060,7 @@
             </a:lvl9pPr>
           </a:lstStyle>
           <a:p>
-            <a:pPr indent="0" lvl="0" marL="0" rtl="0" algn="r">
+            <a:pPr marL="0" lvl="0" indent="0" algn="r" rtl="0">
               <a:spcBef>
                 <a:spcPts val="0"/>
               </a:spcBef>
@@ -4028,12 +4113,12 @@
             </a:ln>
           </p:spPr>
           <p:txBody>
-            <a:bodyPr anchorCtr="0" anchor="ctr" bIns="91425" lIns="91425" spcFirstLastPara="1" rIns="91425" wrap="square" tIns="91425">
+            <a:bodyPr spcFirstLastPara="1" wrap="square" lIns="91425" tIns="91425" rIns="91425" bIns="91425" anchor="ctr" anchorCtr="0">
               <a:noAutofit/>
             </a:bodyPr>
             <a:lstStyle/>
             <a:p>
-              <a:pPr indent="0" lvl="0" marL="0" rtl="0" algn="l">
+              <a:pPr marL="0" lvl="0" indent="0" algn="l" rtl="0">
                 <a:spcBef>
                   <a:spcPts val="0"/>
                 </a:spcBef>
@@ -4042,9 +4127,6 @@
                 </a:spcAft>
                 <a:buNone/>
               </a:pPr>
-              <a:r>
-                <a:t/>
-              </a:r>
               <a:endParaRPr/>
             </a:p>
           </p:txBody>
@@ -4071,12 +4153,12 @@
             </a:ln>
           </p:spPr>
           <p:txBody>
-            <a:bodyPr anchorCtr="0" anchor="ctr" bIns="91425" lIns="91425" spcFirstLastPara="1" rIns="91425" wrap="square" tIns="91425">
+            <a:bodyPr spcFirstLastPara="1" wrap="square" lIns="91425" tIns="91425" rIns="91425" bIns="91425" anchor="ctr" anchorCtr="0">
               <a:noAutofit/>
             </a:bodyPr>
             <a:lstStyle/>
             <a:p>
-              <a:pPr indent="0" lvl="0" marL="0" rtl="0" algn="l">
+              <a:pPr marL="0" lvl="0" indent="0" algn="l" rtl="0">
                 <a:spcBef>
                   <a:spcPts val="0"/>
                 </a:spcBef>
@@ -4085,9 +4167,6 @@
                 </a:spcAft>
                 <a:buNone/>
               </a:pPr>
-              <a:r>
-                <a:t/>
-              </a:r>
               <a:endParaRPr/>
             </a:p>
           </p:txBody>
@@ -4130,11 +4209,11 @@
 </file>
 
 <file path=ppt/slideLayouts/slideLayout4.xml><?xml version="1.0" encoding="utf-8"?>
-<p:sldLayout xmlns:a="http://schemas.openxmlformats.org/drawingml/2006/main" xmlns:r="http://schemas.openxmlformats.org/officeDocument/2006/relationships" xmlns:mc="http://schemas.openxmlformats.org/markup-compatibility/2006" xmlns:mv="urn:schemas-microsoft-com:mac:vml" xmlns:p="http://schemas.openxmlformats.org/presentationml/2006/main" xmlns:c="http://schemas.openxmlformats.org/drawingml/2006/chart" xmlns:dgm="http://schemas.openxmlformats.org/drawingml/2006/diagram" xmlns:o="urn:schemas-microsoft-com:office:office" xmlns:v="urn:schemas-microsoft-com:vml" xmlns:pvml="urn:schemas-microsoft-com:office:powerpoint" xmlns:com="http://schemas.openxmlformats.org/drawingml/2006/compatibility" xmlns:p14="http://schemas.microsoft.com/office/powerpoint/2010/main" xmlns:p15="http://schemas.microsoft.com/office/powerpoint/2012/main" xmlns:ahyp="http://schemas.microsoft.com/office/drawing/2018/hyperlinkcolor" matchingName="Title and two columns" type="twoColTx">
+<p:sldLayout xmlns:a="http://schemas.openxmlformats.org/drawingml/2006/main" xmlns:r="http://schemas.openxmlformats.org/officeDocument/2006/relationships" xmlns:p="http://schemas.openxmlformats.org/presentationml/2006/main" matchingName="Title and two columns" type="twoColTx">
   <p:cSld name="TITLE_AND_TWO_COLUMNS">
     <p:spTree>
       <p:nvGrpSpPr>
-        <p:cNvPr id="35" name="Shape 35"/>
+        <p:cNvPr id="1" name="Shape 35"/>
         <p:cNvGrpSpPr/>
         <p:nvPr/>
       </p:nvGrpSpPr>
@@ -4168,12 +4247,12 @@
           </a:ln>
         </p:spPr>
         <p:txBody>
-          <a:bodyPr anchorCtr="0" anchor="ctr" bIns="91425" lIns="91425" spcFirstLastPara="1" rIns="91425" wrap="square" tIns="91425">
+          <a:bodyPr spcFirstLastPara="1" wrap="square" lIns="91425" tIns="91425" rIns="91425" bIns="91425" anchor="ctr" anchorCtr="0">
             <a:noAutofit/>
           </a:bodyPr>
           <a:lstStyle/>
           <a:p>
-            <a:pPr indent="0" lvl="0" marL="0" rtl="0" algn="l">
+            <a:pPr marL="0" lvl="0" indent="0" algn="l" rtl="0">
               <a:spcBef>
                 <a:spcPts val="0"/>
               </a:spcBef>
@@ -4182,9 +4261,6 @@
               </a:spcAft>
               <a:buNone/>
             </a:pPr>
-            <a:r>
-              <a:t/>
-            </a:r>
             <a:endParaRPr/>
           </a:p>
         </p:txBody>
@@ -4211,12 +4287,12 @@
           </a:ln>
         </p:spPr>
         <p:txBody>
-          <a:bodyPr anchorCtr="0" anchor="ctr" bIns="91425" lIns="91425" spcFirstLastPara="1" rIns="91425" wrap="square" tIns="91425">
+          <a:bodyPr spcFirstLastPara="1" wrap="square" lIns="91425" tIns="91425" rIns="91425" bIns="91425" anchor="ctr" anchorCtr="0">
             <a:noAutofit/>
           </a:bodyPr>
           <a:lstStyle/>
           <a:p>
-            <a:pPr indent="0" lvl="0" marL="0" rtl="0" algn="l">
+            <a:pPr marL="0" lvl="0" indent="0" algn="l" rtl="0">
               <a:spcBef>
                 <a:spcPts val="0"/>
               </a:spcBef>
@@ -4225,9 +4301,6 @@
               </a:spcAft>
               <a:buNone/>
             </a:pPr>
-            <a:r>
-              <a:t/>
-            </a:r>
             <a:endParaRPr/>
           </a:p>
         </p:txBody>
@@ -4235,9 +4308,11 @@
       <p:sp>
         <p:nvSpPr>
           <p:cNvPr id="38" name="Google Shape;38;p5"/>
-          <p:cNvSpPr txBox="1"/>
+          <p:cNvSpPr txBox="1">
+            <a:spLocks noGrp="1"/>
+          </p:cNvSpPr>
           <p:nvPr>
-            <p:ph idx="1" type="body"/>
+            <p:ph type="body" idx="1"/>
           </p:nvPr>
         </p:nvSpPr>
         <p:spPr>
@@ -4250,11 +4325,11 @@
           </a:prstGeom>
         </p:spPr>
         <p:txBody>
-          <a:bodyPr anchorCtr="0" anchor="t" bIns="91425" lIns="91425" spcFirstLastPara="1" rIns="91425" wrap="square" tIns="91425">
+          <a:bodyPr spcFirstLastPara="1" wrap="square" lIns="91425" tIns="91425" rIns="91425" bIns="91425" anchor="t" anchorCtr="0">
             <a:normAutofit/>
           </a:bodyPr>
           <a:lstStyle>
-            <a:lvl1pPr indent="-311150" lvl="0" marL="457200">
+            <a:lvl1pPr marL="457200" lvl="0" indent="-311150">
               <a:spcBef>
                 <a:spcPts val="0"/>
               </a:spcBef>
@@ -4265,7 +4340,7 @@
               <a:buChar char="●"/>
               <a:defRPr/>
             </a:lvl1pPr>
-            <a:lvl2pPr indent="-298450" lvl="1" marL="914400">
+            <a:lvl2pPr marL="914400" lvl="1" indent="-298450">
               <a:spcBef>
                 <a:spcPts val="0"/>
               </a:spcBef>
@@ -4276,7 +4351,7 @@
               <a:buChar char="○"/>
               <a:defRPr/>
             </a:lvl2pPr>
-            <a:lvl3pPr indent="-298450" lvl="2" marL="1371600">
+            <a:lvl3pPr marL="1371600" lvl="2" indent="-298450">
               <a:spcBef>
                 <a:spcPts val="0"/>
               </a:spcBef>
@@ -4287,7 +4362,7 @@
               <a:buChar char="■"/>
               <a:defRPr/>
             </a:lvl3pPr>
-            <a:lvl4pPr indent="-298450" lvl="3" marL="1828800">
+            <a:lvl4pPr marL="1828800" lvl="3" indent="-298450">
               <a:spcBef>
                 <a:spcPts val="0"/>
               </a:spcBef>
@@ -4298,7 +4373,7 @@
               <a:buChar char="●"/>
               <a:defRPr/>
             </a:lvl4pPr>
-            <a:lvl5pPr indent="-298450" lvl="4" marL="2286000">
+            <a:lvl5pPr marL="2286000" lvl="4" indent="-298450">
               <a:spcBef>
                 <a:spcPts val="0"/>
               </a:spcBef>
@@ -4309,7 +4384,7 @@
               <a:buChar char="○"/>
               <a:defRPr/>
             </a:lvl5pPr>
-            <a:lvl6pPr indent="-298450" lvl="5" marL="2743200">
+            <a:lvl6pPr marL="2743200" lvl="5" indent="-298450">
               <a:spcBef>
                 <a:spcPts val="0"/>
               </a:spcBef>
@@ -4320,7 +4395,7 @@
               <a:buChar char="■"/>
               <a:defRPr/>
             </a:lvl6pPr>
-            <a:lvl7pPr indent="-298450" lvl="6" marL="3200400">
+            <a:lvl7pPr marL="3200400" lvl="6" indent="-298450">
               <a:spcBef>
                 <a:spcPts val="0"/>
               </a:spcBef>
@@ -4331,7 +4406,7 @@
               <a:buChar char="●"/>
               <a:defRPr/>
             </a:lvl7pPr>
-            <a:lvl8pPr indent="-298450" lvl="7" marL="3657600">
+            <a:lvl8pPr marL="3657600" lvl="7" indent="-298450">
               <a:spcBef>
                 <a:spcPts val="0"/>
               </a:spcBef>
@@ -4342,7 +4417,7 @@
               <a:buChar char="○"/>
               <a:defRPr/>
             </a:lvl8pPr>
-            <a:lvl9pPr indent="-298450" lvl="8" marL="4114800">
+            <a:lvl9pPr marL="4114800" lvl="8" indent="-298450">
               <a:spcBef>
                 <a:spcPts val="0"/>
               </a:spcBef>
@@ -4354,15 +4429,19 @@
               <a:defRPr/>
             </a:lvl9pPr>
           </a:lstStyle>
-          <a:p/>
+          <a:p>
+            <a:endParaRPr/>
+          </a:p>
         </p:txBody>
       </p:sp>
       <p:sp>
         <p:nvSpPr>
           <p:cNvPr id="39" name="Google Shape;39;p5"/>
-          <p:cNvSpPr txBox="1"/>
+          <p:cNvSpPr txBox="1">
+            <a:spLocks noGrp="1"/>
+          </p:cNvSpPr>
           <p:nvPr>
-            <p:ph idx="2" type="body"/>
+            <p:ph type="body" idx="2"/>
           </p:nvPr>
         </p:nvSpPr>
         <p:spPr>
@@ -4375,11 +4454,11 @@
           </a:prstGeom>
         </p:spPr>
         <p:txBody>
-          <a:bodyPr anchorCtr="0" anchor="t" bIns="91425" lIns="91425" spcFirstLastPara="1" rIns="91425" wrap="square" tIns="91425">
+          <a:bodyPr spcFirstLastPara="1" wrap="square" lIns="91425" tIns="91425" rIns="91425" bIns="91425" anchor="t" anchorCtr="0">
             <a:normAutofit/>
           </a:bodyPr>
           <a:lstStyle>
-            <a:lvl1pPr indent="-311150" lvl="0" marL="457200">
+            <a:lvl1pPr marL="457200" lvl="0" indent="-311150">
               <a:spcBef>
                 <a:spcPts val="0"/>
               </a:spcBef>
@@ -4390,7 +4469,7 @@
               <a:buChar char="●"/>
               <a:defRPr/>
             </a:lvl1pPr>
-            <a:lvl2pPr indent="-298450" lvl="1" marL="914400">
+            <a:lvl2pPr marL="914400" lvl="1" indent="-298450">
               <a:spcBef>
                 <a:spcPts val="0"/>
               </a:spcBef>
@@ -4401,7 +4480,7 @@
               <a:buChar char="○"/>
               <a:defRPr/>
             </a:lvl2pPr>
-            <a:lvl3pPr indent="-298450" lvl="2" marL="1371600">
+            <a:lvl3pPr marL="1371600" lvl="2" indent="-298450">
               <a:spcBef>
                 <a:spcPts val="0"/>
               </a:spcBef>
@@ -4412,7 +4491,7 @@
               <a:buChar char="■"/>
               <a:defRPr/>
             </a:lvl3pPr>
-            <a:lvl4pPr indent="-298450" lvl="3" marL="1828800">
+            <a:lvl4pPr marL="1828800" lvl="3" indent="-298450">
               <a:spcBef>
                 <a:spcPts val="0"/>
               </a:spcBef>
@@ -4423,7 +4502,7 @@
               <a:buChar char="●"/>
               <a:defRPr/>
             </a:lvl4pPr>
-            <a:lvl5pPr indent="-298450" lvl="4" marL="2286000">
+            <a:lvl5pPr marL="2286000" lvl="4" indent="-298450">
               <a:spcBef>
                 <a:spcPts val="0"/>
               </a:spcBef>
@@ -4434,7 +4513,7 @@
               <a:buChar char="○"/>
               <a:defRPr/>
             </a:lvl5pPr>
-            <a:lvl6pPr indent="-298450" lvl="5" marL="2743200">
+            <a:lvl6pPr marL="2743200" lvl="5" indent="-298450">
               <a:spcBef>
                 <a:spcPts val="0"/>
               </a:spcBef>
@@ -4445,7 +4524,7 @@
               <a:buChar char="■"/>
               <a:defRPr/>
             </a:lvl6pPr>
-            <a:lvl7pPr indent="-298450" lvl="6" marL="3200400">
+            <a:lvl7pPr marL="3200400" lvl="6" indent="-298450">
               <a:spcBef>
                 <a:spcPts val="0"/>
               </a:spcBef>
@@ -4456,7 +4535,7 @@
               <a:buChar char="●"/>
               <a:defRPr/>
             </a:lvl7pPr>
-            <a:lvl8pPr indent="-298450" lvl="7" marL="3657600">
+            <a:lvl8pPr marL="3657600" lvl="7" indent="-298450">
               <a:spcBef>
                 <a:spcPts val="0"/>
               </a:spcBef>
@@ -4467,7 +4546,7 @@
               <a:buChar char="○"/>
               <a:defRPr/>
             </a:lvl8pPr>
-            <a:lvl9pPr indent="-298450" lvl="8" marL="4114800">
+            <a:lvl9pPr marL="4114800" lvl="8" indent="-298450">
               <a:spcBef>
                 <a:spcPts val="0"/>
               </a:spcBef>
@@ -4479,15 +4558,19 @@
               <a:defRPr/>
             </a:lvl9pPr>
           </a:lstStyle>
-          <a:p/>
+          <a:p>
+            <a:endParaRPr/>
+          </a:p>
         </p:txBody>
       </p:sp>
       <p:sp>
         <p:nvSpPr>
           <p:cNvPr id="40" name="Google Shape;40;p5"/>
-          <p:cNvSpPr txBox="1"/>
+          <p:cNvSpPr txBox="1">
+            <a:spLocks noGrp="1"/>
+          </p:cNvSpPr>
           <p:nvPr>
-            <p:ph idx="12" type="sldNum"/>
+            <p:ph type="sldNum" idx="12"/>
           </p:nvPr>
         </p:nvSpPr>
         <p:spPr>
@@ -4500,7 +4583,7 @@
           </a:prstGeom>
         </p:spPr>
         <p:txBody>
-          <a:bodyPr anchorCtr="0" anchor="ctr" bIns="91425" lIns="91425" spcFirstLastPara="1" rIns="91425" wrap="square" tIns="91425">
+          <a:bodyPr spcFirstLastPara="1" wrap="square" lIns="91425" tIns="91425" rIns="91425" bIns="91425" anchor="ctr" anchorCtr="0">
             <a:normAutofit/>
           </a:bodyPr>
           <a:lstStyle>
@@ -4542,7 +4625,7 @@
             </a:lvl9pPr>
           </a:lstStyle>
           <a:p>
-            <a:pPr indent="0" lvl="0" marL="0" rtl="0" algn="r">
+            <a:pPr marL="0" lvl="0" indent="0" algn="r" rtl="0">
               <a:spcBef>
                 <a:spcPts val="0"/>
               </a:spcBef>
@@ -4595,12 +4678,12 @@
             </a:ln>
           </p:spPr>
           <p:txBody>
-            <a:bodyPr anchorCtr="0" anchor="ctr" bIns="91425" lIns="91425" spcFirstLastPara="1" rIns="91425" wrap="square" tIns="91425">
+            <a:bodyPr spcFirstLastPara="1" wrap="square" lIns="91425" tIns="91425" rIns="91425" bIns="91425" anchor="ctr" anchorCtr="0">
               <a:noAutofit/>
             </a:bodyPr>
             <a:lstStyle/>
             <a:p>
-              <a:pPr indent="0" lvl="0" marL="0" rtl="0" algn="l">
+              <a:pPr marL="0" lvl="0" indent="0" algn="l" rtl="0">
                 <a:spcBef>
                   <a:spcPts val="0"/>
                 </a:spcBef>
@@ -4609,9 +4692,6 @@
                 </a:spcAft>
                 <a:buNone/>
               </a:pPr>
-              <a:r>
-                <a:t/>
-              </a:r>
               <a:endParaRPr/>
             </a:p>
           </p:txBody>
@@ -4638,12 +4718,12 @@
             </a:ln>
           </p:spPr>
           <p:txBody>
-            <a:bodyPr anchorCtr="0" anchor="ctr" bIns="91425" lIns="91425" spcFirstLastPara="1" rIns="91425" wrap="square" tIns="91425">
+            <a:bodyPr spcFirstLastPara="1" wrap="square" lIns="91425" tIns="91425" rIns="91425" bIns="91425" anchor="ctr" anchorCtr="0">
               <a:noAutofit/>
             </a:bodyPr>
             <a:lstStyle/>
             <a:p>
-              <a:pPr indent="0" lvl="0" marL="0" rtl="0" algn="l">
+              <a:pPr marL="0" lvl="0" indent="0" algn="l" rtl="0">
                 <a:spcBef>
                   <a:spcPts val="0"/>
                 </a:spcBef>
@@ -4652,9 +4732,6 @@
                 </a:spcAft>
                 <a:buNone/>
               </a:pPr>
-              <a:r>
-                <a:t/>
-              </a:r>
               <a:endParaRPr/>
             </a:p>
           </p:txBody>
@@ -4663,7 +4740,9 @@
       <p:sp>
         <p:nvSpPr>
           <p:cNvPr id="44" name="Google Shape;44;p5"/>
-          <p:cNvSpPr txBox="1"/>
+          <p:cNvSpPr txBox="1">
+            <a:spLocks noGrp="1"/>
+          </p:cNvSpPr>
           <p:nvPr>
             <p:ph type="title"/>
           </p:nvPr>
@@ -4678,7 +4757,7 @@
           </a:prstGeom>
         </p:spPr>
         <p:txBody>
-          <a:bodyPr anchorCtr="0" anchor="t" bIns="91425" lIns="91425" spcFirstLastPara="1" rIns="91425" wrap="square" tIns="91425">
+          <a:bodyPr spcFirstLastPara="1" wrap="square" lIns="91425" tIns="91425" rIns="91425" bIns="91425" anchor="t" anchorCtr="0">
             <a:normAutofit/>
           </a:bodyPr>
           <a:lstStyle>
@@ -4782,7 +4861,9 @@
               <a:defRPr sz="2600"/>
             </a:lvl9pPr>
           </a:lstStyle>
-          <a:p/>
+          <a:p>
+            <a:endParaRPr/>
+          </a:p>
         </p:txBody>
       </p:sp>
       <p:pic>
@@ -4822,11 +4903,11 @@
 </file>
 
 <file path=ppt/slideLayouts/slideLayout5.xml><?xml version="1.0" encoding="utf-8"?>
-<p:sldLayout xmlns:a="http://schemas.openxmlformats.org/drawingml/2006/main" xmlns:r="http://schemas.openxmlformats.org/officeDocument/2006/relationships" xmlns:mc="http://schemas.openxmlformats.org/markup-compatibility/2006" xmlns:mv="urn:schemas-microsoft-com:mac:vml" xmlns:p="http://schemas.openxmlformats.org/presentationml/2006/main" xmlns:c="http://schemas.openxmlformats.org/drawingml/2006/chart" xmlns:dgm="http://schemas.openxmlformats.org/drawingml/2006/diagram" xmlns:o="urn:schemas-microsoft-com:office:office" xmlns:v="urn:schemas-microsoft-com:vml" xmlns:pvml="urn:schemas-microsoft-com:office:powerpoint" xmlns:com="http://schemas.openxmlformats.org/drawingml/2006/compatibility" xmlns:p14="http://schemas.microsoft.com/office/powerpoint/2010/main" xmlns:p15="http://schemas.microsoft.com/office/powerpoint/2012/main" xmlns:ahyp="http://schemas.microsoft.com/office/drawing/2018/hyperlinkcolor" matchingName="Title only" type="titleOnly">
+<p:sldLayout xmlns:a="http://schemas.openxmlformats.org/drawingml/2006/main" xmlns:r="http://schemas.openxmlformats.org/officeDocument/2006/relationships" xmlns:p="http://schemas.openxmlformats.org/presentationml/2006/main" matchingName="Title only" type="titleOnly">
   <p:cSld name="TITLE_ONLY">
     <p:spTree>
       <p:nvGrpSpPr>
-        <p:cNvPr id="46" name="Shape 46"/>
+        <p:cNvPr id="1" name="Shape 46"/>
         <p:cNvGrpSpPr/>
         <p:nvPr/>
       </p:nvGrpSpPr>
@@ -4860,12 +4941,12 @@
           </a:ln>
         </p:spPr>
         <p:txBody>
-          <a:bodyPr anchorCtr="0" anchor="ctr" bIns="91425" lIns="91425" spcFirstLastPara="1" rIns="91425" wrap="square" tIns="91425">
+          <a:bodyPr spcFirstLastPara="1" wrap="square" lIns="91425" tIns="91425" rIns="91425" bIns="91425" anchor="ctr" anchorCtr="0">
             <a:noAutofit/>
           </a:bodyPr>
           <a:lstStyle/>
           <a:p>
-            <a:pPr indent="0" lvl="0" marL="0" rtl="0" algn="l">
+            <a:pPr marL="0" lvl="0" indent="0" algn="l" rtl="0">
               <a:spcBef>
                 <a:spcPts val="0"/>
               </a:spcBef>
@@ -4874,9 +4955,6 @@
               </a:spcAft>
               <a:buNone/>
             </a:pPr>
-            <a:r>
-              <a:t/>
-            </a:r>
             <a:endParaRPr/>
           </a:p>
         </p:txBody>
@@ -4884,9 +4962,11 @@
       <p:sp>
         <p:nvSpPr>
           <p:cNvPr id="48" name="Google Shape;48;p6"/>
-          <p:cNvSpPr txBox="1"/>
+          <p:cNvSpPr txBox="1">
+            <a:spLocks noGrp="1"/>
+          </p:cNvSpPr>
           <p:nvPr>
-            <p:ph idx="12" type="sldNum"/>
+            <p:ph type="sldNum" idx="12"/>
           </p:nvPr>
         </p:nvSpPr>
         <p:spPr>
@@ -4899,7 +4979,7 @@
           </a:prstGeom>
         </p:spPr>
         <p:txBody>
-          <a:bodyPr anchorCtr="0" anchor="ctr" bIns="91425" lIns="91425" spcFirstLastPara="1" rIns="91425" wrap="square" tIns="91425">
+          <a:bodyPr spcFirstLastPara="1" wrap="square" lIns="91425" tIns="91425" rIns="91425" bIns="91425" anchor="ctr" anchorCtr="0">
             <a:normAutofit/>
           </a:bodyPr>
           <a:lstStyle>
@@ -4941,7 +5021,7 @@
             </a:lvl9pPr>
           </a:lstStyle>
           <a:p>
-            <a:pPr indent="0" lvl="0" marL="0" rtl="0" algn="r">
+            <a:pPr marL="0" lvl="0" indent="0" algn="r" rtl="0">
               <a:spcBef>
                 <a:spcPts val="0"/>
               </a:spcBef>
@@ -4994,12 +5074,12 @@
             </a:ln>
           </p:spPr>
           <p:txBody>
-            <a:bodyPr anchorCtr="0" anchor="ctr" bIns="91425" lIns="91425" spcFirstLastPara="1" rIns="91425" wrap="square" tIns="91425">
+            <a:bodyPr spcFirstLastPara="1" wrap="square" lIns="91425" tIns="91425" rIns="91425" bIns="91425" anchor="ctr" anchorCtr="0">
               <a:noAutofit/>
             </a:bodyPr>
             <a:lstStyle/>
             <a:p>
-              <a:pPr indent="0" lvl="0" marL="0" rtl="0" algn="l">
+              <a:pPr marL="0" lvl="0" indent="0" algn="l" rtl="0">
                 <a:spcBef>
                   <a:spcPts val="0"/>
                 </a:spcBef>
@@ -5008,9 +5088,6 @@
                 </a:spcAft>
                 <a:buNone/>
               </a:pPr>
-              <a:r>
-                <a:t/>
-              </a:r>
               <a:endParaRPr/>
             </a:p>
           </p:txBody>
@@ -5037,12 +5114,12 @@
             </a:ln>
           </p:spPr>
           <p:txBody>
-            <a:bodyPr anchorCtr="0" anchor="ctr" bIns="91425" lIns="91425" spcFirstLastPara="1" rIns="91425" wrap="square" tIns="91425">
+            <a:bodyPr spcFirstLastPara="1" wrap="square" lIns="91425" tIns="91425" rIns="91425" bIns="91425" anchor="ctr" anchorCtr="0">
               <a:noAutofit/>
             </a:bodyPr>
             <a:lstStyle/>
             <a:p>
-              <a:pPr indent="0" lvl="0" marL="0" rtl="0" algn="l">
+              <a:pPr marL="0" lvl="0" indent="0" algn="l" rtl="0">
                 <a:spcBef>
                   <a:spcPts val="0"/>
                 </a:spcBef>
@@ -5051,9 +5128,6 @@
                 </a:spcAft>
                 <a:buNone/>
               </a:pPr>
-              <a:r>
-                <a:t/>
-              </a:r>
               <a:endParaRPr/>
             </a:p>
           </p:txBody>
@@ -5081,12 +5155,12 @@
           </a:ln>
         </p:spPr>
         <p:txBody>
-          <a:bodyPr anchorCtr="0" anchor="ctr" bIns="91425" lIns="91425" spcFirstLastPara="1" rIns="91425" wrap="square" tIns="91425">
+          <a:bodyPr spcFirstLastPara="1" wrap="square" lIns="91425" tIns="91425" rIns="91425" bIns="91425" anchor="ctr" anchorCtr="0">
             <a:noAutofit/>
           </a:bodyPr>
           <a:lstStyle/>
           <a:p>
-            <a:pPr indent="0" lvl="0" marL="0" rtl="0" algn="l">
+            <a:pPr marL="0" lvl="0" indent="0" algn="l" rtl="0">
               <a:spcBef>
                 <a:spcPts val="0"/>
               </a:spcBef>
@@ -5095,9 +5169,6 @@
               </a:spcAft>
               <a:buNone/>
             </a:pPr>
-            <a:r>
-              <a:t/>
-            </a:r>
             <a:endParaRPr/>
           </a:p>
         </p:txBody>
@@ -5105,7 +5176,9 @@
       <p:sp>
         <p:nvSpPr>
           <p:cNvPr id="53" name="Google Shape;53;p6"/>
-          <p:cNvSpPr txBox="1"/>
+          <p:cNvSpPr txBox="1">
+            <a:spLocks noGrp="1"/>
+          </p:cNvSpPr>
           <p:nvPr>
             <p:ph type="title"/>
           </p:nvPr>
@@ -5120,7 +5193,7 @@
           </a:prstGeom>
         </p:spPr>
         <p:txBody>
-          <a:bodyPr anchorCtr="0" anchor="t" bIns="91425" lIns="91425" spcFirstLastPara="1" rIns="91425" wrap="square" tIns="91425">
+          <a:bodyPr spcFirstLastPara="1" wrap="square" lIns="91425" tIns="91425" rIns="91425" bIns="91425" anchor="t" anchorCtr="0">
             <a:normAutofit/>
           </a:bodyPr>
           <a:lstStyle>
@@ -5224,7 +5297,9 @@
               <a:defRPr sz="2600"/>
             </a:lvl9pPr>
           </a:lstStyle>
-          <a:p/>
+          <a:p>
+            <a:endParaRPr/>
+          </a:p>
         </p:txBody>
       </p:sp>
       <p:pic>
@@ -5264,11 +5339,11 @@
 </file>
 
 <file path=ppt/slideLayouts/slideLayout6.xml><?xml version="1.0" encoding="utf-8"?>
-<p:sldLayout xmlns:a="http://schemas.openxmlformats.org/drawingml/2006/main" xmlns:r="http://schemas.openxmlformats.org/officeDocument/2006/relationships" xmlns:mc="http://schemas.openxmlformats.org/markup-compatibility/2006" xmlns:mv="urn:schemas-microsoft-com:mac:vml" xmlns:p="http://schemas.openxmlformats.org/presentationml/2006/main" xmlns:c="http://schemas.openxmlformats.org/drawingml/2006/chart" xmlns:dgm="http://schemas.openxmlformats.org/drawingml/2006/diagram" xmlns:o="urn:schemas-microsoft-com:office:office" xmlns:v="urn:schemas-microsoft-com:vml" xmlns:pvml="urn:schemas-microsoft-com:office:powerpoint" xmlns:com="http://schemas.openxmlformats.org/drawingml/2006/compatibility" xmlns:p14="http://schemas.microsoft.com/office/powerpoint/2010/main" xmlns:p15="http://schemas.microsoft.com/office/powerpoint/2012/main" xmlns:ahyp="http://schemas.microsoft.com/office/drawing/2018/hyperlinkcolor" matchingName="One column text">
+<p:sldLayout xmlns:a="http://schemas.openxmlformats.org/drawingml/2006/main" xmlns:r="http://schemas.openxmlformats.org/officeDocument/2006/relationships" xmlns:p="http://schemas.openxmlformats.org/presentationml/2006/main" matchingName="One column text">
   <p:cSld name="ONE_COLUMN_TEXT">
     <p:spTree>
       <p:nvGrpSpPr>
-        <p:cNvPr id="55" name="Shape 55"/>
+        <p:cNvPr id="1" name="Shape 55"/>
         <p:cNvGrpSpPr/>
         <p:nvPr/>
       </p:nvGrpSpPr>
@@ -5302,12 +5377,12 @@
           </a:ln>
         </p:spPr>
         <p:txBody>
-          <a:bodyPr anchorCtr="0" anchor="ctr" bIns="91425" lIns="91425" spcFirstLastPara="1" rIns="91425" wrap="square" tIns="91425">
+          <a:bodyPr spcFirstLastPara="1" wrap="square" lIns="91425" tIns="91425" rIns="91425" bIns="91425" anchor="ctr" anchorCtr="0">
             <a:noAutofit/>
           </a:bodyPr>
           <a:lstStyle/>
           <a:p>
-            <a:pPr indent="0" lvl="0" marL="0" rtl="0" algn="l">
+            <a:pPr marL="0" lvl="0" indent="0" algn="l" rtl="0">
               <a:spcBef>
                 <a:spcPts val="0"/>
               </a:spcBef>
@@ -5316,9 +5391,6 @@
               </a:spcAft>
               <a:buNone/>
             </a:pPr>
-            <a:r>
-              <a:t/>
-            </a:r>
             <a:endParaRPr/>
           </a:p>
         </p:txBody>
@@ -5326,9 +5398,11 @@
       <p:sp>
         <p:nvSpPr>
           <p:cNvPr id="57" name="Google Shape;57;p7"/>
-          <p:cNvSpPr txBox="1"/>
+          <p:cNvSpPr txBox="1">
+            <a:spLocks noGrp="1"/>
+          </p:cNvSpPr>
           <p:nvPr>
-            <p:ph idx="12" type="sldNum"/>
+            <p:ph type="sldNum" idx="12"/>
           </p:nvPr>
         </p:nvSpPr>
         <p:spPr>
@@ -5341,7 +5415,7 @@
           </a:prstGeom>
         </p:spPr>
         <p:txBody>
-          <a:bodyPr anchorCtr="0" anchor="ctr" bIns="91425" lIns="91425" spcFirstLastPara="1" rIns="91425" wrap="square" tIns="91425">
+          <a:bodyPr spcFirstLastPara="1" wrap="square" lIns="91425" tIns="91425" rIns="91425" bIns="91425" anchor="ctr" anchorCtr="0">
             <a:normAutofit/>
           </a:bodyPr>
           <a:lstStyle>
@@ -5383,7 +5457,7 @@
             </a:lvl9pPr>
           </a:lstStyle>
           <a:p>
-            <a:pPr indent="0" lvl="0" marL="0" rtl="0" algn="r">
+            <a:pPr marL="0" lvl="0" indent="0" algn="r" rtl="0">
               <a:spcBef>
                 <a:spcPts val="0"/>
               </a:spcBef>
@@ -5436,12 +5510,12 @@
             </a:ln>
           </p:spPr>
           <p:txBody>
-            <a:bodyPr anchorCtr="0" anchor="ctr" bIns="91425" lIns="91425" spcFirstLastPara="1" rIns="91425" wrap="square" tIns="91425">
+            <a:bodyPr spcFirstLastPara="1" wrap="square" lIns="91425" tIns="91425" rIns="91425" bIns="91425" anchor="ctr" anchorCtr="0">
               <a:noAutofit/>
             </a:bodyPr>
             <a:lstStyle/>
             <a:p>
-              <a:pPr indent="0" lvl="0" marL="0" rtl="0" algn="l">
+              <a:pPr marL="0" lvl="0" indent="0" algn="l" rtl="0">
                 <a:spcBef>
                   <a:spcPts val="0"/>
                 </a:spcBef>
@@ -5450,9 +5524,6 @@
                 </a:spcAft>
                 <a:buNone/>
               </a:pPr>
-              <a:r>
-                <a:t/>
-              </a:r>
               <a:endParaRPr/>
             </a:p>
           </p:txBody>
@@ -5479,12 +5550,12 @@
             </a:ln>
           </p:spPr>
           <p:txBody>
-            <a:bodyPr anchorCtr="0" anchor="ctr" bIns="91425" lIns="91425" spcFirstLastPara="1" rIns="91425" wrap="square" tIns="91425">
+            <a:bodyPr spcFirstLastPara="1" wrap="square" lIns="91425" tIns="91425" rIns="91425" bIns="91425" anchor="ctr" anchorCtr="0">
               <a:noAutofit/>
             </a:bodyPr>
             <a:lstStyle/>
             <a:p>
-              <a:pPr indent="0" lvl="0" marL="0" rtl="0" algn="l">
+              <a:pPr marL="0" lvl="0" indent="0" algn="l" rtl="0">
                 <a:spcBef>
                   <a:spcPts val="0"/>
                 </a:spcBef>
@@ -5493,9 +5564,6 @@
                 </a:spcAft>
                 <a:buNone/>
               </a:pPr>
-              <a:r>
-                <a:t/>
-              </a:r>
               <a:endParaRPr/>
             </a:p>
           </p:txBody>
@@ -5523,12 +5591,12 @@
           </a:ln>
         </p:spPr>
         <p:txBody>
-          <a:bodyPr anchorCtr="0" anchor="ctr" bIns="91425" lIns="91425" spcFirstLastPara="1" rIns="91425" wrap="square" tIns="91425">
+          <a:bodyPr spcFirstLastPara="1" wrap="square" lIns="91425" tIns="91425" rIns="91425" bIns="91425" anchor="ctr" anchorCtr="0">
             <a:noAutofit/>
           </a:bodyPr>
           <a:lstStyle/>
           <a:p>
-            <a:pPr indent="0" lvl="0" marL="0" rtl="0" algn="l">
+            <a:pPr marL="0" lvl="0" indent="0" algn="l" rtl="0">
               <a:spcBef>
                 <a:spcPts val="0"/>
               </a:spcBef>
@@ -5537,9 +5605,6 @@
               </a:spcAft>
               <a:buNone/>
             </a:pPr>
-            <a:r>
-              <a:t/>
-            </a:r>
             <a:endParaRPr/>
           </a:p>
         </p:txBody>
@@ -5547,7 +5612,9 @@
       <p:sp>
         <p:nvSpPr>
           <p:cNvPr id="62" name="Google Shape;62;p7"/>
-          <p:cNvSpPr txBox="1"/>
+          <p:cNvSpPr txBox="1">
+            <a:spLocks noGrp="1"/>
+          </p:cNvSpPr>
           <p:nvPr>
             <p:ph type="title"/>
           </p:nvPr>
@@ -5562,7 +5629,7 @@
           </a:prstGeom>
         </p:spPr>
         <p:txBody>
-          <a:bodyPr anchorCtr="0" anchor="t" bIns="91425" lIns="91425" spcFirstLastPara="1" rIns="91425" wrap="square" tIns="91425">
+          <a:bodyPr spcFirstLastPara="1" wrap="square" lIns="91425" tIns="91425" rIns="91425" bIns="91425" anchor="t" anchorCtr="0">
             <a:normAutofit/>
           </a:bodyPr>
           <a:lstStyle>
@@ -5666,15 +5733,19 @@
               <a:defRPr sz="2600"/>
             </a:lvl9pPr>
           </a:lstStyle>
-          <a:p/>
+          <a:p>
+            <a:endParaRPr/>
+          </a:p>
         </p:txBody>
       </p:sp>
       <p:sp>
         <p:nvSpPr>
           <p:cNvPr id="63" name="Google Shape;63;p7"/>
-          <p:cNvSpPr txBox="1"/>
+          <p:cNvSpPr txBox="1">
+            <a:spLocks noGrp="1"/>
+          </p:cNvSpPr>
           <p:nvPr>
-            <p:ph idx="1" type="body"/>
+            <p:ph type="body" idx="1"/>
           </p:nvPr>
         </p:nvSpPr>
         <p:spPr>
@@ -5687,11 +5758,11 @@
           </a:prstGeom>
         </p:spPr>
         <p:txBody>
-          <a:bodyPr anchorCtr="0" anchor="t" bIns="91425" lIns="91425" spcFirstLastPara="1" rIns="91425" wrap="square" tIns="91425">
+          <a:bodyPr spcFirstLastPara="1" wrap="square" lIns="91425" tIns="91425" rIns="91425" bIns="91425" anchor="t" anchorCtr="0">
             <a:normAutofit/>
           </a:bodyPr>
           <a:lstStyle>
-            <a:lvl1pPr indent="-311150" lvl="0" marL="457200" rtl="0">
+            <a:lvl1pPr marL="457200" lvl="0" indent="-311150" rtl="0">
               <a:spcBef>
                 <a:spcPts val="0"/>
               </a:spcBef>
@@ -5702,7 +5773,7 @@
               <a:buChar char="●"/>
               <a:defRPr/>
             </a:lvl1pPr>
-            <a:lvl2pPr indent="-298450" lvl="1" marL="914400" rtl="0">
+            <a:lvl2pPr marL="914400" lvl="1" indent="-298450" rtl="0">
               <a:spcBef>
                 <a:spcPts val="0"/>
               </a:spcBef>
@@ -5713,7 +5784,7 @@
               <a:buChar char="○"/>
               <a:defRPr/>
             </a:lvl2pPr>
-            <a:lvl3pPr indent="-298450" lvl="2" marL="1371600" rtl="0">
+            <a:lvl3pPr marL="1371600" lvl="2" indent="-298450" rtl="0">
               <a:spcBef>
                 <a:spcPts val="0"/>
               </a:spcBef>
@@ -5724,7 +5795,7 @@
               <a:buChar char="■"/>
               <a:defRPr/>
             </a:lvl3pPr>
-            <a:lvl4pPr indent="-298450" lvl="3" marL="1828800" rtl="0">
+            <a:lvl4pPr marL="1828800" lvl="3" indent="-298450" rtl="0">
               <a:spcBef>
                 <a:spcPts val="0"/>
               </a:spcBef>
@@ -5735,7 +5806,7 @@
               <a:buChar char="●"/>
               <a:defRPr/>
             </a:lvl4pPr>
-            <a:lvl5pPr indent="-298450" lvl="4" marL="2286000" rtl="0">
+            <a:lvl5pPr marL="2286000" lvl="4" indent="-298450" rtl="0">
               <a:spcBef>
                 <a:spcPts val="0"/>
               </a:spcBef>
@@ -5746,7 +5817,7 @@
               <a:buChar char="○"/>
               <a:defRPr/>
             </a:lvl5pPr>
-            <a:lvl6pPr indent="-298450" lvl="5" marL="2743200" rtl="0">
+            <a:lvl6pPr marL="2743200" lvl="5" indent="-298450" rtl="0">
               <a:spcBef>
                 <a:spcPts val="0"/>
               </a:spcBef>
@@ -5757,7 +5828,7 @@
               <a:buChar char="■"/>
               <a:defRPr/>
             </a:lvl6pPr>
-            <a:lvl7pPr indent="-298450" lvl="6" marL="3200400" rtl="0">
+            <a:lvl7pPr marL="3200400" lvl="6" indent="-298450" rtl="0">
               <a:spcBef>
                 <a:spcPts val="0"/>
               </a:spcBef>
@@ -5768,7 +5839,7 @@
               <a:buChar char="●"/>
               <a:defRPr/>
             </a:lvl7pPr>
-            <a:lvl8pPr indent="-298450" lvl="7" marL="3657600" rtl="0">
+            <a:lvl8pPr marL="3657600" lvl="7" indent="-298450" rtl="0">
               <a:spcBef>
                 <a:spcPts val="0"/>
               </a:spcBef>
@@ -5779,7 +5850,7 @@
               <a:buChar char="○"/>
               <a:defRPr/>
             </a:lvl8pPr>
-            <a:lvl9pPr indent="-298450" lvl="8" marL="4114800" rtl="0">
+            <a:lvl9pPr marL="4114800" lvl="8" indent="-298450" rtl="0">
               <a:spcBef>
                 <a:spcPts val="0"/>
               </a:spcBef>
@@ -5791,7 +5862,9 @@
               <a:defRPr/>
             </a:lvl9pPr>
           </a:lstStyle>
-          <a:p/>
+          <a:p>
+            <a:endParaRPr/>
+          </a:p>
         </p:txBody>
       </p:sp>
       <p:pic>
@@ -5831,18 +5904,19 @@
 </file>
 
 <file path=ppt/slideLayouts/slideLayout7.xml><?xml version="1.0" encoding="utf-8"?>
-<p:sldLayout xmlns:a="http://schemas.openxmlformats.org/drawingml/2006/main" xmlns:r="http://schemas.openxmlformats.org/officeDocument/2006/relationships" xmlns:mc="http://schemas.openxmlformats.org/markup-compatibility/2006" xmlns:mv="urn:schemas-microsoft-com:mac:vml" xmlns:p="http://schemas.openxmlformats.org/presentationml/2006/main" xmlns:c="http://schemas.openxmlformats.org/drawingml/2006/chart" xmlns:dgm="http://schemas.openxmlformats.org/drawingml/2006/diagram" xmlns:o="urn:schemas-microsoft-com:office:office" xmlns:v="urn:schemas-microsoft-com:vml" xmlns:pvml="urn:schemas-microsoft-com:office:powerpoint" xmlns:com="http://schemas.openxmlformats.org/drawingml/2006/compatibility" xmlns:p14="http://schemas.microsoft.com/office/powerpoint/2010/main" xmlns:p15="http://schemas.microsoft.com/office/powerpoint/2012/main" xmlns:ahyp="http://schemas.microsoft.com/office/drawing/2018/hyperlinkcolor" matchingName="Main point">
+<p:sldLayout xmlns:a="http://schemas.openxmlformats.org/drawingml/2006/main" xmlns:r="http://schemas.openxmlformats.org/officeDocument/2006/relationships" xmlns:p="http://schemas.openxmlformats.org/presentationml/2006/main" matchingName="Main point">
   <p:cSld name="MAIN_POINT">
     <p:bg>
       <p:bgPr>
         <a:solidFill>
           <a:schemeClr val="accent3"/>
         </a:solidFill>
+        <a:effectLst/>
       </p:bgPr>
     </p:bg>
     <p:spTree>
       <p:nvGrpSpPr>
-        <p:cNvPr id="65" name="Shape 65"/>
+        <p:cNvPr id="1" name="Shape 65"/>
         <p:cNvGrpSpPr/>
         <p:nvPr/>
       </p:nvGrpSpPr>
@@ -5890,12 +5964,12 @@
             </a:ln>
           </p:spPr>
           <p:txBody>
-            <a:bodyPr anchorCtr="0" anchor="ctr" bIns="91425" lIns="91425" spcFirstLastPara="1" rIns="91425" wrap="square" tIns="91425">
+            <a:bodyPr spcFirstLastPara="1" wrap="square" lIns="91425" tIns="91425" rIns="91425" bIns="91425" anchor="ctr" anchorCtr="0">
               <a:noAutofit/>
             </a:bodyPr>
             <a:lstStyle/>
             <a:p>
-              <a:pPr indent="0" lvl="0" marL="0" rtl="0" algn="l">
+              <a:pPr marL="0" lvl="0" indent="0" algn="l" rtl="0">
                 <a:spcBef>
                   <a:spcPts val="0"/>
                 </a:spcBef>
@@ -5904,9 +5978,6 @@
                 </a:spcAft>
                 <a:buNone/>
               </a:pPr>
-              <a:r>
-                <a:t/>
-              </a:r>
               <a:endParaRPr/>
             </a:p>
           </p:txBody>
@@ -5933,12 +6004,12 @@
             </a:ln>
           </p:spPr>
           <p:txBody>
-            <a:bodyPr anchorCtr="0" anchor="ctr" bIns="91425" lIns="91425" spcFirstLastPara="1" rIns="91425" wrap="square" tIns="91425">
+            <a:bodyPr spcFirstLastPara="1" wrap="square" lIns="91425" tIns="91425" rIns="91425" bIns="91425" anchor="ctr" anchorCtr="0">
               <a:noAutofit/>
             </a:bodyPr>
             <a:lstStyle/>
             <a:p>
-              <a:pPr indent="0" lvl="0" marL="0" rtl="0" algn="l">
+              <a:pPr marL="0" lvl="0" indent="0" algn="l" rtl="0">
                 <a:spcBef>
                   <a:spcPts val="0"/>
                 </a:spcBef>
@@ -5947,9 +6018,6 @@
                 </a:spcAft>
                 <a:buNone/>
               </a:pPr>
-              <a:r>
-                <a:t/>
-              </a:r>
               <a:endParaRPr/>
             </a:p>
           </p:txBody>
@@ -5958,7 +6026,9 @@
       <p:sp>
         <p:nvSpPr>
           <p:cNvPr id="69" name="Google Shape;69;p8"/>
-          <p:cNvSpPr txBox="1"/>
+          <p:cNvSpPr txBox="1">
+            <a:spLocks noGrp="1"/>
+          </p:cNvSpPr>
           <p:nvPr>
             <p:ph type="title"/>
           </p:nvPr>
@@ -5973,7 +6043,7 @@
           </a:prstGeom>
         </p:spPr>
         <p:txBody>
-          <a:bodyPr anchorCtr="0" anchor="ctr" bIns="91425" lIns="91425" spcFirstLastPara="1" rIns="91425" wrap="square" tIns="91425">
+          <a:bodyPr spcFirstLastPara="1" wrap="square" lIns="91425" tIns="91425" rIns="91425" bIns="91425" anchor="ctr" anchorCtr="0">
             <a:normAutofit/>
           </a:bodyPr>
           <a:lstStyle>
@@ -6140,15 +6210,19 @@
               </a:defRPr>
             </a:lvl9pPr>
           </a:lstStyle>
-          <a:p/>
+          <a:p>
+            <a:endParaRPr/>
+          </a:p>
         </p:txBody>
       </p:sp>
       <p:sp>
         <p:nvSpPr>
           <p:cNvPr id="70" name="Google Shape;70;p8"/>
-          <p:cNvSpPr txBox="1"/>
+          <p:cNvSpPr txBox="1">
+            <a:spLocks noGrp="1"/>
+          </p:cNvSpPr>
           <p:nvPr>
-            <p:ph idx="12" type="sldNum"/>
+            <p:ph type="sldNum" idx="12"/>
           </p:nvPr>
         </p:nvSpPr>
         <p:spPr>
@@ -6161,7 +6235,7 @@
           </a:prstGeom>
         </p:spPr>
         <p:txBody>
-          <a:bodyPr anchorCtr="0" anchor="ctr" bIns="91425" lIns="91425" spcFirstLastPara="1" rIns="91425" wrap="square" tIns="91425">
+          <a:bodyPr spcFirstLastPara="1" wrap="square" lIns="91425" tIns="91425" rIns="91425" bIns="91425" anchor="ctr" anchorCtr="0">
             <a:normAutofit/>
           </a:bodyPr>
           <a:lstStyle>
@@ -6239,7 +6313,7 @@
             </a:lvl9pPr>
           </a:lstStyle>
           <a:p>
-            <a:pPr indent="0" lvl="0" marL="0" rtl="0" algn="r">
+            <a:pPr marL="0" lvl="0" indent="0" algn="r" rtl="0">
               <a:spcBef>
                 <a:spcPts val="0"/>
               </a:spcBef>
@@ -6265,11 +6339,11 @@
 </file>
 
 <file path=ppt/slideLayouts/slideLayout8.xml><?xml version="1.0" encoding="utf-8"?>
-<p:sldLayout xmlns:a="http://schemas.openxmlformats.org/drawingml/2006/main" xmlns:r="http://schemas.openxmlformats.org/officeDocument/2006/relationships" xmlns:mc="http://schemas.openxmlformats.org/markup-compatibility/2006" xmlns:mv="urn:schemas-microsoft-com:mac:vml" xmlns:p="http://schemas.openxmlformats.org/presentationml/2006/main" xmlns:c="http://schemas.openxmlformats.org/drawingml/2006/chart" xmlns:dgm="http://schemas.openxmlformats.org/drawingml/2006/diagram" xmlns:o="urn:schemas-microsoft-com:office:office" xmlns:v="urn:schemas-microsoft-com:vml" xmlns:pvml="urn:schemas-microsoft-com:office:powerpoint" xmlns:com="http://schemas.openxmlformats.org/drawingml/2006/compatibility" xmlns:p14="http://schemas.microsoft.com/office/powerpoint/2010/main" xmlns:p15="http://schemas.microsoft.com/office/powerpoint/2012/main" xmlns:ahyp="http://schemas.microsoft.com/office/drawing/2018/hyperlinkcolor" matchingName="Section title and description">
+<p:sldLayout xmlns:a="http://schemas.openxmlformats.org/drawingml/2006/main" xmlns:r="http://schemas.openxmlformats.org/officeDocument/2006/relationships" xmlns:p="http://schemas.openxmlformats.org/presentationml/2006/main" matchingName="Section title and description">
   <p:cSld name="SECTION_TITLE_AND_DESCRIPTION">
     <p:spTree>
       <p:nvGrpSpPr>
-        <p:cNvPr id="71" name="Shape 71"/>
+        <p:cNvPr id="1" name="Shape 71"/>
         <p:cNvGrpSpPr/>
         <p:nvPr/>
       </p:nvGrpSpPr>
@@ -6303,12 +6377,12 @@
           </a:ln>
         </p:spPr>
         <p:txBody>
-          <a:bodyPr anchorCtr="0" anchor="ctr" bIns="91425" lIns="91425" spcFirstLastPara="1" rIns="91425" wrap="square" tIns="91425">
+          <a:bodyPr spcFirstLastPara="1" wrap="square" lIns="91425" tIns="91425" rIns="91425" bIns="91425" anchor="ctr" anchorCtr="0">
             <a:noAutofit/>
           </a:bodyPr>
           <a:lstStyle/>
           <a:p>
-            <a:pPr indent="0" lvl="0" marL="0" rtl="0" algn="l">
+            <a:pPr marL="0" lvl="0" indent="0" algn="l" rtl="0">
               <a:spcBef>
                 <a:spcPts val="0"/>
               </a:spcBef>
@@ -6317,9 +6391,6 @@
               </a:spcAft>
               <a:buNone/>
             </a:pPr>
-            <a:r>
-              <a:t/>
-            </a:r>
             <a:endParaRPr/>
           </a:p>
         </p:txBody>
@@ -6327,7 +6398,9 @@
       <p:sp>
         <p:nvSpPr>
           <p:cNvPr id="73" name="Google Shape;73;p9"/>
-          <p:cNvSpPr txBox="1"/>
+          <p:cNvSpPr txBox="1">
+            <a:spLocks noGrp="1"/>
+          </p:cNvSpPr>
           <p:nvPr>
             <p:ph type="title"/>
           </p:nvPr>
@@ -6342,7 +6415,7 @@
           </a:prstGeom>
         </p:spPr>
         <p:txBody>
-          <a:bodyPr anchorCtr="0" anchor="t" bIns="91425" lIns="91425" spcFirstLastPara="1" rIns="91425" wrap="square" tIns="91425">
+          <a:bodyPr spcFirstLastPara="1" wrap="square" lIns="91425" tIns="91425" rIns="91425" bIns="91425" anchor="t" anchorCtr="0">
             <a:normAutofit/>
           </a:bodyPr>
           <a:lstStyle>
@@ -6446,15 +6519,19 @@
               <a:defRPr sz="2600"/>
             </a:lvl9pPr>
           </a:lstStyle>
-          <a:p/>
+          <a:p>
+            <a:endParaRPr/>
+          </a:p>
         </p:txBody>
       </p:sp>
       <p:sp>
         <p:nvSpPr>
           <p:cNvPr id="74" name="Google Shape;74;p9"/>
-          <p:cNvSpPr txBox="1"/>
+          <p:cNvSpPr txBox="1">
+            <a:spLocks noGrp="1"/>
+          </p:cNvSpPr>
           <p:nvPr>
-            <p:ph idx="1" type="subTitle"/>
+            <p:ph type="subTitle" idx="1"/>
           </p:nvPr>
         </p:nvSpPr>
         <p:spPr>
@@ -6467,7 +6544,7 @@
           </a:prstGeom>
         </p:spPr>
         <p:txBody>
-          <a:bodyPr anchorCtr="0" anchor="t" bIns="91425" lIns="91425" spcFirstLastPara="1" rIns="91425" wrap="square" tIns="91425">
+          <a:bodyPr spcFirstLastPara="1" wrap="square" lIns="91425" tIns="91425" rIns="91425" bIns="91425" anchor="t" anchorCtr="0">
             <a:normAutofit/>
           </a:bodyPr>
           <a:lstStyle>
@@ -6598,15 +6675,19 @@
               <a:defRPr sz="1600"/>
             </a:lvl9pPr>
           </a:lstStyle>
-          <a:p/>
+          <a:p>
+            <a:endParaRPr/>
+          </a:p>
         </p:txBody>
       </p:sp>
       <p:sp>
         <p:nvSpPr>
           <p:cNvPr id="75" name="Google Shape;75;p9"/>
-          <p:cNvSpPr txBox="1"/>
+          <p:cNvSpPr txBox="1">
+            <a:spLocks noGrp="1"/>
+          </p:cNvSpPr>
           <p:nvPr>
-            <p:ph idx="12" type="sldNum"/>
+            <p:ph type="sldNum" idx="12"/>
           </p:nvPr>
         </p:nvSpPr>
         <p:spPr>
@@ -6619,7 +6700,7 @@
           </a:prstGeom>
         </p:spPr>
         <p:txBody>
-          <a:bodyPr anchorCtr="0" anchor="ctr" bIns="91425" lIns="91425" spcFirstLastPara="1" rIns="91425" wrap="square" tIns="91425">
+          <a:bodyPr spcFirstLastPara="1" wrap="square" lIns="91425" tIns="91425" rIns="91425" bIns="91425" anchor="ctr" anchorCtr="0">
             <a:normAutofit/>
           </a:bodyPr>
           <a:lstStyle>
@@ -6661,7 +6742,7 @@
             </a:lvl9pPr>
           </a:lstStyle>
           <a:p>
-            <a:pPr indent="0" lvl="0" marL="0" rtl="0" algn="r">
+            <a:pPr marL="0" lvl="0" indent="0" algn="r" rtl="0">
               <a:spcBef>
                 <a:spcPts val="0"/>
               </a:spcBef>
@@ -6714,12 +6795,12 @@
             </a:ln>
           </p:spPr>
           <p:txBody>
-            <a:bodyPr anchorCtr="0" anchor="ctr" bIns="91425" lIns="91425" spcFirstLastPara="1" rIns="91425" wrap="square" tIns="91425">
+            <a:bodyPr spcFirstLastPara="1" wrap="square" lIns="91425" tIns="91425" rIns="91425" bIns="91425" anchor="ctr" anchorCtr="0">
               <a:noAutofit/>
             </a:bodyPr>
             <a:lstStyle/>
             <a:p>
-              <a:pPr indent="0" lvl="0" marL="0" rtl="0" algn="l">
+              <a:pPr marL="0" lvl="0" indent="0" algn="l" rtl="0">
                 <a:spcBef>
                   <a:spcPts val="0"/>
                 </a:spcBef>
@@ -6728,9 +6809,6 @@
                 </a:spcAft>
                 <a:buNone/>
               </a:pPr>
-              <a:r>
-                <a:t/>
-              </a:r>
               <a:endParaRPr/>
             </a:p>
           </p:txBody>
@@ -6757,12 +6835,12 @@
             </a:ln>
           </p:spPr>
           <p:txBody>
-            <a:bodyPr anchorCtr="0" anchor="ctr" bIns="91425" lIns="91425" spcFirstLastPara="1" rIns="91425" wrap="square" tIns="91425">
+            <a:bodyPr spcFirstLastPara="1" wrap="square" lIns="91425" tIns="91425" rIns="91425" bIns="91425" anchor="ctr" anchorCtr="0">
               <a:noAutofit/>
             </a:bodyPr>
             <a:lstStyle/>
             <a:p>
-              <a:pPr indent="0" lvl="0" marL="0" rtl="0" algn="l">
+              <a:pPr marL="0" lvl="0" indent="0" algn="l" rtl="0">
                 <a:spcBef>
                   <a:spcPts val="0"/>
                 </a:spcBef>
@@ -6771,9 +6849,6 @@
                 </a:spcAft>
                 <a:buNone/>
               </a:pPr>
-              <a:r>
-                <a:t/>
-              </a:r>
               <a:endParaRPr/>
             </a:p>
           </p:txBody>
@@ -6782,9 +6857,11 @@
       <p:sp>
         <p:nvSpPr>
           <p:cNvPr id="79" name="Google Shape;79;p9"/>
-          <p:cNvSpPr txBox="1"/>
+          <p:cNvSpPr txBox="1">
+            <a:spLocks noGrp="1"/>
+          </p:cNvSpPr>
           <p:nvPr>
-            <p:ph idx="2" type="body"/>
+            <p:ph type="body" idx="2"/>
           </p:nvPr>
         </p:nvSpPr>
         <p:spPr>
@@ -6797,11 +6874,11 @@
           </a:prstGeom>
         </p:spPr>
         <p:txBody>
-          <a:bodyPr anchorCtr="0" anchor="t" bIns="91425" lIns="91425" spcFirstLastPara="1" rIns="91425" wrap="square" tIns="91425">
+          <a:bodyPr spcFirstLastPara="1" wrap="square" lIns="91425" tIns="91425" rIns="91425" bIns="91425" anchor="t" anchorCtr="0">
             <a:normAutofit/>
           </a:bodyPr>
           <a:lstStyle>
-            <a:lvl1pPr indent="-311150" lvl="0" marL="457200" rtl="0">
+            <a:lvl1pPr marL="457200" lvl="0" indent="-311150" rtl="0">
               <a:spcBef>
                 <a:spcPts val="0"/>
               </a:spcBef>
@@ -6812,7 +6889,7 @@
               <a:buChar char="●"/>
               <a:defRPr/>
             </a:lvl1pPr>
-            <a:lvl2pPr indent="-298450" lvl="1" marL="914400" rtl="0">
+            <a:lvl2pPr marL="914400" lvl="1" indent="-298450" rtl="0">
               <a:spcBef>
                 <a:spcPts val="0"/>
               </a:spcBef>
@@ -6823,7 +6900,7 @@
               <a:buChar char="○"/>
               <a:defRPr/>
             </a:lvl2pPr>
-            <a:lvl3pPr indent="-298450" lvl="2" marL="1371600" rtl="0">
+            <a:lvl3pPr marL="1371600" lvl="2" indent="-298450" rtl="0">
               <a:spcBef>
                 <a:spcPts val="0"/>
               </a:spcBef>
@@ -6834,7 +6911,7 @@
               <a:buChar char="■"/>
               <a:defRPr/>
             </a:lvl3pPr>
-            <a:lvl4pPr indent="-298450" lvl="3" marL="1828800" rtl="0">
+            <a:lvl4pPr marL="1828800" lvl="3" indent="-298450" rtl="0">
               <a:spcBef>
                 <a:spcPts val="0"/>
               </a:spcBef>
@@ -6845,7 +6922,7 @@
               <a:buChar char="●"/>
               <a:defRPr/>
             </a:lvl4pPr>
-            <a:lvl5pPr indent="-298450" lvl="4" marL="2286000" rtl="0">
+            <a:lvl5pPr marL="2286000" lvl="4" indent="-298450" rtl="0">
               <a:spcBef>
                 <a:spcPts val="0"/>
               </a:spcBef>
@@ -6856,7 +6933,7 @@
               <a:buChar char="○"/>
               <a:defRPr/>
             </a:lvl5pPr>
-            <a:lvl6pPr indent="-298450" lvl="5" marL="2743200" rtl="0">
+            <a:lvl6pPr marL="2743200" lvl="5" indent="-298450" rtl="0">
               <a:spcBef>
                 <a:spcPts val="0"/>
               </a:spcBef>
@@ -6867,7 +6944,7 @@
               <a:buChar char="■"/>
               <a:defRPr/>
             </a:lvl6pPr>
-            <a:lvl7pPr indent="-298450" lvl="6" marL="3200400" rtl="0">
+            <a:lvl7pPr marL="3200400" lvl="6" indent="-298450" rtl="0">
               <a:spcBef>
                 <a:spcPts val="0"/>
               </a:spcBef>
@@ -6878,7 +6955,7 @@
               <a:buChar char="●"/>
               <a:defRPr/>
             </a:lvl7pPr>
-            <a:lvl8pPr indent="-298450" lvl="7" marL="3657600" rtl="0">
+            <a:lvl8pPr marL="3657600" lvl="7" indent="-298450" rtl="0">
               <a:spcBef>
                 <a:spcPts val="0"/>
               </a:spcBef>
@@ -6889,7 +6966,7 @@
               <a:buChar char="○"/>
               <a:defRPr/>
             </a:lvl8pPr>
-            <a:lvl9pPr indent="-298450" lvl="8" marL="4114800" rtl="0">
+            <a:lvl9pPr marL="4114800" lvl="8" indent="-298450" rtl="0">
               <a:spcBef>
                 <a:spcPts val="0"/>
               </a:spcBef>
@@ -6901,7 +6978,9 @@
               <a:defRPr/>
             </a:lvl9pPr>
           </a:lstStyle>
-          <a:p/>
+          <a:p>
+            <a:endParaRPr/>
+          </a:p>
         </p:txBody>
       </p:sp>
       <p:pic>
@@ -6941,11 +7020,11 @@
 </file>
 
 <file path=ppt/slideLayouts/slideLayout9.xml><?xml version="1.0" encoding="utf-8"?>
-<p:sldLayout xmlns:a="http://schemas.openxmlformats.org/drawingml/2006/main" xmlns:r="http://schemas.openxmlformats.org/officeDocument/2006/relationships" xmlns:mc="http://schemas.openxmlformats.org/markup-compatibility/2006" xmlns:mv="urn:schemas-microsoft-com:mac:vml" xmlns:p="http://schemas.openxmlformats.org/presentationml/2006/main" xmlns:c="http://schemas.openxmlformats.org/drawingml/2006/chart" xmlns:dgm="http://schemas.openxmlformats.org/drawingml/2006/diagram" xmlns:o="urn:schemas-microsoft-com:office:office" xmlns:v="urn:schemas-microsoft-com:vml" xmlns:pvml="urn:schemas-microsoft-com:office:powerpoint" xmlns:com="http://schemas.openxmlformats.org/drawingml/2006/compatibility" xmlns:p14="http://schemas.microsoft.com/office/powerpoint/2010/main" xmlns:p15="http://schemas.microsoft.com/office/powerpoint/2012/main" xmlns:ahyp="http://schemas.microsoft.com/office/drawing/2018/hyperlinkcolor" matchingName="Caption">
+<p:sldLayout xmlns:a="http://schemas.openxmlformats.org/drawingml/2006/main" xmlns:r="http://schemas.openxmlformats.org/officeDocument/2006/relationships" xmlns:p="http://schemas.openxmlformats.org/presentationml/2006/main" matchingName="Caption">
   <p:cSld name="CAPTION_ONLY">
     <p:spTree>
       <p:nvGrpSpPr>
-        <p:cNvPr id="81" name="Shape 81"/>
+        <p:cNvPr id="1" name="Shape 81"/>
         <p:cNvGrpSpPr/>
         <p:nvPr/>
       </p:nvGrpSpPr>
@@ -6960,9 +7039,11 @@
       <p:sp>
         <p:nvSpPr>
           <p:cNvPr id="82" name="Google Shape;82;p10"/>
-          <p:cNvSpPr txBox="1"/>
+          <p:cNvSpPr txBox="1">
+            <a:spLocks noGrp="1"/>
+          </p:cNvSpPr>
           <p:nvPr>
-            <p:ph idx="1" type="body"/>
+            <p:ph type="body" idx="1"/>
           </p:nvPr>
         </p:nvSpPr>
         <p:spPr>
@@ -6975,11 +7056,11 @@
           </a:prstGeom>
         </p:spPr>
         <p:txBody>
-          <a:bodyPr anchorCtr="0" anchor="ctr" bIns="91425" lIns="91425" spcFirstLastPara="1" rIns="91425" wrap="square" tIns="91425">
+          <a:bodyPr spcFirstLastPara="1" wrap="square" lIns="91425" tIns="91425" rIns="91425" bIns="91425" anchor="ctr" anchorCtr="0">
             <a:normAutofit/>
           </a:bodyPr>
           <a:lstStyle>
-            <a:lvl1pPr indent="-228600" lvl="0" marL="457200">
+            <a:lvl1pPr marL="457200" lvl="0" indent="-228600">
               <a:lnSpc>
                 <a:spcPct val="100000"/>
               </a:lnSpc>
@@ -6994,15 +7075,19 @@
               <a:defRPr/>
             </a:lvl1pPr>
           </a:lstStyle>
-          <a:p/>
+          <a:p>
+            <a:endParaRPr/>
+          </a:p>
         </p:txBody>
       </p:sp>
       <p:sp>
         <p:nvSpPr>
           <p:cNvPr id="83" name="Google Shape;83;p10"/>
-          <p:cNvSpPr txBox="1"/>
+          <p:cNvSpPr txBox="1">
+            <a:spLocks noGrp="1"/>
+          </p:cNvSpPr>
           <p:nvPr>
-            <p:ph idx="12" type="sldNum"/>
+            <p:ph type="sldNum" idx="12"/>
           </p:nvPr>
         </p:nvSpPr>
         <p:spPr>
@@ -7015,7 +7100,7 @@
           </a:prstGeom>
         </p:spPr>
         <p:txBody>
-          <a:bodyPr anchorCtr="0" anchor="ctr" bIns="91425" lIns="91425" spcFirstLastPara="1" rIns="91425" wrap="square" tIns="91425">
+          <a:bodyPr spcFirstLastPara="1" wrap="square" lIns="91425" tIns="91425" rIns="91425" bIns="91425" anchor="ctr" anchorCtr="0">
             <a:normAutofit/>
           </a:bodyPr>
           <a:lstStyle>
@@ -7057,7 +7142,7 @@
             </a:lvl9pPr>
           </a:lstStyle>
           <a:p>
-            <a:pPr indent="0" lvl="0" marL="0" rtl="0" algn="r">
+            <a:pPr marL="0" lvl="0" indent="0" algn="r" rtl="0">
               <a:spcBef>
                 <a:spcPts val="0"/>
               </a:spcBef>
@@ -7083,18 +7168,19 @@
 </file>
 
 <file path=ppt/slideMasters/slideMaster1.xml><?xml version="1.0" encoding="utf-8"?>
-<p:sldMaster xmlns:a="http://schemas.openxmlformats.org/drawingml/2006/main" xmlns:r="http://schemas.openxmlformats.org/officeDocument/2006/relationships" xmlns:mc="http://schemas.openxmlformats.org/markup-compatibility/2006" xmlns:mv="urn:schemas-microsoft-com:mac:vml" xmlns:p="http://schemas.openxmlformats.org/presentationml/2006/main" xmlns:c="http://schemas.openxmlformats.org/drawingml/2006/chart" xmlns:dgm="http://schemas.openxmlformats.org/drawingml/2006/diagram" xmlns:o="urn:schemas-microsoft-com:office:office" xmlns:v="urn:schemas-microsoft-com:vml" xmlns:pvml="urn:schemas-microsoft-com:office:powerpoint" xmlns:com="http://schemas.openxmlformats.org/drawingml/2006/compatibility" xmlns:p14="http://schemas.microsoft.com/office/powerpoint/2010/main" xmlns:p15="http://schemas.microsoft.com/office/powerpoint/2012/main" xmlns:ahyp="http://schemas.microsoft.com/office/drawing/2018/hyperlinkcolor">
+<p:sldMaster xmlns:a="http://schemas.openxmlformats.org/drawingml/2006/main" xmlns:r="http://schemas.openxmlformats.org/officeDocument/2006/relationships" xmlns:p="http://schemas.openxmlformats.org/presentationml/2006/main">
   <p:cSld name="streamline">
     <p:bg>
       <p:bgPr>
         <a:solidFill>
           <a:schemeClr val="lt1"/>
         </a:solidFill>
+        <a:effectLst/>
       </p:bgPr>
     </p:bg>
     <p:spTree>
       <p:nvGrpSpPr>
-        <p:cNvPr id="5" name="Shape 5"/>
+        <p:cNvPr id="1" name="Shape 5"/>
         <p:cNvGrpSpPr/>
         <p:nvPr/>
       </p:nvGrpSpPr>
@@ -7109,7 +7195,9 @@
       <p:sp>
         <p:nvSpPr>
           <p:cNvPr id="6" name="Google Shape;6;p1"/>
-          <p:cNvSpPr txBox="1"/>
+          <p:cNvSpPr txBox="1">
+            <a:spLocks noGrp="1"/>
+          </p:cNvSpPr>
           <p:nvPr>
             <p:ph type="title"/>
           </p:nvPr>
@@ -7128,7 +7216,7 @@
           </a:ln>
         </p:spPr>
         <p:txBody>
-          <a:bodyPr anchorCtr="0" anchor="t" bIns="91425" lIns="91425" spcFirstLastPara="1" rIns="91425" wrap="square" tIns="91425">
+          <a:bodyPr spcFirstLastPara="1" wrap="square" lIns="91425" tIns="91425" rIns="91425" bIns="91425" anchor="t" anchorCtr="0">
             <a:normAutofit/>
           </a:bodyPr>
           <a:lstStyle>
@@ -7145,7 +7233,7 @@
               <a:buSzPts val="2800"/>
               <a:buFont typeface="Raleway"/>
               <a:buNone/>
-              <a:defRPr b="1" sz="2800">
+              <a:defRPr sz="2800" b="1">
                 <a:solidFill>
                   <a:schemeClr val="dk2"/>
                 </a:solidFill>
@@ -7168,7 +7256,7 @@
               <a:buSzPts val="2800"/>
               <a:buFont typeface="Raleway"/>
               <a:buNone/>
-              <a:defRPr b="1" sz="2800">
+              <a:defRPr sz="2800" b="1">
                 <a:solidFill>
                   <a:schemeClr val="dk2"/>
                 </a:solidFill>
@@ -7191,7 +7279,7 @@
               <a:buSzPts val="2800"/>
               <a:buFont typeface="Raleway"/>
               <a:buNone/>
-              <a:defRPr b="1" sz="2800">
+              <a:defRPr sz="2800" b="1">
                 <a:solidFill>
                   <a:schemeClr val="dk2"/>
                 </a:solidFill>
@@ -7214,7 +7302,7 @@
               <a:buSzPts val="2800"/>
               <a:buFont typeface="Raleway"/>
               <a:buNone/>
-              <a:defRPr b="1" sz="2800">
+              <a:defRPr sz="2800" b="1">
                 <a:solidFill>
                   <a:schemeClr val="dk2"/>
                 </a:solidFill>
@@ -7237,7 +7325,7 @@
               <a:buSzPts val="2800"/>
               <a:buFont typeface="Raleway"/>
               <a:buNone/>
-              <a:defRPr b="1" sz="2800">
+              <a:defRPr sz="2800" b="1">
                 <a:solidFill>
                   <a:schemeClr val="dk2"/>
                 </a:solidFill>
@@ -7260,7 +7348,7 @@
               <a:buSzPts val="2800"/>
               <a:buFont typeface="Raleway"/>
               <a:buNone/>
-              <a:defRPr b="1" sz="2800">
+              <a:defRPr sz="2800" b="1">
                 <a:solidFill>
                   <a:schemeClr val="dk2"/>
                 </a:solidFill>
@@ -7283,7 +7371,7 @@
               <a:buSzPts val="2800"/>
               <a:buFont typeface="Raleway"/>
               <a:buNone/>
-              <a:defRPr b="1" sz="2800">
+              <a:defRPr sz="2800" b="1">
                 <a:solidFill>
                   <a:schemeClr val="dk2"/>
                 </a:solidFill>
@@ -7306,7 +7394,7 @@
               <a:buSzPts val="2800"/>
               <a:buFont typeface="Raleway"/>
               <a:buNone/>
-              <a:defRPr b="1" sz="2800">
+              <a:defRPr sz="2800" b="1">
                 <a:solidFill>
                   <a:schemeClr val="dk2"/>
                 </a:solidFill>
@@ -7329,7 +7417,7 @@
               <a:buSzPts val="2800"/>
               <a:buFont typeface="Raleway"/>
               <a:buNone/>
-              <a:defRPr b="1" sz="2800">
+              <a:defRPr sz="2800" b="1">
                 <a:solidFill>
                   <a:schemeClr val="dk2"/>
                 </a:solidFill>
@@ -7340,15 +7428,19 @@
               </a:defRPr>
             </a:lvl9pPr>
           </a:lstStyle>
-          <a:p/>
+          <a:p>
+            <a:endParaRPr/>
+          </a:p>
         </p:txBody>
       </p:sp>
       <p:sp>
         <p:nvSpPr>
           <p:cNvPr id="7" name="Google Shape;7;p1"/>
-          <p:cNvSpPr txBox="1"/>
+          <p:cNvSpPr txBox="1">
+            <a:spLocks noGrp="1"/>
+          </p:cNvSpPr>
           <p:nvPr>
-            <p:ph idx="1" type="body"/>
+            <p:ph type="body" idx="1"/>
           </p:nvPr>
         </p:nvSpPr>
         <p:spPr>
@@ -7365,11 +7457,11 @@
           </a:ln>
         </p:spPr>
         <p:txBody>
-          <a:bodyPr anchorCtr="0" anchor="t" bIns="91425" lIns="91425" spcFirstLastPara="1" rIns="91425" wrap="square" tIns="91425">
+          <a:bodyPr spcFirstLastPara="1" wrap="square" lIns="91425" tIns="91425" rIns="91425" bIns="91425" anchor="t" anchorCtr="0">
             <a:normAutofit/>
           </a:bodyPr>
           <a:lstStyle>
-            <a:lvl1pPr indent="-311150" lvl="0" marL="457200">
+            <a:lvl1pPr marL="457200" lvl="0" indent="-311150">
               <a:lnSpc>
                 <a:spcPct val="115000"/>
               </a:lnSpc>
@@ -7395,7 +7487,7 @@
                 <a:sym typeface="Lato"/>
               </a:defRPr>
             </a:lvl1pPr>
-            <a:lvl2pPr indent="-298450" lvl="1" marL="914400">
+            <a:lvl2pPr marL="914400" lvl="1" indent="-298450">
               <a:lnSpc>
                 <a:spcPct val="115000"/>
               </a:lnSpc>
@@ -7421,7 +7513,7 @@
                 <a:sym typeface="Lato"/>
               </a:defRPr>
             </a:lvl2pPr>
-            <a:lvl3pPr indent="-298450" lvl="2" marL="1371600">
+            <a:lvl3pPr marL="1371600" lvl="2" indent="-298450">
               <a:lnSpc>
                 <a:spcPct val="115000"/>
               </a:lnSpc>
@@ -7447,7 +7539,7 @@
                 <a:sym typeface="Lato"/>
               </a:defRPr>
             </a:lvl3pPr>
-            <a:lvl4pPr indent="-298450" lvl="3" marL="1828800">
+            <a:lvl4pPr marL="1828800" lvl="3" indent="-298450">
               <a:lnSpc>
                 <a:spcPct val="115000"/>
               </a:lnSpc>
@@ -7473,7 +7565,7 @@
                 <a:sym typeface="Lato"/>
               </a:defRPr>
             </a:lvl4pPr>
-            <a:lvl5pPr indent="-298450" lvl="4" marL="2286000">
+            <a:lvl5pPr marL="2286000" lvl="4" indent="-298450">
               <a:lnSpc>
                 <a:spcPct val="115000"/>
               </a:lnSpc>
@@ -7499,7 +7591,7 @@
                 <a:sym typeface="Lato"/>
               </a:defRPr>
             </a:lvl5pPr>
-            <a:lvl6pPr indent="-298450" lvl="5" marL="2743200">
+            <a:lvl6pPr marL="2743200" lvl="5" indent="-298450">
               <a:lnSpc>
                 <a:spcPct val="115000"/>
               </a:lnSpc>
@@ -7525,7 +7617,7 @@
                 <a:sym typeface="Lato"/>
               </a:defRPr>
             </a:lvl6pPr>
-            <a:lvl7pPr indent="-298450" lvl="6" marL="3200400">
+            <a:lvl7pPr marL="3200400" lvl="6" indent="-298450">
               <a:lnSpc>
                 <a:spcPct val="115000"/>
               </a:lnSpc>
@@ -7551,7 +7643,7 @@
                 <a:sym typeface="Lato"/>
               </a:defRPr>
             </a:lvl7pPr>
-            <a:lvl8pPr indent="-298450" lvl="7" marL="3657600">
+            <a:lvl8pPr marL="3657600" lvl="7" indent="-298450">
               <a:lnSpc>
                 <a:spcPct val="115000"/>
               </a:lnSpc>
@@ -7577,7 +7669,7 @@
                 <a:sym typeface="Lato"/>
               </a:defRPr>
             </a:lvl8pPr>
-            <a:lvl9pPr indent="-298450" lvl="8" marL="4114800">
+            <a:lvl9pPr marL="4114800" lvl="8" indent="-298450">
               <a:lnSpc>
                 <a:spcPct val="115000"/>
               </a:lnSpc>
@@ -7604,15 +7696,19 @@
               </a:defRPr>
             </a:lvl9pPr>
           </a:lstStyle>
-          <a:p/>
+          <a:p>
+            <a:endParaRPr/>
+          </a:p>
         </p:txBody>
       </p:sp>
       <p:sp>
         <p:nvSpPr>
           <p:cNvPr id="8" name="Google Shape;8;p1"/>
-          <p:cNvSpPr txBox="1"/>
+          <p:cNvSpPr txBox="1">
+            <a:spLocks noGrp="1"/>
+          </p:cNvSpPr>
           <p:nvPr>
-            <p:ph idx="12" type="sldNum"/>
+            <p:ph type="sldNum" idx="12"/>
           </p:nvPr>
         </p:nvSpPr>
         <p:spPr>
@@ -7629,7 +7725,7 @@
           </a:ln>
         </p:spPr>
         <p:txBody>
-          <a:bodyPr anchorCtr="0" anchor="ctr" bIns="91425" lIns="91425" spcFirstLastPara="1" rIns="91425" wrap="square" tIns="91425">
+          <a:bodyPr spcFirstLastPara="1" wrap="square" lIns="91425" tIns="91425" rIns="91425" bIns="91425" anchor="ctr" anchorCtr="0">
             <a:normAutofit/>
           </a:bodyPr>
           <a:lstStyle>
@@ -7743,7 +7839,7 @@
             </a:lvl9pPr>
           </a:lstStyle>
           <a:p>
-            <a:pPr indent="0" lvl="0" marL="0" rtl="0" algn="r">
+            <a:pPr marL="0" lvl="0" indent="0" algn="r" rtl="0">
               <a:spcBef>
                 <a:spcPts val="0"/>
               </a:spcBef>
@@ -7762,7 +7858,7 @@
       </p:sp>
     </p:spTree>
   </p:cSld>
-  <p:clrMap accent1="accent1" accent2="accent2" accent3="accent3" accent4="accent4" accent5="accent5" accent6="accent6" bg1="lt1" bg2="dk2" tx1="dk1" tx2="lt2" folHlink="folHlink" hlink="hlink"/>
+  <p:clrMap bg1="lt1" tx1="dk1" bg2="dk2" tx2="lt2" accent1="accent1" accent2="accent2" accent3="accent3" accent4="accent4" accent5="accent5" accent6="accent6" hlink="hlink" folHlink="folHlink"/>
   <p:sldLayoutIdLst>
     <p:sldLayoutId id="2147483648" r:id="rId1"/>
     <p:sldLayoutId id="2147483649" r:id="rId2"/>
@@ -7776,10 +7872,10 @@
     <p:sldLayoutId id="2147483657" r:id="rId10"/>
     <p:sldLayoutId id="2147483658" r:id="rId11"/>
   </p:sldLayoutIdLst>
-  <p:hf dt="0" ftr="0" hdr="0" sldNum="0"/>
+  <p:hf sldNum="0" hdr="0" ftr="0" dt="0"/>
   <p:txStyles>
     <p:titleStyle>
-      <a:defPPr lvl="0" marR="0" rtl="0" algn="l">
+      <a:defPPr marR="0" lvl="0" algn="l" rtl="0">
         <a:lnSpc>
           <a:spcPct val="100000"/>
         </a:lnSpc>
@@ -7790,7 +7886,7 @@
           <a:spcPts val="0"/>
         </a:spcAft>
       </a:defPPr>
-      <a:lvl1pPr lvl="0" marR="0" rtl="0" algn="l">
+      <a:lvl1pPr marR="0" lvl="0" algn="l" rtl="0">
         <a:lnSpc>
           <a:spcPct val="100000"/>
         </a:lnSpc>
@@ -7804,7 +7900,7 @@
           <a:srgbClr val="000000"/>
         </a:buClr>
         <a:buFont typeface="Arial"/>
-        <a:defRPr b="0" i="0" sz="1400" u="none" cap="none" strike="noStrike">
+        <a:defRPr sz="1400" b="0" i="0" u="none" strike="noStrike" cap="none">
           <a:solidFill>
             <a:srgbClr val="000000"/>
           </a:solidFill>
@@ -7814,7 +7910,7 @@
           <a:sym typeface="Arial"/>
         </a:defRPr>
       </a:lvl1pPr>
-      <a:lvl2pPr lvl="1" marR="0" rtl="0" algn="l">
+      <a:lvl2pPr marR="0" lvl="1" algn="l" rtl="0">
         <a:lnSpc>
           <a:spcPct val="100000"/>
         </a:lnSpc>
@@ -7828,7 +7924,7 @@
           <a:srgbClr val="000000"/>
         </a:buClr>
         <a:buFont typeface="Arial"/>
-        <a:defRPr b="0" i="0" sz="1400" u="none" cap="none" strike="noStrike">
+        <a:defRPr sz="1400" b="0" i="0" u="none" strike="noStrike" cap="none">
           <a:solidFill>
             <a:srgbClr val="000000"/>
           </a:solidFill>
@@ -7838,7 +7934,7 @@
           <a:sym typeface="Arial"/>
         </a:defRPr>
       </a:lvl2pPr>
-      <a:lvl3pPr lvl="2" marR="0" rtl="0" algn="l">
+      <a:lvl3pPr marR="0" lvl="2" algn="l" rtl="0">
         <a:lnSpc>
           <a:spcPct val="100000"/>
         </a:lnSpc>
@@ -7852,7 +7948,7 @@
           <a:srgbClr val="000000"/>
         </a:buClr>
         <a:buFont typeface="Arial"/>
-        <a:defRPr b="0" i="0" sz="1400" u="none" cap="none" strike="noStrike">
+        <a:defRPr sz="1400" b="0" i="0" u="none" strike="noStrike" cap="none">
           <a:solidFill>
             <a:srgbClr val="000000"/>
           </a:solidFill>
@@ -7862,7 +7958,7 @@
           <a:sym typeface="Arial"/>
         </a:defRPr>
       </a:lvl3pPr>
-      <a:lvl4pPr lvl="3" marR="0" rtl="0" algn="l">
+      <a:lvl4pPr marR="0" lvl="3" algn="l" rtl="0">
         <a:lnSpc>
           <a:spcPct val="100000"/>
         </a:lnSpc>
@@ -7876,7 +7972,7 @@
           <a:srgbClr val="000000"/>
         </a:buClr>
         <a:buFont typeface="Arial"/>
-        <a:defRPr b="0" i="0" sz="1400" u="none" cap="none" strike="noStrike">
+        <a:defRPr sz="1400" b="0" i="0" u="none" strike="noStrike" cap="none">
           <a:solidFill>
             <a:srgbClr val="000000"/>
           </a:solidFill>
@@ -7886,7 +7982,7 @@
           <a:sym typeface="Arial"/>
         </a:defRPr>
       </a:lvl4pPr>
-      <a:lvl5pPr lvl="4" marR="0" rtl="0" algn="l">
+      <a:lvl5pPr marR="0" lvl="4" algn="l" rtl="0">
         <a:lnSpc>
           <a:spcPct val="100000"/>
         </a:lnSpc>
@@ -7900,7 +7996,7 @@
           <a:srgbClr val="000000"/>
         </a:buClr>
         <a:buFont typeface="Arial"/>
-        <a:defRPr b="0" i="0" sz="1400" u="none" cap="none" strike="noStrike">
+        <a:defRPr sz="1400" b="0" i="0" u="none" strike="noStrike" cap="none">
           <a:solidFill>
             <a:srgbClr val="000000"/>
           </a:solidFill>
@@ -7910,7 +8006,7 @@
           <a:sym typeface="Arial"/>
         </a:defRPr>
       </a:lvl5pPr>
-      <a:lvl6pPr lvl="5" marR="0" rtl="0" algn="l">
+      <a:lvl6pPr marR="0" lvl="5" algn="l" rtl="0">
         <a:lnSpc>
           <a:spcPct val="100000"/>
         </a:lnSpc>
@@ -7924,7 +8020,7 @@
           <a:srgbClr val="000000"/>
         </a:buClr>
         <a:buFont typeface="Arial"/>
-        <a:defRPr b="0" i="0" sz="1400" u="none" cap="none" strike="noStrike">
+        <a:defRPr sz="1400" b="0" i="0" u="none" strike="noStrike" cap="none">
           <a:solidFill>
             <a:srgbClr val="000000"/>
           </a:solidFill>
@@ -7934,7 +8030,7 @@
           <a:sym typeface="Arial"/>
         </a:defRPr>
       </a:lvl6pPr>
-      <a:lvl7pPr lvl="6" marR="0" rtl="0" algn="l">
+      <a:lvl7pPr marR="0" lvl="6" algn="l" rtl="0">
         <a:lnSpc>
           <a:spcPct val="100000"/>
         </a:lnSpc>
@@ -7948,7 +8044,7 @@
           <a:srgbClr val="000000"/>
         </a:buClr>
         <a:buFont typeface="Arial"/>
-        <a:defRPr b="0" i="0" sz="1400" u="none" cap="none" strike="noStrike">
+        <a:defRPr sz="1400" b="0" i="0" u="none" strike="noStrike" cap="none">
           <a:solidFill>
             <a:srgbClr val="000000"/>
           </a:solidFill>
@@ -7958,7 +8054,7 @@
           <a:sym typeface="Arial"/>
         </a:defRPr>
       </a:lvl7pPr>
-      <a:lvl8pPr lvl="7" marR="0" rtl="0" algn="l">
+      <a:lvl8pPr marR="0" lvl="7" algn="l" rtl="0">
         <a:lnSpc>
           <a:spcPct val="100000"/>
         </a:lnSpc>
@@ -7972,7 +8068,7 @@
           <a:srgbClr val="000000"/>
         </a:buClr>
         <a:buFont typeface="Arial"/>
-        <a:defRPr b="0" i="0" sz="1400" u="none" cap="none" strike="noStrike">
+        <a:defRPr sz="1400" b="0" i="0" u="none" strike="noStrike" cap="none">
           <a:solidFill>
             <a:srgbClr val="000000"/>
           </a:solidFill>
@@ -7982,7 +8078,7 @@
           <a:sym typeface="Arial"/>
         </a:defRPr>
       </a:lvl8pPr>
-      <a:lvl9pPr lvl="8" marR="0" rtl="0" algn="l">
+      <a:lvl9pPr marR="0" lvl="8" algn="l" rtl="0">
         <a:lnSpc>
           <a:spcPct val="100000"/>
         </a:lnSpc>
@@ -7996,7 +8092,7 @@
           <a:srgbClr val="000000"/>
         </a:buClr>
         <a:buFont typeface="Arial"/>
-        <a:defRPr b="0" i="0" sz="1400" u="none" cap="none" strike="noStrike">
+        <a:defRPr sz="1400" b="0" i="0" u="none" strike="noStrike" cap="none">
           <a:solidFill>
             <a:srgbClr val="000000"/>
           </a:solidFill>
@@ -8008,7 +8104,7 @@
       </a:lvl9pPr>
     </p:titleStyle>
     <p:bodyStyle>
-      <a:defPPr lvl="0" marR="0" rtl="0" algn="l">
+      <a:defPPr marR="0" lvl="0" algn="l" rtl="0">
         <a:lnSpc>
           <a:spcPct val="100000"/>
         </a:lnSpc>
@@ -8019,7 +8115,7 @@
           <a:spcPts val="0"/>
         </a:spcAft>
       </a:defPPr>
-      <a:lvl1pPr lvl="0" marR="0" rtl="0" algn="l">
+      <a:lvl1pPr marR="0" lvl="0" algn="l" rtl="0">
         <a:lnSpc>
           <a:spcPct val="100000"/>
         </a:lnSpc>
@@ -8033,7 +8129,7 @@
           <a:srgbClr val="000000"/>
         </a:buClr>
         <a:buFont typeface="Arial"/>
-        <a:defRPr b="0" i="0" sz="1400" u="none" cap="none" strike="noStrike">
+        <a:defRPr sz="1400" b="0" i="0" u="none" strike="noStrike" cap="none">
           <a:solidFill>
             <a:srgbClr val="000000"/>
           </a:solidFill>
@@ -8043,7 +8139,7 @@
           <a:sym typeface="Arial"/>
         </a:defRPr>
       </a:lvl1pPr>
-      <a:lvl2pPr lvl="1" marR="0" rtl="0" algn="l">
+      <a:lvl2pPr marR="0" lvl="1" algn="l" rtl="0">
         <a:lnSpc>
           <a:spcPct val="100000"/>
         </a:lnSpc>
@@ -8057,7 +8153,7 @@
           <a:srgbClr val="000000"/>
         </a:buClr>
         <a:buFont typeface="Arial"/>
-        <a:defRPr b="0" i="0" sz="1400" u="none" cap="none" strike="noStrike">
+        <a:defRPr sz="1400" b="0" i="0" u="none" strike="noStrike" cap="none">
           <a:solidFill>
             <a:srgbClr val="000000"/>
           </a:solidFill>
@@ -8067,7 +8163,7 @@
           <a:sym typeface="Arial"/>
         </a:defRPr>
       </a:lvl2pPr>
-      <a:lvl3pPr lvl="2" marR="0" rtl="0" algn="l">
+      <a:lvl3pPr marR="0" lvl="2" algn="l" rtl="0">
         <a:lnSpc>
           <a:spcPct val="100000"/>
         </a:lnSpc>
@@ -8081,7 +8177,7 @@
           <a:srgbClr val="000000"/>
         </a:buClr>
         <a:buFont typeface="Arial"/>
-        <a:defRPr b="0" i="0" sz="1400" u="none" cap="none" strike="noStrike">
+        <a:defRPr sz="1400" b="0" i="0" u="none" strike="noStrike" cap="none">
           <a:solidFill>
             <a:srgbClr val="000000"/>
           </a:solidFill>
@@ -8091,7 +8187,7 @@
           <a:sym typeface="Arial"/>
         </a:defRPr>
       </a:lvl3pPr>
-      <a:lvl4pPr lvl="3" marR="0" rtl="0" algn="l">
+      <a:lvl4pPr marR="0" lvl="3" algn="l" rtl="0">
         <a:lnSpc>
           <a:spcPct val="100000"/>
         </a:lnSpc>
@@ -8105,7 +8201,7 @@
           <a:srgbClr val="000000"/>
         </a:buClr>
         <a:buFont typeface="Arial"/>
-        <a:defRPr b="0" i="0" sz="1400" u="none" cap="none" strike="noStrike">
+        <a:defRPr sz="1400" b="0" i="0" u="none" strike="noStrike" cap="none">
           <a:solidFill>
             <a:srgbClr val="000000"/>
           </a:solidFill>
@@ -8115,7 +8211,7 @@
           <a:sym typeface="Arial"/>
         </a:defRPr>
       </a:lvl4pPr>
-      <a:lvl5pPr lvl="4" marR="0" rtl="0" algn="l">
+      <a:lvl5pPr marR="0" lvl="4" algn="l" rtl="0">
         <a:lnSpc>
           <a:spcPct val="100000"/>
         </a:lnSpc>
@@ -8129,7 +8225,7 @@
           <a:srgbClr val="000000"/>
         </a:buClr>
         <a:buFont typeface="Arial"/>
-        <a:defRPr b="0" i="0" sz="1400" u="none" cap="none" strike="noStrike">
+        <a:defRPr sz="1400" b="0" i="0" u="none" strike="noStrike" cap="none">
           <a:solidFill>
             <a:srgbClr val="000000"/>
           </a:solidFill>
@@ -8139,7 +8235,7 @@
           <a:sym typeface="Arial"/>
         </a:defRPr>
       </a:lvl5pPr>
-      <a:lvl6pPr lvl="5" marR="0" rtl="0" algn="l">
+      <a:lvl6pPr marR="0" lvl="5" algn="l" rtl="0">
         <a:lnSpc>
           <a:spcPct val="100000"/>
         </a:lnSpc>
@@ -8153,7 +8249,7 @@
           <a:srgbClr val="000000"/>
         </a:buClr>
         <a:buFont typeface="Arial"/>
-        <a:defRPr b="0" i="0" sz="1400" u="none" cap="none" strike="noStrike">
+        <a:defRPr sz="1400" b="0" i="0" u="none" strike="noStrike" cap="none">
           <a:solidFill>
             <a:srgbClr val="000000"/>
           </a:solidFill>
@@ -8163,7 +8259,7 @@
           <a:sym typeface="Arial"/>
         </a:defRPr>
       </a:lvl6pPr>
-      <a:lvl7pPr lvl="6" marR="0" rtl="0" algn="l">
+      <a:lvl7pPr marR="0" lvl="6" algn="l" rtl="0">
         <a:lnSpc>
           <a:spcPct val="100000"/>
         </a:lnSpc>
@@ -8177,7 +8273,7 @@
           <a:srgbClr val="000000"/>
         </a:buClr>
         <a:buFont typeface="Arial"/>
-        <a:defRPr b="0" i="0" sz="1400" u="none" cap="none" strike="noStrike">
+        <a:defRPr sz="1400" b="0" i="0" u="none" strike="noStrike" cap="none">
           <a:solidFill>
             <a:srgbClr val="000000"/>
           </a:solidFill>
@@ -8187,7 +8283,7 @@
           <a:sym typeface="Arial"/>
         </a:defRPr>
       </a:lvl7pPr>
-      <a:lvl8pPr lvl="7" marR="0" rtl="0" algn="l">
+      <a:lvl8pPr marR="0" lvl="7" algn="l" rtl="0">
         <a:lnSpc>
           <a:spcPct val="100000"/>
         </a:lnSpc>
@@ -8201,7 +8297,7 @@
           <a:srgbClr val="000000"/>
         </a:buClr>
         <a:buFont typeface="Arial"/>
-        <a:defRPr b="0" i="0" sz="1400" u="none" cap="none" strike="noStrike">
+        <a:defRPr sz="1400" b="0" i="0" u="none" strike="noStrike" cap="none">
           <a:solidFill>
             <a:srgbClr val="000000"/>
           </a:solidFill>
@@ -8211,7 +8307,7 @@
           <a:sym typeface="Arial"/>
         </a:defRPr>
       </a:lvl8pPr>
-      <a:lvl9pPr lvl="8" marR="0" rtl="0" algn="l">
+      <a:lvl9pPr marR="0" lvl="8" algn="l" rtl="0">
         <a:lnSpc>
           <a:spcPct val="100000"/>
         </a:lnSpc>
@@ -8225,7 +8321,7 @@
           <a:srgbClr val="000000"/>
         </a:buClr>
         <a:buFont typeface="Arial"/>
-        <a:defRPr b="0" i="0" sz="1400" u="none" cap="none" strike="noStrike">
+        <a:defRPr sz="1400" b="0" i="0" u="none" strike="noStrike" cap="none">
           <a:solidFill>
             <a:srgbClr val="000000"/>
           </a:solidFill>
@@ -8237,7 +8333,7 @@
       </a:lvl9pPr>
     </p:bodyStyle>
     <p:otherStyle>
-      <a:defPPr lvl="0" marR="0" rtl="0" algn="l">
+      <a:defPPr marR="0" lvl="0" algn="l" rtl="0">
         <a:lnSpc>
           <a:spcPct val="100000"/>
         </a:lnSpc>
@@ -8248,7 +8344,7 @@
           <a:spcPts val="0"/>
         </a:spcAft>
       </a:defPPr>
-      <a:lvl1pPr lvl="0" marR="0" rtl="0" algn="l">
+      <a:lvl1pPr marR="0" lvl="0" algn="l" rtl="0">
         <a:lnSpc>
           <a:spcPct val="100000"/>
         </a:lnSpc>
@@ -8262,7 +8358,7 @@
           <a:srgbClr val="000000"/>
         </a:buClr>
         <a:buFont typeface="Arial"/>
-        <a:defRPr b="0" i="0" sz="1400" u="none" cap="none" strike="noStrike">
+        <a:defRPr sz="1400" b="0" i="0" u="none" strike="noStrike" cap="none">
           <a:solidFill>
             <a:srgbClr val="000000"/>
           </a:solidFill>
@@ -8272,7 +8368,7 @@
           <a:sym typeface="Arial"/>
         </a:defRPr>
       </a:lvl1pPr>
-      <a:lvl2pPr lvl="1" marR="0" rtl="0" algn="l">
+      <a:lvl2pPr marR="0" lvl="1" algn="l" rtl="0">
         <a:lnSpc>
           <a:spcPct val="100000"/>
         </a:lnSpc>
@@ -8286,7 +8382,7 @@
           <a:srgbClr val="000000"/>
         </a:buClr>
         <a:buFont typeface="Arial"/>
-        <a:defRPr b="0" i="0" sz="1400" u="none" cap="none" strike="noStrike">
+        <a:defRPr sz="1400" b="0" i="0" u="none" strike="noStrike" cap="none">
           <a:solidFill>
             <a:srgbClr val="000000"/>
           </a:solidFill>
@@ -8296,7 +8392,7 @@
           <a:sym typeface="Arial"/>
         </a:defRPr>
       </a:lvl2pPr>
-      <a:lvl3pPr lvl="2" marR="0" rtl="0" algn="l">
+      <a:lvl3pPr marR="0" lvl="2" algn="l" rtl="0">
         <a:lnSpc>
           <a:spcPct val="100000"/>
         </a:lnSpc>
@@ -8310,7 +8406,7 @@
           <a:srgbClr val="000000"/>
         </a:buClr>
         <a:buFont typeface="Arial"/>
-        <a:defRPr b="0" i="0" sz="1400" u="none" cap="none" strike="noStrike">
+        <a:defRPr sz="1400" b="0" i="0" u="none" strike="noStrike" cap="none">
           <a:solidFill>
             <a:srgbClr val="000000"/>
           </a:solidFill>
@@ -8320,7 +8416,7 @@
           <a:sym typeface="Arial"/>
         </a:defRPr>
       </a:lvl3pPr>
-      <a:lvl4pPr lvl="3" marR="0" rtl="0" algn="l">
+      <a:lvl4pPr marR="0" lvl="3" algn="l" rtl="0">
         <a:lnSpc>
           <a:spcPct val="100000"/>
         </a:lnSpc>
@@ -8334,7 +8430,7 @@
           <a:srgbClr val="000000"/>
         </a:buClr>
         <a:buFont typeface="Arial"/>
-        <a:defRPr b="0" i="0" sz="1400" u="none" cap="none" strike="noStrike">
+        <a:defRPr sz="1400" b="0" i="0" u="none" strike="noStrike" cap="none">
           <a:solidFill>
             <a:srgbClr val="000000"/>
           </a:solidFill>
@@ -8344,7 +8440,7 @@
           <a:sym typeface="Arial"/>
         </a:defRPr>
       </a:lvl4pPr>
-      <a:lvl5pPr lvl="4" marR="0" rtl="0" algn="l">
+      <a:lvl5pPr marR="0" lvl="4" algn="l" rtl="0">
         <a:lnSpc>
           <a:spcPct val="100000"/>
         </a:lnSpc>
@@ -8358,7 +8454,7 @@
           <a:srgbClr val="000000"/>
         </a:buClr>
         <a:buFont typeface="Arial"/>
-        <a:defRPr b="0" i="0" sz="1400" u="none" cap="none" strike="noStrike">
+        <a:defRPr sz="1400" b="0" i="0" u="none" strike="noStrike" cap="none">
           <a:solidFill>
             <a:srgbClr val="000000"/>
           </a:solidFill>
@@ -8368,7 +8464,7 @@
           <a:sym typeface="Arial"/>
         </a:defRPr>
       </a:lvl5pPr>
-      <a:lvl6pPr lvl="5" marR="0" rtl="0" algn="l">
+      <a:lvl6pPr marR="0" lvl="5" algn="l" rtl="0">
         <a:lnSpc>
           <a:spcPct val="100000"/>
         </a:lnSpc>
@@ -8382,7 +8478,7 @@
           <a:srgbClr val="000000"/>
         </a:buClr>
         <a:buFont typeface="Arial"/>
-        <a:defRPr b="0" i="0" sz="1400" u="none" cap="none" strike="noStrike">
+        <a:defRPr sz="1400" b="0" i="0" u="none" strike="noStrike" cap="none">
           <a:solidFill>
             <a:srgbClr val="000000"/>
           </a:solidFill>
@@ -8392,7 +8488,7 @@
           <a:sym typeface="Arial"/>
         </a:defRPr>
       </a:lvl6pPr>
-      <a:lvl7pPr lvl="6" marR="0" rtl="0" algn="l">
+      <a:lvl7pPr marR="0" lvl="6" algn="l" rtl="0">
         <a:lnSpc>
           <a:spcPct val="100000"/>
         </a:lnSpc>
@@ -8406,7 +8502,7 @@
           <a:srgbClr val="000000"/>
         </a:buClr>
         <a:buFont typeface="Arial"/>
-        <a:defRPr b="0" i="0" sz="1400" u="none" cap="none" strike="noStrike">
+        <a:defRPr sz="1400" b="0" i="0" u="none" strike="noStrike" cap="none">
           <a:solidFill>
             <a:srgbClr val="000000"/>
           </a:solidFill>
@@ -8416,7 +8512,7 @@
           <a:sym typeface="Arial"/>
         </a:defRPr>
       </a:lvl7pPr>
-      <a:lvl8pPr lvl="7" marR="0" rtl="0" algn="l">
+      <a:lvl8pPr marR="0" lvl="7" algn="l" rtl="0">
         <a:lnSpc>
           <a:spcPct val="100000"/>
         </a:lnSpc>
@@ -8430,7 +8526,7 @@
           <a:srgbClr val="000000"/>
         </a:buClr>
         <a:buFont typeface="Arial"/>
-        <a:defRPr b="0" i="0" sz="1400" u="none" cap="none" strike="noStrike">
+        <a:defRPr sz="1400" b="0" i="0" u="none" strike="noStrike" cap="none">
           <a:solidFill>
             <a:srgbClr val="000000"/>
           </a:solidFill>
@@ -8440,7 +8536,7 @@
           <a:sym typeface="Arial"/>
         </a:defRPr>
       </a:lvl8pPr>
-      <a:lvl9pPr lvl="8" marR="0" rtl="0" algn="l">
+      <a:lvl9pPr marR="0" lvl="8" algn="l" rtl="0">
         <a:lnSpc>
           <a:spcPct val="100000"/>
         </a:lnSpc>
@@ -8454,7 +8550,7 @@
           <a:srgbClr val="000000"/>
         </a:buClr>
         <a:buFont typeface="Arial"/>
-        <a:defRPr b="0" i="0" sz="1400" u="none" cap="none" strike="noStrike">
+        <a:defRPr sz="1400" b="0" i="0" u="none" strike="noStrike" cap="none">
           <a:solidFill>
             <a:srgbClr val="000000"/>
           </a:solidFill>
@@ -8470,11 +8566,11 @@
 </file>
 
 <file path=ppt/slides/slide1.xml><?xml version="1.0" encoding="utf-8"?>
-<p:sld xmlns:a="http://schemas.openxmlformats.org/drawingml/2006/main" xmlns:r="http://schemas.openxmlformats.org/officeDocument/2006/relationships" xmlns:mc="http://schemas.openxmlformats.org/markup-compatibility/2006" xmlns:mv="urn:schemas-microsoft-com:mac:vml" xmlns:p="http://schemas.openxmlformats.org/presentationml/2006/main" xmlns:c="http://schemas.openxmlformats.org/drawingml/2006/chart" xmlns:dgm="http://schemas.openxmlformats.org/drawingml/2006/diagram" xmlns:o="urn:schemas-microsoft-com:office:office" xmlns:v="urn:schemas-microsoft-com:vml" xmlns:pvml="urn:schemas-microsoft-com:office:powerpoint" xmlns:com="http://schemas.openxmlformats.org/drawingml/2006/compatibility" xmlns:p14="http://schemas.microsoft.com/office/powerpoint/2010/main" xmlns:p15="http://schemas.microsoft.com/office/powerpoint/2012/main" xmlns:ahyp="http://schemas.microsoft.com/office/drawing/2018/hyperlinkcolor">
+<p:sld xmlns:a="http://schemas.openxmlformats.org/drawingml/2006/main" xmlns:r="http://schemas.openxmlformats.org/officeDocument/2006/relationships" xmlns:p="http://schemas.openxmlformats.org/presentationml/2006/main">
   <p:cSld>
     <p:spTree>
       <p:nvGrpSpPr>
-        <p:cNvPr id="96" name="Shape 96"/>
+        <p:cNvPr id="1" name="Shape 102"/>
         <p:cNvGrpSpPr/>
         <p:nvPr/>
       </p:nvGrpSpPr>
@@ -8486,17 +8582,49 @@
           <a:chExt cx="0" cy="0"/>
         </a:xfrm>
       </p:grpSpPr>
+      <p:pic>
+        <p:nvPicPr>
+          <p:cNvPr id="4" name="Picture 3" descr="A blue hills with a blue sky&#10;&#10;AI-generated content may be incorrect.">
+            <a:extLst>
+              <a:ext uri="{FF2B5EF4-FFF2-40B4-BE49-F238E27FC236}">
+                <a16:creationId xmlns:a16="http://schemas.microsoft.com/office/drawing/2014/main" id="{184A8A15-966E-0106-10AF-4F1334C73909}"/>
+              </a:ext>
+            </a:extLst>
+          </p:cNvPr>
+          <p:cNvPicPr>
+            <a:picLocks noChangeAspect="1"/>
+          </p:cNvPicPr>
+          <p:nvPr/>
+        </p:nvPicPr>
+        <p:blipFill>
+          <a:blip r:embed="rId3"/>
+          <a:stretch>
+            <a:fillRect/>
+          </a:stretch>
+        </p:blipFill>
+        <p:spPr>
+          <a:xfrm>
+            <a:off x="12295" y="0"/>
+            <a:ext cx="9119412" cy="5143500"/>
+          </a:xfrm>
+          <a:prstGeom prst="rect">
+            <a:avLst/>
+          </a:prstGeom>
+        </p:spPr>
+      </p:pic>
       <p:sp>
         <p:nvSpPr>
-          <p:cNvPr id="97" name="Google Shape;97;p13"/>
-          <p:cNvSpPr txBox="1"/>
+          <p:cNvPr id="103" name="Google Shape;103;p14"/>
+          <p:cNvSpPr txBox="1">
+            <a:spLocks noGrp="1"/>
+          </p:cNvSpPr>
           <p:nvPr>
             <p:ph type="ctrTitle"/>
           </p:nvPr>
         </p:nvSpPr>
         <p:spPr>
           <a:xfrm>
-            <a:off x="727950" y="1683500"/>
+            <a:off x="2243622" y="1872224"/>
             <a:ext cx="7688100" cy="1664700"/>
           </a:xfrm>
           <a:prstGeom prst="rect">
@@ -8504,12 +8632,12 @@
           </a:prstGeom>
         </p:spPr>
         <p:txBody>
-          <a:bodyPr anchorCtr="0" anchor="t" bIns="91425" lIns="91425" spcFirstLastPara="1" rIns="91425" wrap="square" tIns="91425">
+          <a:bodyPr spcFirstLastPara="1" wrap="square" lIns="91425" tIns="91425" rIns="91425" bIns="91425" anchor="t" anchorCtr="0">
             <a:normAutofit/>
           </a:bodyPr>
           <a:lstStyle/>
           <a:p>
-            <a:pPr indent="0" lvl="0" marL="0" rtl="0" algn="l">
+            <a:pPr marL="0" lvl="0" indent="0" algn="l" rtl="0">
               <a:spcBef>
                 <a:spcPts val="0"/>
               </a:spcBef>
@@ -8519,37 +8647,39 @@
               <a:buNone/>
             </a:pPr>
             <a:r>
-              <a:rPr lang="en-GB"/>
+              <a:rPr lang="en-GB" dirty="0"/>
               <a:t>Python Tsunami</a:t>
             </a:r>
-            <a:endParaRPr/>
+            <a:endParaRPr dirty="0"/>
           </a:p>
         </p:txBody>
       </p:sp>
       <p:sp>
         <p:nvSpPr>
-          <p:cNvPr id="98" name="Google Shape;98;p13"/>
-          <p:cNvSpPr txBox="1"/>
+          <p:cNvPr id="104" name="Google Shape;104;p14"/>
+          <p:cNvSpPr txBox="1">
+            <a:spLocks noGrp="1"/>
+          </p:cNvSpPr>
           <p:nvPr>
-            <p:ph idx="1" type="subTitle"/>
+            <p:ph type="subTitle" idx="1"/>
           </p:nvPr>
         </p:nvSpPr>
         <p:spPr>
           <a:xfrm>
-            <a:off x="729627" y="3172900"/>
-            <a:ext cx="7688100" cy="541200"/>
+            <a:off x="1677604" y="2787701"/>
+            <a:ext cx="5222774" cy="541200"/>
           </a:xfrm>
           <a:prstGeom prst="rect">
             <a:avLst/>
           </a:prstGeom>
         </p:spPr>
         <p:txBody>
-          <a:bodyPr anchorCtr="0" anchor="t" bIns="91425" lIns="91425" spcFirstLastPara="1" rIns="91425" wrap="square" tIns="91425">
+          <a:bodyPr spcFirstLastPara="1" wrap="square" lIns="91425" tIns="91425" rIns="91425" bIns="91425" anchor="t" anchorCtr="0">
             <a:normAutofit/>
           </a:bodyPr>
           <a:lstStyle/>
           <a:p>
-            <a:pPr indent="0" lvl="0" marL="0" rtl="0" algn="l">
+            <a:pPr marL="0" lvl="0" indent="0" algn="ctr" rtl="0">
               <a:spcBef>
                 <a:spcPts val="0"/>
               </a:spcBef>
@@ -8559,10 +8689,22 @@
               <a:buNone/>
             </a:pPr>
             <a:r>
-              <a:rPr lang="en-GB" sz="2300"/>
-              <a:t>Local Installations</a:t>
+              <a:rPr lang="en-GB" sz="1800" dirty="0">
+                <a:solidFill>
+                  <a:schemeClr val="tx2">
+                    <a:lumMod val="10000"/>
+                  </a:schemeClr>
+                </a:solidFill>
+              </a:rPr>
+              <a:t>Local Installation</a:t>
             </a:r>
-            <a:endParaRPr sz="2300"/>
+            <a:endParaRPr sz="1800" dirty="0">
+              <a:solidFill>
+                <a:schemeClr val="tx2">
+                  <a:lumMod val="10000"/>
+                </a:schemeClr>
+              </a:solidFill>
+            </a:endParaRPr>
           </a:p>
         </p:txBody>
       </p:sp>
@@ -8575,11 +8717,11 @@
 </file>
 
 <file path=ppt/slides/slide10.xml><?xml version="1.0" encoding="utf-8"?>
-<p:sld xmlns:a="http://schemas.openxmlformats.org/drawingml/2006/main" xmlns:r="http://schemas.openxmlformats.org/officeDocument/2006/relationships" xmlns:mc="http://schemas.openxmlformats.org/markup-compatibility/2006" xmlns:mv="urn:schemas-microsoft-com:mac:vml" xmlns:p="http://schemas.openxmlformats.org/presentationml/2006/main" xmlns:c="http://schemas.openxmlformats.org/drawingml/2006/chart" xmlns:dgm="http://schemas.openxmlformats.org/drawingml/2006/diagram" xmlns:o="urn:schemas-microsoft-com:office:office" xmlns:v="urn:schemas-microsoft-com:vml" xmlns:pvml="urn:schemas-microsoft-com:office:powerpoint" xmlns:com="http://schemas.openxmlformats.org/drawingml/2006/compatibility" xmlns:p14="http://schemas.microsoft.com/office/powerpoint/2010/main" xmlns:p15="http://schemas.microsoft.com/office/powerpoint/2012/main" xmlns:ahyp="http://schemas.microsoft.com/office/drawing/2018/hyperlinkcolor">
+<p:sld xmlns:a="http://schemas.openxmlformats.org/drawingml/2006/main" xmlns:r="http://schemas.openxmlformats.org/officeDocument/2006/relationships" xmlns:p="http://schemas.openxmlformats.org/presentationml/2006/main">
   <p:cSld>
     <p:spTree>
       <p:nvGrpSpPr>
-        <p:cNvPr id="164" name="Shape 164"/>
+        <p:cNvPr id="1" name="Shape 164"/>
         <p:cNvGrpSpPr/>
         <p:nvPr/>
       </p:nvGrpSpPr>
@@ -8594,7 +8736,9 @@
       <p:sp>
         <p:nvSpPr>
           <p:cNvPr id="165" name="Google Shape;165;p22"/>
-          <p:cNvSpPr txBox="1"/>
+          <p:cNvSpPr txBox="1">
+            <a:spLocks noGrp="1"/>
+          </p:cNvSpPr>
           <p:nvPr>
             <p:ph type="title"/>
           </p:nvPr>
@@ -8609,12 +8753,12 @@
           </a:prstGeom>
         </p:spPr>
         <p:txBody>
-          <a:bodyPr anchorCtr="0" anchor="t" bIns="91425" lIns="91425" spcFirstLastPara="1" rIns="91425" wrap="square" tIns="91425">
+          <a:bodyPr spcFirstLastPara="1" wrap="square" lIns="91425" tIns="91425" rIns="91425" bIns="91425" anchor="t" anchorCtr="0">
             <a:normAutofit fontScale="90000"/>
           </a:bodyPr>
           <a:lstStyle/>
           <a:p>
-            <a:pPr indent="0" lvl="0" marL="0" rtl="0" algn="l">
+            <a:pPr marL="0" lvl="0" indent="0" algn="l" rtl="0">
               <a:spcBef>
                 <a:spcPts val="0"/>
               </a:spcBef>
@@ -8647,7 +8791,7 @@
         </p:blipFill>
         <p:spPr>
           <a:xfrm>
-            <a:off x="460750" y="1583525"/>
+            <a:off x="531538" y="1624469"/>
             <a:ext cx="3989600" cy="2404475"/>
           </a:xfrm>
           <a:prstGeom prst="rect">
@@ -8679,12 +8823,12 @@
           </a:ln>
         </p:spPr>
         <p:txBody>
-          <a:bodyPr anchorCtr="0" anchor="t" bIns="91425" lIns="91425" spcFirstLastPara="1" rIns="91425" wrap="square" tIns="91425">
+          <a:bodyPr spcFirstLastPara="1" wrap="square" lIns="91425" tIns="91425" rIns="91425" bIns="91425" anchor="t" anchorCtr="0">
             <a:noAutofit/>
           </a:bodyPr>
           <a:lstStyle/>
           <a:p>
-            <a:pPr indent="0" lvl="0" marL="0" rtl="0" algn="ctr">
+            <a:pPr marL="0" lvl="0" indent="0" algn="ctr" rtl="0">
               <a:lnSpc>
                 <a:spcPct val="115000"/>
               </a:lnSpc>
@@ -8697,7 +8841,7 @@
               <a:buNone/>
             </a:pPr>
             <a:r>
-              <a:rPr lang="en-GB" sz="1800">
+              <a:rPr lang="en-GB" sz="1500" b="1" dirty="0">
                 <a:solidFill>
                   <a:schemeClr val="accent1"/>
                 </a:solidFill>
@@ -8708,7 +8852,7 @@
               </a:rPr>
               <a:t>Now how do you get packages installed?</a:t>
             </a:r>
-            <a:endParaRPr sz="1800">
+            <a:endParaRPr sz="1500" b="1" dirty="0">
               <a:solidFill>
                 <a:schemeClr val="accent1"/>
               </a:solidFill>
@@ -8728,7 +8872,7 @@
         </p:nvSpPr>
         <p:spPr>
           <a:xfrm>
-            <a:off x="707225" y="1105100"/>
+            <a:off x="707225" y="1227932"/>
             <a:ext cx="3442500" cy="985500"/>
           </a:xfrm>
           <a:prstGeom prst="rect">
@@ -8740,12 +8884,12 @@
           </a:ln>
         </p:spPr>
         <p:txBody>
-          <a:bodyPr anchorCtr="0" anchor="t" bIns="91425" lIns="91425" spcFirstLastPara="1" rIns="91425" wrap="square" tIns="91425">
+          <a:bodyPr spcFirstLastPara="1" wrap="square" lIns="91425" tIns="91425" rIns="91425" bIns="91425" anchor="t" anchorCtr="0">
             <a:noAutofit/>
           </a:bodyPr>
           <a:lstStyle/>
           <a:p>
-            <a:pPr indent="0" lvl="0" marL="0" rtl="0" algn="ctr">
+            <a:pPr marL="0" lvl="0" indent="0" algn="ctr" rtl="0">
               <a:lnSpc>
                 <a:spcPct val="115000"/>
               </a:lnSpc>
@@ -8758,7 +8902,7 @@
               <a:buNone/>
             </a:pPr>
             <a:r>
-              <a:rPr lang="en-GB" sz="1500">
+              <a:rPr lang="en-GB" sz="1500" dirty="0">
                 <a:solidFill>
                   <a:schemeClr val="accent1"/>
                 </a:solidFill>
@@ -8769,7 +8913,7 @@
               </a:rPr>
               <a:t>Option 1: Pip + any bash terminal</a:t>
             </a:r>
-            <a:endParaRPr sz="1500">
+            <a:endParaRPr sz="1500" dirty="0">
               <a:solidFill>
                 <a:schemeClr val="accent1"/>
               </a:solidFill>
@@ -8801,12 +8945,12 @@
           </a:ln>
         </p:spPr>
         <p:txBody>
-          <a:bodyPr anchorCtr="0" anchor="t" bIns="91425" lIns="91425" spcFirstLastPara="1" rIns="91425" wrap="square" tIns="91425">
+          <a:bodyPr spcFirstLastPara="1" wrap="square" lIns="91425" tIns="91425" rIns="91425" bIns="91425" anchor="t" anchorCtr="0">
             <a:noAutofit/>
           </a:bodyPr>
           <a:lstStyle/>
           <a:p>
-            <a:pPr indent="0" lvl="0" marL="0" rtl="0" algn="ctr">
+            <a:pPr marL="0" lvl="0" indent="0" algn="ctr" rtl="0">
               <a:lnSpc>
                 <a:spcPct val="115000"/>
               </a:lnSpc>
@@ -8841,7 +8985,7 @@
             </a:endParaRPr>
           </a:p>
           <a:p>
-            <a:pPr indent="0" lvl="0" marL="0" rtl="0" algn="ctr">
+            <a:pPr marL="0" lvl="0" indent="0" algn="ctr" rtl="0">
               <a:lnSpc>
                 <a:spcPct val="115000"/>
               </a:lnSpc>
@@ -8885,8 +9029,8 @@
         </p:nvSpPr>
         <p:spPr>
           <a:xfrm>
-            <a:off x="5082700" y="1138000"/>
-            <a:ext cx="3442500" cy="985500"/>
+            <a:off x="5085087" y="1227932"/>
+            <a:ext cx="3442500" cy="1302874"/>
           </a:xfrm>
           <a:prstGeom prst="rect">
             <a:avLst/>
@@ -8897,12 +9041,12 @@
           </a:ln>
         </p:spPr>
         <p:txBody>
-          <a:bodyPr anchorCtr="0" anchor="t" bIns="91425" lIns="91425" spcFirstLastPara="1" rIns="91425" wrap="square" tIns="91425">
+          <a:bodyPr spcFirstLastPara="1" wrap="square" lIns="91425" tIns="91425" rIns="91425" bIns="91425" anchor="t" anchorCtr="0">
             <a:noAutofit/>
           </a:bodyPr>
           <a:lstStyle/>
           <a:p>
-            <a:pPr indent="0" lvl="0" marL="0" rtl="0" algn="ctr">
+            <a:pPr marL="0" lvl="0" indent="0" algn="ctr" rtl="0">
               <a:lnSpc>
                 <a:spcPct val="115000"/>
               </a:lnSpc>
@@ -8915,7 +9059,7 @@
               <a:buNone/>
             </a:pPr>
             <a:r>
-              <a:rPr lang="en-GB" sz="1500">
+              <a:rPr lang="en-GB" sz="1500" dirty="0">
                 <a:solidFill>
                   <a:schemeClr val="accent1"/>
                 </a:solidFill>
@@ -8924,9 +9068,21 @@
                 <a:cs typeface="Lato"/>
                 <a:sym typeface="Lato"/>
               </a:rPr>
-              <a:t>Option 2: Pip in powershell</a:t>
+              <a:t>Option 2: Pip in </a:t>
             </a:r>
-            <a:endParaRPr sz="1500">
+            <a:r>
+              <a:rPr lang="en-GB" sz="1500" dirty="0" err="1">
+                <a:solidFill>
+                  <a:schemeClr val="accent1"/>
+                </a:solidFill>
+                <a:latin typeface="Lato"/>
+                <a:ea typeface="Lato"/>
+                <a:cs typeface="Lato"/>
+                <a:sym typeface="Lato"/>
+              </a:rPr>
+              <a:t>powershell</a:t>
+            </a:r>
+            <a:endParaRPr sz="1500" dirty="0">
               <a:solidFill>
                 <a:schemeClr val="accent1"/>
               </a:solidFill>
@@ -8954,7 +9110,7 @@
         </p:blipFill>
         <p:spPr>
           <a:xfrm>
-            <a:off x="4956250" y="1582900"/>
+            <a:off x="4833420" y="1624469"/>
             <a:ext cx="3989601" cy="2311290"/>
           </a:xfrm>
           <a:prstGeom prst="rect">
@@ -8986,12 +9142,12 @@
           </a:ln>
         </p:spPr>
         <p:txBody>
-          <a:bodyPr anchorCtr="0" anchor="t" bIns="91425" lIns="91425" spcFirstLastPara="1" rIns="91425" wrap="square" tIns="91425">
+          <a:bodyPr spcFirstLastPara="1" wrap="square" lIns="91425" tIns="91425" rIns="91425" bIns="91425" anchor="t" anchorCtr="0">
             <a:noAutofit/>
           </a:bodyPr>
           <a:lstStyle/>
           <a:p>
-            <a:pPr indent="0" lvl="0" marL="0" rtl="0" algn="ctr">
+            <a:pPr marL="0" lvl="0" indent="0" algn="ctr" rtl="0">
               <a:lnSpc>
                 <a:spcPct val="115000"/>
               </a:lnSpc>
@@ -9035,7 +9191,7 @@
         </p:nvSpPr>
         <p:spPr>
           <a:xfrm>
-            <a:off x="1978950" y="4490700"/>
+            <a:off x="2240370" y="4555800"/>
             <a:ext cx="5186100" cy="535200"/>
           </a:xfrm>
           <a:prstGeom prst="rect">
@@ -9047,12 +9203,12 @@
           </a:ln>
         </p:spPr>
         <p:txBody>
-          <a:bodyPr anchorCtr="0" anchor="t" bIns="91425" lIns="91425" spcFirstLastPara="1" rIns="91425" wrap="square" tIns="91425">
+          <a:bodyPr spcFirstLastPara="1" wrap="square" lIns="91425" tIns="91425" rIns="91425" bIns="91425" anchor="t" anchorCtr="0">
             <a:noAutofit/>
           </a:bodyPr>
           <a:lstStyle/>
           <a:p>
-            <a:pPr indent="0" lvl="0" marL="0" rtl="0" algn="ctr">
+            <a:pPr marL="0" lvl="0" indent="0" algn="ctr" rtl="0">
               <a:lnSpc>
                 <a:spcPct val="115000"/>
               </a:lnSpc>
@@ -9065,7 +9221,7 @@
               <a:buNone/>
             </a:pPr>
             <a:r>
-              <a:rPr lang="en-GB" sz="1800">
+              <a:rPr lang="en-GB" sz="1500" b="1" dirty="0">
                 <a:solidFill>
                   <a:schemeClr val="accent1"/>
                 </a:solidFill>
@@ -9076,7 +9232,7 @@
               </a:rPr>
               <a:t>Some systems have pip3 instead of pip.</a:t>
             </a:r>
-            <a:endParaRPr sz="1800">
+            <a:endParaRPr sz="1500" b="1" dirty="0">
               <a:solidFill>
                 <a:schemeClr val="accent1"/>
               </a:solidFill>
@@ -9097,11 +9253,11 @@
 </file>
 
 <file path=ppt/slides/slide11.xml><?xml version="1.0" encoding="utf-8"?>
-<p:sld xmlns:a="http://schemas.openxmlformats.org/drawingml/2006/main" xmlns:r="http://schemas.openxmlformats.org/officeDocument/2006/relationships" xmlns:mc="http://schemas.openxmlformats.org/markup-compatibility/2006" xmlns:mv="urn:schemas-microsoft-com:mac:vml" xmlns:p="http://schemas.openxmlformats.org/presentationml/2006/main" xmlns:c="http://schemas.openxmlformats.org/drawingml/2006/chart" xmlns:dgm="http://schemas.openxmlformats.org/drawingml/2006/diagram" xmlns:o="urn:schemas-microsoft-com:office:office" xmlns:v="urn:schemas-microsoft-com:vml" xmlns:pvml="urn:schemas-microsoft-com:office:powerpoint" xmlns:com="http://schemas.openxmlformats.org/drawingml/2006/compatibility" xmlns:p14="http://schemas.microsoft.com/office/powerpoint/2010/main" xmlns:p15="http://schemas.microsoft.com/office/powerpoint/2012/main" xmlns:ahyp="http://schemas.microsoft.com/office/drawing/2018/hyperlinkcolor">
+<p:sld xmlns:a="http://schemas.openxmlformats.org/drawingml/2006/main" xmlns:r="http://schemas.openxmlformats.org/officeDocument/2006/relationships" xmlns:p="http://schemas.openxmlformats.org/presentationml/2006/main">
   <p:cSld>
     <p:spTree>
       <p:nvGrpSpPr>
-        <p:cNvPr id="177" name="Shape 177"/>
+        <p:cNvPr id="1" name="Shape 177"/>
         <p:cNvGrpSpPr/>
         <p:nvPr/>
       </p:nvGrpSpPr>
@@ -9116,14 +9272,16 @@
       <p:sp>
         <p:nvSpPr>
           <p:cNvPr id="178" name="Google Shape;178;p23"/>
-          <p:cNvSpPr txBox="1"/>
+          <p:cNvSpPr txBox="1">
+            <a:spLocks noGrp="1"/>
+          </p:cNvSpPr>
           <p:nvPr>
             <p:ph type="title"/>
           </p:nvPr>
         </p:nvSpPr>
         <p:spPr>
           <a:xfrm>
-            <a:off x="460750" y="-23700"/>
+            <a:off x="460750" y="85484"/>
             <a:ext cx="7688700" cy="535200"/>
           </a:xfrm>
           <a:prstGeom prst="rect">
@@ -9131,12 +9289,12 @@
           </a:prstGeom>
         </p:spPr>
         <p:txBody>
-          <a:bodyPr anchorCtr="0" anchor="t" bIns="91425" lIns="91425" spcFirstLastPara="1" rIns="91425" wrap="square" tIns="91425">
+          <a:bodyPr spcFirstLastPara="1" wrap="square" lIns="91425" tIns="91425" rIns="91425" bIns="91425" anchor="t" anchorCtr="0">
             <a:normAutofit fontScale="90000"/>
           </a:bodyPr>
           <a:lstStyle/>
           <a:p>
-            <a:pPr indent="0" lvl="0" marL="0" rtl="0" algn="l">
+            <a:pPr marL="0" lvl="0" indent="0" algn="l" rtl="0">
               <a:spcBef>
                 <a:spcPts val="0"/>
               </a:spcBef>
@@ -9146,40 +9304,13 @@
               <a:buNone/>
             </a:pPr>
             <a:r>
-              <a:rPr lang="en-GB"/>
+              <a:rPr lang="en-GB" dirty="0"/>
               <a:t>Dataset Exercise</a:t>
             </a:r>
-            <a:endParaRPr/>
+            <a:endParaRPr dirty="0"/>
           </a:p>
         </p:txBody>
       </p:sp>
-      <p:pic>
-        <p:nvPicPr>
-          <p:cNvPr id="179" name="Google Shape;179;p23"/>
-          <p:cNvPicPr preferRelativeResize="0"/>
-          <p:nvPr/>
-        </p:nvPicPr>
-        <p:blipFill rotWithShape="1">
-          <a:blip r:embed="rId3">
-            <a:alphaModFix/>
-          </a:blip>
-          <a:srcRect b="0" l="0" r="0" t="12732"/>
-          <a:stretch/>
-        </p:blipFill>
-        <p:spPr>
-          <a:xfrm>
-            <a:off x="858800" y="1135800"/>
-            <a:ext cx="7060976" cy="3466075"/>
-          </a:xfrm>
-          <a:prstGeom prst="rect">
-            <a:avLst/>
-          </a:prstGeom>
-          <a:noFill/>
-          <a:ln>
-            <a:noFill/>
-          </a:ln>
-        </p:spPr>
-      </p:pic>
       <p:sp>
         <p:nvSpPr>
           <p:cNvPr id="180" name="Google Shape;180;p23"/>
@@ -9200,12 +9331,12 @@
           </a:ln>
         </p:spPr>
         <p:txBody>
-          <a:bodyPr anchorCtr="0" anchor="t" bIns="91425" lIns="91425" spcFirstLastPara="1" rIns="91425" wrap="square" tIns="91425">
+          <a:bodyPr spcFirstLastPara="1" wrap="square" lIns="91425" tIns="91425" rIns="91425" bIns="91425" anchor="t" anchorCtr="0">
             <a:spAutoFit/>
           </a:bodyPr>
           <a:lstStyle/>
           <a:p>
-            <a:pPr indent="0" lvl="0" marL="0" rtl="0" algn="ctr">
+            <a:pPr marL="0" lvl="0" indent="0" algn="ctr" rtl="0">
               <a:spcBef>
                 <a:spcPts val="0"/>
               </a:spcBef>
@@ -9215,7 +9346,7 @@
               <a:buNone/>
             </a:pPr>
             <a:r>
-              <a:rPr b="1" lang="en-GB" sz="1800">
+              <a:rPr lang="en-GB" sz="1800" b="1">
                 <a:solidFill>
                   <a:schemeClr val="lt1"/>
                 </a:solidFill>
@@ -9226,7 +9357,7 @@
               </a:rPr>
               <a:t>I’m looking for someone to share in an adventure</a:t>
             </a:r>
-            <a:endParaRPr b="1" sz="1800">
+            <a:endParaRPr sz="1800" b="1">
               <a:solidFill>
                 <a:schemeClr val="lt1"/>
               </a:solidFill>
@@ -9238,6 +9369,37 @@
           </a:p>
         </p:txBody>
       </p:sp>
+      <p:pic>
+        <p:nvPicPr>
+          <p:cNvPr id="3" name="Picture 2" descr="A cartoon of two people talking&#10;&#10;AI-generated content may be incorrect.">
+            <a:extLst>
+              <a:ext uri="{FF2B5EF4-FFF2-40B4-BE49-F238E27FC236}">
+                <a16:creationId xmlns:a16="http://schemas.microsoft.com/office/drawing/2014/main" id="{0AF423C5-5DBC-470E-B8CE-26EE358F94AE}"/>
+              </a:ext>
+            </a:extLst>
+          </p:cNvPr>
+          <p:cNvPicPr>
+            <a:picLocks noChangeAspect="1"/>
+          </p:cNvPicPr>
+          <p:nvPr/>
+        </p:nvPicPr>
+        <p:blipFill>
+          <a:blip r:embed="rId3"/>
+          <a:srcRect t="800" r="1366" b="10430"/>
+          <a:stretch>
+            <a:fillRect/>
+          </a:stretch>
+        </p:blipFill>
+        <p:spPr>
+          <a:xfrm>
+            <a:off x="2455813" y="899663"/>
+            <a:ext cx="3985930" cy="3974732"/>
+          </a:xfrm>
+          <a:prstGeom prst="rect">
+            <a:avLst/>
+          </a:prstGeom>
+        </p:spPr>
+      </p:pic>
     </p:spTree>
   </p:cSld>
   <p:clrMapOvr>
@@ -9247,11 +9409,11 @@
 </file>
 
 <file path=ppt/slides/slide2.xml><?xml version="1.0" encoding="utf-8"?>
-<p:sld xmlns:a="http://schemas.openxmlformats.org/drawingml/2006/main" xmlns:r="http://schemas.openxmlformats.org/officeDocument/2006/relationships" xmlns:mc="http://schemas.openxmlformats.org/markup-compatibility/2006" xmlns:mv="urn:schemas-microsoft-com:mac:vml" xmlns:p="http://schemas.openxmlformats.org/presentationml/2006/main" xmlns:c="http://schemas.openxmlformats.org/drawingml/2006/chart" xmlns:dgm="http://schemas.openxmlformats.org/drawingml/2006/diagram" xmlns:o="urn:schemas-microsoft-com:office:office" xmlns:v="urn:schemas-microsoft-com:vml" xmlns:pvml="urn:schemas-microsoft-com:office:powerpoint" xmlns:com="http://schemas.openxmlformats.org/drawingml/2006/compatibility" xmlns:p14="http://schemas.microsoft.com/office/powerpoint/2010/main" xmlns:p15="http://schemas.microsoft.com/office/powerpoint/2012/main" xmlns:ahyp="http://schemas.microsoft.com/office/drawing/2018/hyperlinkcolor">
+<p:sld xmlns:a="http://schemas.openxmlformats.org/drawingml/2006/main" xmlns:r="http://schemas.openxmlformats.org/officeDocument/2006/relationships" xmlns:p="http://schemas.openxmlformats.org/presentationml/2006/main">
   <p:cSld>
     <p:spTree>
       <p:nvGrpSpPr>
-        <p:cNvPr id="102" name="Shape 102"/>
+        <p:cNvPr id="1" name="Shape 102"/>
         <p:cNvGrpSpPr/>
         <p:nvPr/>
       </p:nvGrpSpPr>
@@ -9283,12 +9445,12 @@
           </a:ln>
         </p:spPr>
         <p:txBody>
-          <a:bodyPr anchorCtr="0" anchor="t" bIns="91425" lIns="91425" spcFirstLastPara="1" rIns="91425" wrap="square" tIns="91425">
+          <a:bodyPr spcFirstLastPara="1" wrap="square" lIns="91425" tIns="91425" rIns="91425" bIns="91425" anchor="t" anchorCtr="0">
             <a:noAutofit/>
           </a:bodyPr>
           <a:lstStyle/>
           <a:p>
-            <a:pPr indent="0" lvl="0" marL="0" rtl="0" algn="l">
+            <a:pPr marL="0" lvl="0" indent="0" algn="l" rtl="0">
               <a:lnSpc>
                 <a:spcPct val="115000"/>
               </a:lnSpc>
@@ -9300,9 +9462,6 @@
               </a:spcAft>
               <a:buNone/>
             </a:pPr>
-            <a:r>
-              <a:t/>
-            </a:r>
             <a:endParaRPr sz="2100">
               <a:solidFill>
                 <a:srgbClr val="595959"/>
@@ -9314,7 +9473,7 @@
             </a:endParaRPr>
           </a:p>
           <a:p>
-            <a:pPr indent="0" lvl="0" marL="0" rtl="0" algn="l">
+            <a:pPr marL="0" lvl="0" indent="0" algn="l" rtl="0">
               <a:lnSpc>
                 <a:spcPct val="115000"/>
               </a:lnSpc>
@@ -9326,9 +9485,6 @@
               </a:spcAft>
               <a:buNone/>
             </a:pPr>
-            <a:r>
-              <a:t/>
-            </a:r>
             <a:endParaRPr sz="2100">
               <a:solidFill>
                 <a:srgbClr val="595959"/>
@@ -9344,7 +9500,9 @@
       <p:sp>
         <p:nvSpPr>
           <p:cNvPr id="104" name="Google Shape;104;p14"/>
-          <p:cNvSpPr txBox="1"/>
+          <p:cNvSpPr txBox="1">
+            <a:spLocks noGrp="1"/>
+          </p:cNvSpPr>
           <p:nvPr>
             <p:ph type="title"/>
           </p:nvPr>
@@ -9359,12 +9517,12 @@
           </a:prstGeom>
         </p:spPr>
         <p:txBody>
-          <a:bodyPr anchorCtr="0" anchor="t" bIns="91425" lIns="91425" spcFirstLastPara="1" rIns="91425" wrap="square" tIns="91425">
+          <a:bodyPr spcFirstLastPara="1" wrap="square" lIns="91425" tIns="91425" rIns="91425" bIns="91425" anchor="t" anchorCtr="0">
             <a:normAutofit fontScale="90000"/>
           </a:bodyPr>
           <a:lstStyle/>
           <a:p>
-            <a:pPr indent="0" lvl="0" marL="0" rtl="0" algn="l">
+            <a:pPr marL="0" lvl="0" indent="0" algn="l" rtl="0">
               <a:spcBef>
                 <a:spcPts val="0"/>
               </a:spcBef>
@@ -9389,8 +9547,8 @@
         </p:nvSpPr>
         <p:spPr>
           <a:xfrm>
-            <a:off x="778350" y="867300"/>
-            <a:ext cx="5667900" cy="2924400"/>
+            <a:off x="645345" y="1261105"/>
+            <a:ext cx="5971585" cy="3031569"/>
           </a:xfrm>
           <a:prstGeom prst="rect">
             <a:avLst/>
@@ -9401,27 +9559,24 @@
           </a:ln>
         </p:spPr>
         <p:txBody>
-          <a:bodyPr anchorCtr="0" anchor="t" bIns="91425" lIns="91425" spcFirstLastPara="1" rIns="91425" wrap="square" tIns="91425">
+          <a:bodyPr spcFirstLastPara="1" wrap="square" lIns="91425" tIns="91425" rIns="91425" bIns="91425" anchor="t" anchorCtr="0">
             <a:spAutoFit/>
           </a:bodyPr>
           <a:lstStyle/>
           <a:p>
-            <a:pPr indent="0" lvl="0" marL="0" rtl="0" algn="l">
+            <a:pPr marL="0" lvl="0" indent="0" algn="l" rtl="0">
               <a:lnSpc>
                 <a:spcPct val="115000"/>
               </a:lnSpc>
               <a:spcBef>
-                <a:spcPts val="0"/>
+                <a:spcPts val="1200"/>
               </a:spcBef>
               <a:spcAft>
                 <a:spcPts val="0"/>
               </a:spcAft>
               <a:buNone/>
             </a:pPr>
-            <a:r>
-              <a:t/>
-            </a:r>
-            <a:endParaRPr sz="2000">
+            <a:endParaRPr sz="2000" dirty="0">
               <a:solidFill>
                 <a:schemeClr val="accent1"/>
               </a:solidFill>
@@ -9432,7 +9587,7 @@
             </a:endParaRPr>
           </a:p>
           <a:p>
-            <a:pPr indent="-355600" lvl="0" marL="457200" rtl="0" algn="l">
+            <a:pPr marL="387350" lvl="0" indent="-285750" algn="l" rtl="0">
               <a:lnSpc>
                 <a:spcPct val="115000"/>
               </a:lnSpc>
@@ -9446,11 +9601,11 @@
                 <a:schemeClr val="accent1"/>
               </a:buClr>
               <a:buSzPts val="2000"/>
-              <a:buFont typeface="Lato"/>
-              <a:buChar char="●"/>
+              <a:buFont typeface="Arial" panose="020B0604020202020204" pitchFamily="34" charset="0"/>
+              <a:buChar char="•"/>
             </a:pPr>
             <a:r>
-              <a:rPr lang="en-GB" sz="2000">
+              <a:rPr lang="en-GB" sz="1500" dirty="0">
                 <a:solidFill>
                   <a:schemeClr val="accent1"/>
                 </a:solidFill>
@@ -9461,7 +9616,7 @@
               </a:rPr>
               <a:t>Free + Open source solution from Microsoft (there are others)</a:t>
             </a:r>
-            <a:endParaRPr sz="2000">
+            <a:endParaRPr sz="1500" dirty="0">
               <a:solidFill>
                 <a:schemeClr val="accent1"/>
               </a:solidFill>
@@ -9472,12 +9627,12 @@
             </a:endParaRPr>
           </a:p>
           <a:p>
-            <a:pPr indent="-355600" lvl="0" marL="457200" rtl="0" algn="l">
+            <a:pPr marL="387350" lvl="0" indent="-285750" algn="l" rtl="0">
               <a:lnSpc>
                 <a:spcPct val="115000"/>
               </a:lnSpc>
               <a:spcBef>
-                <a:spcPts val="0"/>
+                <a:spcPts val="1200"/>
               </a:spcBef>
               <a:spcAft>
                 <a:spcPts val="0"/>
@@ -9486,11 +9641,11 @@
                 <a:schemeClr val="accent1"/>
               </a:buClr>
               <a:buSzPts val="2000"/>
-              <a:buFont typeface="Lato"/>
-              <a:buChar char="●"/>
+              <a:buFont typeface="Arial" panose="020B0604020202020204" pitchFamily="34" charset="0"/>
+              <a:buChar char="•"/>
             </a:pPr>
             <a:r>
-              <a:rPr lang="en-GB" sz="2000">
+              <a:rPr lang="en-GB" sz="1500" dirty="0">
                 <a:solidFill>
                   <a:schemeClr val="accent1"/>
                 </a:solidFill>
@@ -9501,7 +9656,7 @@
               </a:rPr>
               <a:t>Many programming languages</a:t>
             </a:r>
-            <a:endParaRPr sz="2000">
+            <a:endParaRPr sz="1500" dirty="0">
               <a:solidFill>
                 <a:schemeClr val="accent1"/>
               </a:solidFill>
@@ -9512,12 +9667,12 @@
             </a:endParaRPr>
           </a:p>
           <a:p>
-            <a:pPr indent="-355600" lvl="0" marL="457200" rtl="0" algn="l">
+            <a:pPr marL="387350" lvl="0" indent="-285750" algn="l" rtl="0">
               <a:lnSpc>
                 <a:spcPct val="115000"/>
               </a:lnSpc>
               <a:spcBef>
-                <a:spcPts val="0"/>
+                <a:spcPts val="1200"/>
               </a:spcBef>
               <a:spcAft>
                 <a:spcPts val="0"/>
@@ -9526,11 +9681,11 @@
                 <a:schemeClr val="accent1"/>
               </a:buClr>
               <a:buSzPts val="2000"/>
-              <a:buFont typeface="Lato"/>
-              <a:buChar char="●"/>
+              <a:buFont typeface="Arial" panose="020B0604020202020204" pitchFamily="34" charset="0"/>
+              <a:buChar char="•"/>
             </a:pPr>
             <a:r>
-              <a:rPr lang="en-GB" sz="2000">
+              <a:rPr lang="en-GB" sz="1500" dirty="0" err="1">
                 <a:solidFill>
                   <a:schemeClr val="accent1"/>
                 </a:solidFill>
@@ -9539,9 +9694,21 @@
                 <a:cs typeface="Lato"/>
                 <a:sym typeface="Lato"/>
               </a:rPr>
-              <a:t>Github integration</a:t>
+              <a:t>Github</a:t>
             </a:r>
-            <a:endParaRPr sz="2000">
+            <a:r>
+              <a:rPr lang="en-GB" sz="1500" dirty="0">
+                <a:solidFill>
+                  <a:schemeClr val="accent1"/>
+                </a:solidFill>
+                <a:latin typeface="Lato"/>
+                <a:ea typeface="Lato"/>
+                <a:cs typeface="Lato"/>
+                <a:sym typeface="Lato"/>
+              </a:rPr>
+              <a:t> integration</a:t>
+            </a:r>
+            <a:endParaRPr sz="1500" dirty="0">
               <a:solidFill>
                 <a:schemeClr val="accent1"/>
               </a:solidFill>
@@ -9552,12 +9719,12 @@
             </a:endParaRPr>
           </a:p>
           <a:p>
-            <a:pPr indent="-355600" lvl="0" marL="457200" rtl="0" algn="l">
+            <a:pPr marL="387350" lvl="0" indent="-285750" algn="l" rtl="0">
               <a:lnSpc>
                 <a:spcPct val="115000"/>
               </a:lnSpc>
               <a:spcBef>
-                <a:spcPts val="0"/>
+                <a:spcPts val="1200"/>
               </a:spcBef>
               <a:spcAft>
                 <a:spcPts val="0"/>
@@ -9566,11 +9733,11 @@
                 <a:schemeClr val="accent1"/>
               </a:buClr>
               <a:buSzPts val="2000"/>
-              <a:buFont typeface="Lato"/>
-              <a:buChar char="●"/>
+              <a:buFont typeface="Arial" panose="020B0604020202020204" pitchFamily="34" charset="0"/>
+              <a:buChar char="•"/>
             </a:pPr>
             <a:r>
-              <a:rPr lang="en-GB" sz="2000">
+              <a:rPr lang="en-GB" sz="1500" dirty="0">
                 <a:solidFill>
                   <a:schemeClr val="accent1"/>
                 </a:solidFill>
@@ -9581,7 +9748,7 @@
               </a:rPr>
               <a:t>Easy to install</a:t>
             </a:r>
-            <a:endParaRPr sz="2000">
+            <a:endParaRPr sz="1500" dirty="0">
               <a:solidFill>
                 <a:schemeClr val="accent1"/>
               </a:solidFill>
@@ -9592,7 +9759,7 @@
             </a:endParaRPr>
           </a:p>
           <a:p>
-            <a:pPr indent="0" lvl="0" marL="457200" rtl="0" algn="l">
+            <a:pPr marL="457200" lvl="0" indent="0" algn="l" rtl="0">
               <a:lnSpc>
                 <a:spcPct val="115000"/>
               </a:lnSpc>
@@ -9604,10 +9771,7 @@
               </a:spcAft>
               <a:buNone/>
             </a:pPr>
-            <a:r>
-              <a:t/>
-            </a:r>
-            <a:endParaRPr sz="2000">
+            <a:endParaRPr sz="2000" dirty="0">
               <a:solidFill>
                 <a:schemeClr val="accent1"/>
               </a:solidFill>
@@ -9639,12 +9803,12 @@
           </a:ln>
         </p:spPr>
         <p:txBody>
-          <a:bodyPr anchorCtr="0" anchor="t" bIns="91425" lIns="91425" spcFirstLastPara="1" rIns="91425" wrap="square" tIns="91425">
+          <a:bodyPr spcFirstLastPara="1" wrap="square" lIns="91425" tIns="91425" rIns="91425" bIns="91425" anchor="t" anchorCtr="0">
             <a:spAutoFit/>
           </a:bodyPr>
           <a:lstStyle/>
           <a:p>
-            <a:pPr indent="0" lvl="0" marL="0" rtl="0" algn="r">
+            <a:pPr marL="0" lvl="0" indent="0" algn="r" rtl="0">
               <a:spcBef>
                 <a:spcPts val="0"/>
               </a:spcBef>
@@ -9698,11 +9862,11 @@
 </file>
 
 <file path=ppt/slides/slide3.xml><?xml version="1.0" encoding="utf-8"?>
-<p:sld xmlns:a="http://schemas.openxmlformats.org/drawingml/2006/main" xmlns:r="http://schemas.openxmlformats.org/officeDocument/2006/relationships" xmlns:mc="http://schemas.openxmlformats.org/markup-compatibility/2006" xmlns:mv="urn:schemas-microsoft-com:mac:vml" xmlns:p="http://schemas.openxmlformats.org/presentationml/2006/main" xmlns:c="http://schemas.openxmlformats.org/drawingml/2006/chart" xmlns:dgm="http://schemas.openxmlformats.org/drawingml/2006/diagram" xmlns:o="urn:schemas-microsoft-com:office:office" xmlns:v="urn:schemas-microsoft-com:vml" xmlns:pvml="urn:schemas-microsoft-com:office:powerpoint" xmlns:com="http://schemas.openxmlformats.org/drawingml/2006/compatibility" xmlns:p14="http://schemas.microsoft.com/office/powerpoint/2010/main" xmlns:p15="http://schemas.microsoft.com/office/powerpoint/2012/main" xmlns:ahyp="http://schemas.microsoft.com/office/drawing/2018/hyperlinkcolor">
+<p:sld xmlns:a="http://schemas.openxmlformats.org/drawingml/2006/main" xmlns:r="http://schemas.openxmlformats.org/officeDocument/2006/relationships" xmlns:p="http://schemas.openxmlformats.org/presentationml/2006/main">
   <p:cSld>
     <p:spTree>
       <p:nvGrpSpPr>
-        <p:cNvPr id="111" name="Shape 111"/>
+        <p:cNvPr id="1" name="Shape 111"/>
         <p:cNvGrpSpPr/>
         <p:nvPr/>
       </p:nvGrpSpPr>
@@ -9731,23 +9895,23 @@
           <a:solidFill>
             <a:schemeClr val="lt1"/>
           </a:solidFill>
-          <a:ln cap="flat" cmpd="sng" w="9525">
+          <a:ln w="9525" cap="flat" cmpd="sng">
             <a:solidFill>
               <a:schemeClr val="lt1"/>
             </a:solidFill>
             <a:prstDash val="solid"/>
             <a:round/>
-            <a:headEnd len="sm" w="sm" type="none"/>
-            <a:tailEnd len="sm" w="sm" type="none"/>
+            <a:headEnd type="none" w="sm" len="sm"/>
+            <a:tailEnd type="none" w="sm" len="sm"/>
           </a:ln>
         </p:spPr>
         <p:txBody>
-          <a:bodyPr anchorCtr="0" anchor="ctr" bIns="91425" lIns="91425" spcFirstLastPara="1" rIns="91425" wrap="square" tIns="91425">
+          <a:bodyPr spcFirstLastPara="1" wrap="square" lIns="91425" tIns="91425" rIns="91425" bIns="91425" anchor="ctr" anchorCtr="0">
             <a:noAutofit/>
           </a:bodyPr>
           <a:lstStyle/>
           <a:p>
-            <a:pPr indent="0" lvl="0" marL="0" rtl="0" algn="l">
+            <a:pPr marL="0" lvl="0" indent="0" algn="l" rtl="0">
               <a:spcBef>
                 <a:spcPts val="0"/>
               </a:spcBef>
@@ -9756,9 +9920,6 @@
               </a:spcAft>
               <a:buNone/>
             </a:pPr>
-            <a:r>
-              <a:t/>
-            </a:r>
             <a:endParaRPr/>
           </a:p>
         </p:txBody>
@@ -9766,7 +9927,9 @@
       <p:sp>
         <p:nvSpPr>
           <p:cNvPr id="113" name="Google Shape;113;p15"/>
-          <p:cNvSpPr txBox="1"/>
+          <p:cNvSpPr txBox="1">
+            <a:spLocks noGrp="1"/>
+          </p:cNvSpPr>
           <p:nvPr>
             <p:ph type="title"/>
           </p:nvPr>
@@ -9781,12 +9944,12 @@
           </a:prstGeom>
         </p:spPr>
         <p:txBody>
-          <a:bodyPr anchorCtr="0" anchor="t" bIns="91425" lIns="91425" spcFirstLastPara="1" rIns="91425" wrap="square" tIns="91425">
+          <a:bodyPr spcFirstLastPara="1" wrap="square" lIns="91425" tIns="91425" rIns="91425" bIns="91425" anchor="t" anchorCtr="0">
             <a:normAutofit fontScale="90000"/>
           </a:bodyPr>
           <a:lstStyle/>
           <a:p>
-            <a:pPr indent="0" lvl="0" marL="0" rtl="0" algn="l">
+            <a:pPr marL="0" lvl="0" indent="0" algn="l" rtl="0">
               <a:spcBef>
                 <a:spcPts val="0"/>
               </a:spcBef>
@@ -9819,8 +9982,8 @@
         </p:blipFill>
         <p:spPr>
           <a:xfrm>
-            <a:off x="729825" y="2145300"/>
-            <a:ext cx="6692350" cy="2289850"/>
+            <a:off x="847897" y="2182150"/>
+            <a:ext cx="6574277" cy="2182032"/>
           </a:xfrm>
           <a:prstGeom prst="rect">
             <a:avLst/>
@@ -9839,8 +10002,8 @@
         </p:nvSpPr>
         <p:spPr>
           <a:xfrm>
-            <a:off x="770975" y="1087175"/>
-            <a:ext cx="6226500" cy="595500"/>
+            <a:off x="839584" y="1311619"/>
+            <a:ext cx="6469410" cy="595500"/>
           </a:xfrm>
           <a:prstGeom prst="rect">
             <a:avLst/>
@@ -9851,12 +10014,12 @@
           </a:ln>
         </p:spPr>
         <p:txBody>
-          <a:bodyPr anchorCtr="0" anchor="t" bIns="91425" lIns="91425" spcFirstLastPara="1" rIns="91425" wrap="square" tIns="91425">
+          <a:bodyPr spcFirstLastPara="1" wrap="square" lIns="91425" tIns="91425" rIns="91425" bIns="91425" anchor="t" anchorCtr="0">
             <a:noAutofit/>
           </a:bodyPr>
           <a:lstStyle/>
           <a:p>
-            <a:pPr indent="0" lvl="0" marL="0" rtl="0" algn="l">
+            <a:pPr marL="0" lvl="0" indent="0" algn="l" rtl="0">
               <a:spcBef>
                 <a:spcPts val="0"/>
               </a:spcBef>
@@ -9866,7 +10029,7 @@
               <a:buNone/>
             </a:pPr>
             <a:r>
-              <a:rPr lang="en-GB" sz="2000">
+              <a:rPr lang="en-GB" sz="1600" dirty="0">
                 <a:solidFill>
                   <a:schemeClr val="accent1"/>
                 </a:solidFill>
@@ -9877,7 +10040,7 @@
               </a:rPr>
               <a:t>Disable telemetry if you would not like Microsoft collecting your data!</a:t>
             </a:r>
-            <a:endParaRPr sz="2000">
+            <a:endParaRPr sz="1600" dirty="0">
               <a:solidFill>
                 <a:schemeClr val="accent1"/>
               </a:solidFill>
@@ -9898,11 +10061,11 @@
 </file>
 
 <file path=ppt/slides/slide4.xml><?xml version="1.0" encoding="utf-8"?>
-<p:sld xmlns:a="http://schemas.openxmlformats.org/drawingml/2006/main" xmlns:r="http://schemas.openxmlformats.org/officeDocument/2006/relationships" xmlns:mc="http://schemas.openxmlformats.org/markup-compatibility/2006" xmlns:mv="urn:schemas-microsoft-com:mac:vml" xmlns:p="http://schemas.openxmlformats.org/presentationml/2006/main" xmlns:c="http://schemas.openxmlformats.org/drawingml/2006/chart" xmlns:dgm="http://schemas.openxmlformats.org/drawingml/2006/diagram" xmlns:o="urn:schemas-microsoft-com:office:office" xmlns:v="urn:schemas-microsoft-com:vml" xmlns:pvml="urn:schemas-microsoft-com:office:powerpoint" xmlns:com="http://schemas.openxmlformats.org/drawingml/2006/compatibility" xmlns:p14="http://schemas.microsoft.com/office/powerpoint/2010/main" xmlns:p15="http://schemas.microsoft.com/office/powerpoint/2012/main" xmlns:ahyp="http://schemas.microsoft.com/office/drawing/2018/hyperlinkcolor">
+<p:sld xmlns:a="http://schemas.openxmlformats.org/drawingml/2006/main" xmlns:r="http://schemas.openxmlformats.org/officeDocument/2006/relationships" xmlns:p="http://schemas.openxmlformats.org/presentationml/2006/main">
   <p:cSld>
     <p:spTree>
       <p:nvGrpSpPr>
-        <p:cNvPr id="119" name="Shape 119"/>
+        <p:cNvPr id="1" name="Shape 119"/>
         <p:cNvGrpSpPr/>
         <p:nvPr/>
       </p:nvGrpSpPr>
@@ -9945,7 +10108,9 @@
       <p:sp>
         <p:nvSpPr>
           <p:cNvPr id="121" name="Google Shape;121;p16"/>
-          <p:cNvSpPr txBox="1"/>
+          <p:cNvSpPr txBox="1">
+            <a:spLocks noGrp="1"/>
+          </p:cNvSpPr>
           <p:nvPr>
             <p:ph type="title"/>
           </p:nvPr>
@@ -9960,12 +10125,12 @@
           </a:prstGeom>
         </p:spPr>
         <p:txBody>
-          <a:bodyPr anchorCtr="0" anchor="t" bIns="91425" lIns="91425" spcFirstLastPara="1" rIns="91425" wrap="square" tIns="91425">
+          <a:bodyPr spcFirstLastPara="1" wrap="square" lIns="91425" tIns="91425" rIns="91425" bIns="91425" anchor="t" anchorCtr="0">
             <a:normAutofit fontScale="90000"/>
           </a:bodyPr>
           <a:lstStyle/>
           <a:p>
-            <a:pPr indent="0" lvl="0" marL="0" rtl="0" algn="l">
+            <a:pPr marL="0" lvl="0" indent="0" algn="l" rtl="0">
               <a:spcBef>
                 <a:spcPts val="0"/>
               </a:spcBef>
@@ -9975,10 +10140,10 @@
               <a:buNone/>
             </a:pPr>
             <a:r>
-              <a:rPr lang="en-GB"/>
+              <a:rPr lang="en-GB" dirty="0"/>
               <a:t>Start up</a:t>
             </a:r>
-            <a:endParaRPr/>
+            <a:endParaRPr dirty="0"/>
           </a:p>
         </p:txBody>
       </p:sp>
@@ -9999,23 +10164,23 @@
           <a:solidFill>
             <a:schemeClr val="lt1"/>
           </a:solidFill>
-          <a:ln cap="flat" cmpd="sng" w="9525">
+          <a:ln w="9525" cap="flat" cmpd="sng">
             <a:solidFill>
               <a:schemeClr val="lt1"/>
             </a:solidFill>
             <a:prstDash val="solid"/>
             <a:round/>
-            <a:headEnd len="sm" w="sm" type="none"/>
-            <a:tailEnd len="sm" w="sm" type="none"/>
+            <a:headEnd type="none" w="sm" len="sm"/>
+            <a:tailEnd type="none" w="sm" len="sm"/>
           </a:ln>
         </p:spPr>
         <p:txBody>
-          <a:bodyPr anchorCtr="0" anchor="ctr" bIns="91425" lIns="91425" spcFirstLastPara="1" rIns="91425" wrap="square" tIns="91425">
+          <a:bodyPr spcFirstLastPara="1" wrap="square" lIns="91425" tIns="91425" rIns="91425" bIns="91425" anchor="ctr" anchorCtr="0">
             <a:noAutofit/>
           </a:bodyPr>
           <a:lstStyle/>
           <a:p>
-            <a:pPr indent="0" lvl="0" marL="0" rtl="0" algn="ctr">
+            <a:pPr marL="0" lvl="0" indent="0" algn="ctr" rtl="0">
               <a:spcBef>
                 <a:spcPts val="0"/>
               </a:spcBef>
@@ -10024,9 +10189,6 @@
               </a:spcAft>
               <a:buNone/>
             </a:pPr>
-            <a:r>
-              <a:t/>
-            </a:r>
             <a:endParaRPr>
               <a:latin typeface="Lato"/>
               <a:ea typeface="Lato"/>
@@ -10044,8 +10206,8 @@
         </p:nvSpPr>
         <p:spPr>
           <a:xfrm>
-            <a:off x="5226225" y="2345050"/>
-            <a:ext cx="2263200" cy="831300"/>
+            <a:off x="5409105" y="2263988"/>
+            <a:ext cx="2812182" cy="615523"/>
           </a:xfrm>
           <a:prstGeom prst="rect">
             <a:avLst/>
@@ -10056,12 +10218,12 @@
           </a:ln>
         </p:spPr>
         <p:txBody>
-          <a:bodyPr anchorCtr="0" anchor="t" bIns="91425" lIns="91425" spcFirstLastPara="1" rIns="91425" wrap="square" tIns="91425">
+          <a:bodyPr spcFirstLastPara="1" wrap="square" lIns="91425" tIns="91425" rIns="91425" bIns="91425" anchor="t" anchorCtr="0">
             <a:spAutoFit/>
           </a:bodyPr>
           <a:lstStyle/>
           <a:p>
-            <a:pPr indent="0" lvl="0" marL="0" rtl="0" algn="l">
+            <a:pPr marL="0" lvl="0" indent="0" algn="l" rtl="0">
               <a:spcBef>
                 <a:spcPts val="0"/>
               </a:spcBef>
@@ -10071,7 +10233,7 @@
               <a:buNone/>
             </a:pPr>
             <a:r>
-              <a:rPr lang="en-GB">
+              <a:rPr lang="en-GB" dirty="0">
                 <a:latin typeface="Lato"/>
                 <a:ea typeface="Lato"/>
                 <a:cs typeface="Lato"/>
@@ -10079,7 +10241,7 @@
               </a:rPr>
               <a:t>When you open a python script it will help you find an interpreter</a:t>
             </a:r>
-            <a:endParaRPr>
+            <a:endParaRPr dirty="0">
               <a:latin typeface="Lato"/>
               <a:ea typeface="Lato"/>
               <a:cs typeface="Lato"/>
@@ -10097,11 +10259,11 @@
 </file>
 
 <file path=ppt/slides/slide5.xml><?xml version="1.0" encoding="utf-8"?>
-<p:sld xmlns:a="http://schemas.openxmlformats.org/drawingml/2006/main" xmlns:r="http://schemas.openxmlformats.org/officeDocument/2006/relationships" xmlns:mc="http://schemas.openxmlformats.org/markup-compatibility/2006" xmlns:mv="urn:schemas-microsoft-com:mac:vml" xmlns:p="http://schemas.openxmlformats.org/presentationml/2006/main" xmlns:c="http://schemas.openxmlformats.org/drawingml/2006/chart" xmlns:dgm="http://schemas.openxmlformats.org/drawingml/2006/diagram" xmlns:o="urn:schemas-microsoft-com:office:office" xmlns:v="urn:schemas-microsoft-com:vml" xmlns:pvml="urn:schemas-microsoft-com:office:powerpoint" xmlns:com="http://schemas.openxmlformats.org/drawingml/2006/compatibility" xmlns:p14="http://schemas.microsoft.com/office/powerpoint/2010/main" xmlns:p15="http://schemas.microsoft.com/office/powerpoint/2012/main" xmlns:ahyp="http://schemas.microsoft.com/office/drawing/2018/hyperlinkcolor">
+<p:sld xmlns:a="http://schemas.openxmlformats.org/drawingml/2006/main" xmlns:r="http://schemas.openxmlformats.org/officeDocument/2006/relationships" xmlns:p="http://schemas.openxmlformats.org/presentationml/2006/main">
   <p:cSld>
     <p:spTree>
       <p:nvGrpSpPr>
-        <p:cNvPr id="127" name="Shape 127"/>
+        <p:cNvPr id="1" name="Shape 127"/>
         <p:cNvGrpSpPr/>
         <p:nvPr/>
       </p:nvGrpSpPr>
@@ -10116,7 +10278,9 @@
       <p:sp>
         <p:nvSpPr>
           <p:cNvPr id="128" name="Google Shape;128;p17"/>
-          <p:cNvSpPr txBox="1"/>
+          <p:cNvSpPr txBox="1">
+            <a:spLocks noGrp="1"/>
+          </p:cNvSpPr>
           <p:nvPr>
             <p:ph type="title"/>
           </p:nvPr>
@@ -10131,12 +10295,12 @@
           </a:prstGeom>
         </p:spPr>
         <p:txBody>
-          <a:bodyPr anchorCtr="0" anchor="t" bIns="91425" lIns="91425" spcFirstLastPara="1" rIns="91425" wrap="square" tIns="91425">
+          <a:bodyPr spcFirstLastPara="1" wrap="square" lIns="91425" tIns="91425" rIns="91425" bIns="91425" anchor="t" anchorCtr="0">
             <a:normAutofit fontScale="90000"/>
           </a:bodyPr>
           <a:lstStyle/>
           <a:p>
-            <a:pPr indent="0" lvl="0" marL="0" rtl="0" algn="l">
+            <a:pPr marL="0" lvl="0" indent="0" algn="l" rtl="0">
               <a:spcBef>
                 <a:spcPts val="0"/>
               </a:spcBef>
@@ -10163,13 +10327,13 @@
           <a:blip r:embed="rId3">
             <a:alphaModFix/>
           </a:blip>
-          <a:srcRect b="55474" l="0" r="0" t="0"/>
+          <a:srcRect b="55474"/>
           <a:stretch/>
         </p:blipFill>
         <p:spPr>
           <a:xfrm>
-            <a:off x="426650" y="1363325"/>
-            <a:ext cx="8290699" cy="2290200"/>
+            <a:off x="565723" y="1404193"/>
+            <a:ext cx="7478754" cy="2090732"/>
           </a:xfrm>
           <a:prstGeom prst="rect">
             <a:avLst/>
@@ -10188,30 +10352,30 @@
         </p:nvSpPr>
         <p:spPr>
           <a:xfrm>
-            <a:off x="2552575" y="2141325"/>
+            <a:off x="2444510" y="2041572"/>
             <a:ext cx="1196100" cy="324900"/>
           </a:xfrm>
           <a:prstGeom prst="ellipse">
             <a:avLst/>
           </a:prstGeom>
           <a:noFill/>
-          <a:ln cap="flat" cmpd="sng" w="38100">
+          <a:ln w="38100" cap="flat" cmpd="sng">
             <a:solidFill>
               <a:srgbClr val="CC0000"/>
             </a:solidFill>
             <a:prstDash val="solid"/>
             <a:round/>
-            <a:headEnd len="sm" w="sm" type="none"/>
-            <a:tailEnd len="sm" w="sm" type="none"/>
+            <a:headEnd type="none" w="sm" len="sm"/>
+            <a:tailEnd type="none" w="sm" len="sm"/>
           </a:ln>
         </p:spPr>
         <p:txBody>
-          <a:bodyPr anchorCtr="0" anchor="ctr" bIns="91425" lIns="91425" spcFirstLastPara="1" rIns="91425" wrap="square" tIns="91425">
+          <a:bodyPr spcFirstLastPara="1" wrap="square" lIns="91425" tIns="91425" rIns="91425" bIns="91425" anchor="ctr" anchorCtr="0">
             <a:noAutofit/>
           </a:bodyPr>
           <a:lstStyle/>
           <a:p>
-            <a:pPr indent="0" lvl="0" marL="0" rtl="0" algn="l">
+            <a:pPr marL="0" lvl="0" indent="0" algn="l" rtl="0">
               <a:spcBef>
                 <a:spcPts val="0"/>
               </a:spcBef>
@@ -10220,9 +10384,6 @@
               </a:spcAft>
               <a:buNone/>
             </a:pPr>
-            <a:r>
-              <a:t/>
-            </a:r>
             <a:endParaRPr/>
           </a:p>
         </p:txBody>
@@ -10235,7 +10396,7 @@
         </p:nvSpPr>
         <p:spPr>
           <a:xfrm>
-            <a:off x="489450" y="3902575"/>
+            <a:off x="565723" y="3639554"/>
             <a:ext cx="7688700" cy="985500"/>
           </a:xfrm>
           <a:prstGeom prst="rect">
@@ -10247,14 +10408,14 @@
           </a:ln>
         </p:spPr>
         <p:txBody>
-          <a:bodyPr anchorCtr="0" anchor="t" bIns="91425" lIns="91425" spcFirstLastPara="1" rIns="91425" wrap="square" tIns="91425">
+          <a:bodyPr spcFirstLastPara="1" wrap="square" lIns="91425" tIns="91425" rIns="91425" bIns="91425" anchor="t" anchorCtr="0">
             <a:noAutofit/>
           </a:bodyPr>
           <a:lstStyle/>
           <a:p>
-            <a:pPr indent="0" lvl="0" marL="0" rtl="0" algn="l">
-              <a:spcBef>
-                <a:spcPts val="0"/>
+            <a:pPr marL="0" lvl="0" indent="0" algn="l" rtl="0">
+              <a:spcBef>
+                <a:spcPts val="600"/>
               </a:spcBef>
               <a:spcAft>
                 <a:spcPts val="0"/>
@@ -10262,7 +10423,7 @@
               <a:buNone/>
             </a:pPr>
             <a:r>
-              <a:rPr lang="en-GB" sz="1500">
+              <a:rPr lang="en-GB" sz="1200" dirty="0">
                 <a:solidFill>
                   <a:schemeClr val="accent1"/>
                 </a:solidFill>
@@ -10271,34 +10432,10 @@
                 <a:cs typeface="Lato"/>
                 <a:sym typeface="Lato"/>
               </a:rPr>
-              <a:t>Windows: Microsoft Store or </a:t>
+              <a:t>Windows: Microsoft Store or global install </a:t>
             </a:r>
             <a:r>
-              <a:rPr lang="en-GB" sz="1500">
-                <a:solidFill>
-                  <a:schemeClr val="accent1"/>
-                </a:solidFill>
-                <a:latin typeface="Lato"/>
-                <a:ea typeface="Lato"/>
-                <a:cs typeface="Lato"/>
-                <a:sym typeface="Lato"/>
-              </a:rPr>
-              <a:t>global</a:t>
-            </a:r>
-            <a:r>
-              <a:rPr lang="en-GB" sz="1500">
-                <a:solidFill>
-                  <a:schemeClr val="accent1"/>
-                </a:solidFill>
-                <a:latin typeface="Lato"/>
-                <a:ea typeface="Lato"/>
-                <a:cs typeface="Lato"/>
-                <a:sym typeface="Lato"/>
-              </a:rPr>
-              <a:t> install </a:t>
-            </a:r>
-            <a:r>
-              <a:rPr lang="en-GB" sz="1000" u="sng">
+              <a:rPr lang="en-GB" sz="1200" u="sng" dirty="0">
                 <a:solidFill>
                   <a:schemeClr val="hlink"/>
                 </a:solidFill>
@@ -10311,7 +10448,7 @@
               <a:t>https://www.python.org/downloads/windows/</a:t>
             </a:r>
             <a:r>
-              <a:rPr lang="en-GB" sz="1000">
+              <a:rPr lang="en-GB" sz="1200" dirty="0">
                 <a:solidFill>
                   <a:schemeClr val="accent1"/>
                 </a:solidFill>
@@ -10322,7 +10459,7 @@
               </a:rPr>
               <a:t> </a:t>
             </a:r>
-            <a:endParaRPr sz="1000">
+            <a:endParaRPr sz="1200" dirty="0">
               <a:solidFill>
                 <a:schemeClr val="accent1"/>
               </a:solidFill>
@@ -10333,9 +10470,9 @@
             </a:endParaRPr>
           </a:p>
           <a:p>
-            <a:pPr indent="0" lvl="0" marL="0" rtl="0" algn="l">
-              <a:spcBef>
-                <a:spcPts val="0"/>
+            <a:pPr marL="0" lvl="0" indent="0" algn="l" rtl="0">
+              <a:spcBef>
+                <a:spcPts val="600"/>
               </a:spcBef>
               <a:spcAft>
                 <a:spcPts val="0"/>
@@ -10343,7 +10480,7 @@
               <a:buNone/>
             </a:pPr>
             <a:r>
-              <a:rPr lang="en-GB" sz="1500">
+              <a:rPr lang="en-GB" sz="1200" dirty="0">
                 <a:solidFill>
                   <a:schemeClr val="accent1"/>
                 </a:solidFill>
@@ -10354,7 +10491,7 @@
               </a:rPr>
               <a:t>Mac: App Store or command line</a:t>
             </a:r>
-            <a:endParaRPr sz="1500">
+            <a:endParaRPr sz="1200" dirty="0">
               <a:solidFill>
                 <a:schemeClr val="accent1"/>
               </a:solidFill>
@@ -10365,9 +10502,9 @@
             </a:endParaRPr>
           </a:p>
           <a:p>
-            <a:pPr indent="0" lvl="0" marL="0" rtl="0" algn="l">
-              <a:spcBef>
-                <a:spcPts val="0"/>
+            <a:pPr marL="0" lvl="0" indent="0" algn="l" rtl="0">
+              <a:spcBef>
+                <a:spcPts val="600"/>
               </a:spcBef>
               <a:spcAft>
                 <a:spcPts val="0"/>
@@ -10375,7 +10512,7 @@
               <a:buNone/>
             </a:pPr>
             <a:r>
-              <a:rPr lang="en-GB" sz="1500">
+              <a:rPr lang="en-GB" sz="1200" dirty="0">
                 <a:solidFill>
                   <a:schemeClr val="accent1"/>
                 </a:solidFill>
@@ -10386,7 +10523,7 @@
               </a:rPr>
               <a:t>Linux systems: Command line</a:t>
             </a:r>
-            <a:endParaRPr sz="1500">
+            <a:endParaRPr sz="1200" dirty="0">
               <a:solidFill>
                 <a:schemeClr val="accent1"/>
               </a:solidFill>
@@ -10407,11 +10544,11 @@
 </file>
 
 <file path=ppt/slides/slide6.xml><?xml version="1.0" encoding="utf-8"?>
-<p:sld xmlns:a="http://schemas.openxmlformats.org/drawingml/2006/main" xmlns:r="http://schemas.openxmlformats.org/officeDocument/2006/relationships" xmlns:mc="http://schemas.openxmlformats.org/markup-compatibility/2006" xmlns:mv="urn:schemas-microsoft-com:mac:vml" xmlns:p="http://schemas.openxmlformats.org/presentationml/2006/main" xmlns:c="http://schemas.openxmlformats.org/drawingml/2006/chart" xmlns:dgm="http://schemas.openxmlformats.org/drawingml/2006/diagram" xmlns:o="urn:schemas-microsoft-com:office:office" xmlns:v="urn:schemas-microsoft-com:vml" xmlns:pvml="urn:schemas-microsoft-com:office:powerpoint" xmlns:com="http://schemas.openxmlformats.org/drawingml/2006/compatibility" xmlns:p14="http://schemas.microsoft.com/office/powerpoint/2010/main" xmlns:p15="http://schemas.microsoft.com/office/powerpoint/2012/main" xmlns:ahyp="http://schemas.microsoft.com/office/drawing/2018/hyperlinkcolor">
+<p:sld xmlns:a="http://schemas.openxmlformats.org/drawingml/2006/main" xmlns:r="http://schemas.openxmlformats.org/officeDocument/2006/relationships" xmlns:p="http://schemas.openxmlformats.org/presentationml/2006/main">
   <p:cSld>
     <p:spTree>
       <p:nvGrpSpPr>
-        <p:cNvPr id="135" name="Shape 135"/>
+        <p:cNvPr id="1" name="Shape 135"/>
         <p:cNvGrpSpPr/>
         <p:nvPr/>
       </p:nvGrpSpPr>
@@ -10426,7 +10563,9 @@
       <p:sp>
         <p:nvSpPr>
           <p:cNvPr id="136" name="Google Shape;136;p18"/>
-          <p:cNvSpPr txBox="1"/>
+          <p:cNvSpPr txBox="1">
+            <a:spLocks noGrp="1"/>
+          </p:cNvSpPr>
           <p:nvPr>
             <p:ph type="title"/>
           </p:nvPr>
@@ -10441,12 +10580,12 @@
           </a:prstGeom>
         </p:spPr>
         <p:txBody>
-          <a:bodyPr anchorCtr="0" anchor="t" bIns="91425" lIns="91425" spcFirstLastPara="1" rIns="91425" wrap="square" tIns="91425">
+          <a:bodyPr spcFirstLastPara="1" wrap="square" lIns="91425" tIns="91425" rIns="91425" bIns="91425" anchor="t" anchorCtr="0">
             <a:normAutofit fontScale="90000"/>
           </a:bodyPr>
           <a:lstStyle/>
           <a:p>
-            <a:pPr indent="0" lvl="0" marL="0" rtl="0" algn="l">
+            <a:pPr marL="0" lvl="0" indent="0" algn="l" rtl="0">
               <a:spcBef>
                 <a:spcPts val="0"/>
               </a:spcBef>
@@ -10473,13 +10612,15 @@
           <a:blip r:embed="rId3">
             <a:alphaModFix/>
           </a:blip>
-          <a:srcRect b="0" l="0" r="54271" t="0"/>
-          <a:stretch/>
+          <a:srcRect r="19923"/>
+          <a:stretch>
+            <a:fillRect/>
+          </a:stretch>
         </p:blipFill>
         <p:spPr>
           <a:xfrm>
-            <a:off x="758800" y="1064950"/>
-            <a:ext cx="2654327" cy="3601100"/>
+            <a:off x="1031625" y="1247850"/>
+            <a:ext cx="4375262" cy="3418200"/>
           </a:xfrm>
           <a:prstGeom prst="rect">
             <a:avLst/>
@@ -10498,30 +10639,30 @@
         </p:nvSpPr>
         <p:spPr>
           <a:xfrm>
-            <a:off x="706725" y="2069400"/>
+            <a:off x="963098" y="2233350"/>
             <a:ext cx="324900" cy="327900"/>
           </a:xfrm>
           <a:prstGeom prst="ellipse">
             <a:avLst/>
           </a:prstGeom>
           <a:noFill/>
-          <a:ln cap="flat" cmpd="sng" w="38100">
+          <a:ln w="38100" cap="flat" cmpd="sng">
             <a:solidFill>
               <a:srgbClr val="CC0000"/>
             </a:solidFill>
             <a:prstDash val="solid"/>
             <a:round/>
-            <a:headEnd len="sm" w="sm" type="none"/>
-            <a:tailEnd len="sm" w="sm" type="none"/>
+            <a:headEnd type="none" w="sm" len="sm"/>
+            <a:tailEnd type="none" w="sm" len="sm"/>
           </a:ln>
         </p:spPr>
         <p:txBody>
-          <a:bodyPr anchorCtr="0" anchor="ctr" bIns="91425" lIns="91425" spcFirstLastPara="1" rIns="91425" wrap="square" tIns="91425">
+          <a:bodyPr spcFirstLastPara="1" wrap="square" lIns="91425" tIns="91425" rIns="91425" bIns="91425" anchor="ctr" anchorCtr="0">
             <a:noAutofit/>
           </a:bodyPr>
           <a:lstStyle/>
           <a:p>
-            <a:pPr indent="0" lvl="0" marL="0" rtl="0" algn="l">
+            <a:pPr marL="0" lvl="0" indent="0" algn="l" rtl="0">
               <a:spcBef>
                 <a:spcPts val="0"/>
               </a:spcBef>
@@ -10530,9 +10671,6 @@
               </a:spcAft>
               <a:buNone/>
             </a:pPr>
-            <a:r>
-              <a:t/>
-            </a:r>
             <a:endParaRPr/>
           </a:p>
         </p:txBody>
@@ -10545,8 +10683,8 @@
         </p:nvSpPr>
         <p:spPr>
           <a:xfrm>
-            <a:off x="3792125" y="1064950"/>
-            <a:ext cx="3497700" cy="985500"/>
+            <a:off x="5705934" y="1406116"/>
+            <a:ext cx="2632996" cy="1982367"/>
           </a:xfrm>
           <a:prstGeom prst="rect">
             <a:avLst/>
@@ -10557,12 +10695,12 @@
           </a:ln>
         </p:spPr>
         <p:txBody>
-          <a:bodyPr anchorCtr="0" anchor="t" bIns="91425" lIns="91425" spcFirstLastPara="1" rIns="91425" wrap="square" tIns="91425">
+          <a:bodyPr spcFirstLastPara="1" wrap="square" lIns="91425" tIns="91425" rIns="91425" bIns="91425" anchor="t" anchorCtr="0">
             <a:noAutofit/>
           </a:bodyPr>
           <a:lstStyle/>
           <a:p>
-            <a:pPr indent="0" lvl="0" marL="0" rtl="0" algn="l">
+            <a:pPr marL="0" lvl="0" indent="0" algn="l" rtl="0">
               <a:lnSpc>
                 <a:spcPct val="115000"/>
               </a:lnSpc>
@@ -10575,7 +10713,7 @@
               <a:buNone/>
             </a:pPr>
             <a:r>
-              <a:rPr lang="en-GB" sz="1500">
+              <a:rPr lang="en-GB" sz="1500" dirty="0">
                 <a:solidFill>
                   <a:schemeClr val="accent1"/>
                 </a:solidFill>
@@ -10586,7 +10724,7 @@
               </a:rPr>
               <a:t>OR check ‘extensions’</a:t>
             </a:r>
-            <a:endParaRPr sz="1500">
+            <a:endParaRPr sz="1500" dirty="0">
               <a:solidFill>
                 <a:schemeClr val="accent1"/>
               </a:solidFill>
@@ -10597,7 +10735,7 @@
             </a:endParaRPr>
           </a:p>
           <a:p>
-            <a:pPr indent="0" lvl="0" marL="0" rtl="0" algn="l">
+            <a:pPr marL="0" lvl="0" indent="0" algn="l" rtl="0">
               <a:lnSpc>
                 <a:spcPct val="115000"/>
               </a:lnSpc>
@@ -10609,10 +10747,7 @@
               </a:spcAft>
               <a:buNone/>
             </a:pPr>
-            <a:r>
-              <a:t/>
-            </a:r>
-            <a:endParaRPr sz="1500">
+            <a:endParaRPr sz="1500" dirty="0">
               <a:solidFill>
                 <a:schemeClr val="accent1"/>
               </a:solidFill>
@@ -10623,7 +10758,7 @@
             </a:endParaRPr>
           </a:p>
           <a:p>
-            <a:pPr indent="0" lvl="0" marL="0" rtl="0" algn="l">
+            <a:pPr marL="0" lvl="0" indent="0" algn="l" rtl="0">
               <a:lnSpc>
                 <a:spcPct val="115000"/>
               </a:lnSpc>
@@ -10636,7 +10771,7 @@
               <a:buNone/>
             </a:pPr>
             <a:r>
-              <a:rPr lang="en-GB" sz="1500">
+              <a:rPr lang="en-GB" sz="1500" dirty="0">
                 <a:solidFill>
                   <a:schemeClr val="accent1"/>
                 </a:solidFill>
@@ -10645,9 +10780,81 @@
                 <a:cs typeface="Lato"/>
                 <a:sym typeface="Lato"/>
               </a:rPr>
-              <a:t>As you can see, I also got Jupyter ect because I opened an ipython notebook.</a:t>
+              <a:t>As you can see, I also got </a:t>
             </a:r>
-            <a:endParaRPr sz="1500">
+            <a:r>
+              <a:rPr lang="en-GB" sz="1500" dirty="0" err="1">
+                <a:solidFill>
+                  <a:schemeClr val="accent1"/>
+                </a:solidFill>
+                <a:latin typeface="Lato"/>
+                <a:ea typeface="Lato"/>
+                <a:cs typeface="Lato"/>
+                <a:sym typeface="Lato"/>
+              </a:rPr>
+              <a:t>Jupyter</a:t>
+            </a:r>
+            <a:r>
+              <a:rPr lang="en-GB" sz="1500" dirty="0">
+                <a:solidFill>
+                  <a:schemeClr val="accent1"/>
+                </a:solidFill>
+                <a:latin typeface="Lato"/>
+                <a:ea typeface="Lato"/>
+                <a:cs typeface="Lato"/>
+                <a:sym typeface="Lato"/>
+              </a:rPr>
+              <a:t> </a:t>
+            </a:r>
+            <a:r>
+              <a:rPr lang="en-GB" sz="1500" dirty="0" err="1">
+                <a:solidFill>
+                  <a:schemeClr val="accent1"/>
+                </a:solidFill>
+                <a:latin typeface="Lato"/>
+                <a:ea typeface="Lato"/>
+                <a:cs typeface="Lato"/>
+                <a:sym typeface="Lato"/>
+              </a:rPr>
+              <a:t>ect</a:t>
+            </a:r>
+            <a:r>
+              <a:rPr lang="en-GB" sz="1500" dirty="0">
+                <a:solidFill>
+                  <a:schemeClr val="accent1"/>
+                </a:solidFill>
+                <a:latin typeface="Lato"/>
+                <a:ea typeface="Lato"/>
+                <a:cs typeface="Lato"/>
+                <a:sym typeface="Lato"/>
+              </a:rPr>
+              <a:t> because I opened an </a:t>
+            </a:r>
+            <a:r>
+              <a:rPr lang="en-GB" sz="1500" dirty="0" err="1">
+                <a:solidFill>
+                  <a:schemeClr val="accent1"/>
+                </a:solidFill>
+                <a:latin typeface="Lato"/>
+                <a:ea typeface="Lato"/>
+                <a:cs typeface="Lato"/>
+                <a:sym typeface="Lato"/>
+              </a:rPr>
+              <a:t>ipython</a:t>
+            </a:r>
+            <a:r>
+              <a:rPr lang="en-GB" sz="1500" dirty="0">
+                <a:solidFill>
+                  <a:schemeClr val="accent1"/>
+                </a:solidFill>
+                <a:latin typeface="Lato"/>
+                <a:ea typeface="Lato"/>
+                <a:cs typeface="Lato"/>
+                <a:sym typeface="Lato"/>
+              </a:rPr>
+              <a:t> notebook.</a:t>
+            </a:r>
+            <a:endParaRPr sz="1500" dirty="0">
               <a:solidFill>
                 <a:schemeClr val="accent1"/>
               </a:solidFill>
@@ -10668,11 +10875,11 @@
 </file>
 
 <file path=ppt/slides/slide7.xml><?xml version="1.0" encoding="utf-8"?>
-<p:sld xmlns:a="http://schemas.openxmlformats.org/drawingml/2006/main" xmlns:r="http://schemas.openxmlformats.org/officeDocument/2006/relationships" xmlns:mc="http://schemas.openxmlformats.org/markup-compatibility/2006" xmlns:mv="urn:schemas-microsoft-com:mac:vml" xmlns:p="http://schemas.openxmlformats.org/presentationml/2006/main" xmlns:c="http://schemas.openxmlformats.org/drawingml/2006/chart" xmlns:dgm="http://schemas.openxmlformats.org/drawingml/2006/diagram" xmlns:o="urn:schemas-microsoft-com:office:office" xmlns:v="urn:schemas-microsoft-com:vml" xmlns:pvml="urn:schemas-microsoft-com:office:powerpoint" xmlns:com="http://schemas.openxmlformats.org/drawingml/2006/compatibility" xmlns:p14="http://schemas.microsoft.com/office/powerpoint/2010/main" xmlns:p15="http://schemas.microsoft.com/office/powerpoint/2012/main" xmlns:ahyp="http://schemas.microsoft.com/office/drawing/2018/hyperlinkcolor">
+<p:sld xmlns:a="http://schemas.openxmlformats.org/drawingml/2006/main" xmlns:r="http://schemas.openxmlformats.org/officeDocument/2006/relationships" xmlns:p="http://schemas.openxmlformats.org/presentationml/2006/main">
   <p:cSld>
     <p:spTree>
       <p:nvGrpSpPr>
-        <p:cNvPr id="143" name="Shape 143"/>
+        <p:cNvPr id="1" name="Shape 143"/>
         <p:cNvGrpSpPr/>
         <p:nvPr/>
       </p:nvGrpSpPr>
@@ -10687,7 +10894,9 @@
       <p:sp>
         <p:nvSpPr>
           <p:cNvPr id="144" name="Google Shape;144;p19"/>
-          <p:cNvSpPr txBox="1"/>
+          <p:cNvSpPr txBox="1">
+            <a:spLocks noGrp="1"/>
+          </p:cNvSpPr>
           <p:nvPr>
             <p:ph type="title"/>
           </p:nvPr>
@@ -10702,12 +10911,12 @@
           </a:prstGeom>
         </p:spPr>
         <p:txBody>
-          <a:bodyPr anchorCtr="0" anchor="t" bIns="91425" lIns="91425" spcFirstLastPara="1" rIns="91425" wrap="square" tIns="91425">
+          <a:bodyPr spcFirstLastPara="1" wrap="square" lIns="91425" tIns="91425" rIns="91425" bIns="91425" anchor="t" anchorCtr="0">
             <a:normAutofit fontScale="90000"/>
           </a:bodyPr>
           <a:lstStyle/>
           <a:p>
-            <a:pPr indent="0" lvl="0" marL="0" rtl="0" algn="l">
+            <a:pPr marL="0" lvl="0" indent="0" algn="l" rtl="0">
               <a:spcBef>
                 <a:spcPts val="0"/>
               </a:spcBef>
@@ -10732,8 +10941,8 @@
         </p:nvSpPr>
         <p:spPr>
           <a:xfrm>
-            <a:off x="6550950" y="1477725"/>
-            <a:ext cx="2617200" cy="2709000"/>
+            <a:off x="6224953" y="1824594"/>
+            <a:ext cx="2617200" cy="2262127"/>
           </a:xfrm>
           <a:prstGeom prst="rect">
             <a:avLst/>
@@ -10744,22 +10953,21 @@
           </a:ln>
         </p:spPr>
         <p:txBody>
-          <a:bodyPr anchorCtr="0" anchor="t" bIns="91425" lIns="91425" spcFirstLastPara="1" rIns="91425" wrap="square" tIns="91425">
+          <a:bodyPr spcFirstLastPara="1" wrap="square" lIns="91425" tIns="91425" rIns="91425" bIns="91425" anchor="t" anchorCtr="0">
             <a:spAutoFit/>
           </a:bodyPr>
           <a:lstStyle/>
           <a:p>
-            <a:pPr indent="0" lvl="0" marL="0" rtl="0" algn="l">
-              <a:spcBef>
-                <a:spcPts val="0"/>
-              </a:spcBef>
-              <a:spcAft>
-                <a:spcPts val="0"/>
-              </a:spcAft>
-              <a:buNone/>
+            <a:pPr lvl="0" algn="l" rtl="0">
+              <a:spcBef>
+                <a:spcPts val="0"/>
+              </a:spcBef>
+              <a:spcAft>
+                <a:spcPts val="0"/>
+              </a:spcAft>
             </a:pPr>
             <a:r>
-              <a:rPr lang="en-GB" sz="1800">
+              <a:rPr lang="en-GB" sz="1500" dirty="0">
                 <a:solidFill>
                   <a:schemeClr val="accent1"/>
                 </a:solidFill>
@@ -10768,9 +10976,21 @@
                 <a:cs typeface="Lato"/>
                 <a:sym typeface="Lato"/>
               </a:rPr>
-              <a:t>Operate as in colab</a:t>
+              <a:t>Operate as in </a:t>
             </a:r>
-            <a:endParaRPr sz="1800">
+            <a:r>
+              <a:rPr lang="en-GB" sz="1500" dirty="0" err="1">
+                <a:solidFill>
+                  <a:schemeClr val="accent1"/>
+                </a:solidFill>
+                <a:latin typeface="Lato"/>
+                <a:ea typeface="Lato"/>
+                <a:cs typeface="Lato"/>
+                <a:sym typeface="Lato"/>
+              </a:rPr>
+              <a:t>colab</a:t>
+            </a:r>
+            <a:endParaRPr sz="1500" dirty="0">
               <a:solidFill>
                 <a:schemeClr val="accent1"/>
               </a:solidFill>
@@ -10781,19 +11001,15 @@
             </a:endParaRPr>
           </a:p>
           <a:p>
-            <a:pPr indent="0" lvl="0" marL="0" rtl="0" algn="l">
-              <a:spcBef>
-                <a:spcPts val="0"/>
-              </a:spcBef>
-              <a:spcAft>
-                <a:spcPts val="0"/>
-              </a:spcAft>
-              <a:buNone/>
+            <a:pPr lvl="0" algn="l" rtl="0">
+              <a:spcBef>
+                <a:spcPts val="0"/>
+              </a:spcBef>
+              <a:spcAft>
+                <a:spcPts val="0"/>
+              </a:spcAft>
             </a:pPr>
-            <a:r>
-              <a:t/>
-            </a:r>
-            <a:endParaRPr sz="1800">
+            <a:endParaRPr sz="1500" dirty="0">
               <a:solidFill>
                 <a:schemeClr val="accent1"/>
               </a:solidFill>
@@ -10804,7 +11020,7 @@
             </a:endParaRPr>
           </a:p>
           <a:p>
-            <a:pPr indent="-330200" lvl="0" marL="457200" rtl="0" algn="l">
+            <a:pPr marL="412750" lvl="0" indent="-285750" algn="l" rtl="0">
               <a:spcBef>
                 <a:spcPts val="0"/>
               </a:spcBef>
@@ -10815,11 +11031,11 @@
                 <a:schemeClr val="accent1"/>
               </a:buClr>
               <a:buSzPts val="1600"/>
-              <a:buFont typeface="Lato"/>
-              <a:buChar char="●"/>
+              <a:buFont typeface="Arial" panose="020B0604020202020204" pitchFamily="34" charset="0"/>
+              <a:buChar char="•"/>
             </a:pPr>
             <a:r>
-              <a:rPr lang="en-GB" sz="1600">
+              <a:rPr lang="en-GB" sz="1500" dirty="0">
                 <a:solidFill>
                   <a:schemeClr val="accent1"/>
                 </a:solidFill>
@@ -10831,7 +11047,7 @@
               <a:t>Code cells and text cells</a:t>
             </a:r>
             <a:br>
-              <a:rPr lang="en-GB" sz="1600">
+              <a:rPr lang="en-GB" sz="1500" dirty="0">
                 <a:solidFill>
                   <a:schemeClr val="accent1"/>
                 </a:solidFill>
@@ -10841,7 +11057,7 @@
                 <a:sym typeface="Lato"/>
               </a:rPr>
             </a:br>
-            <a:endParaRPr sz="1600">
+            <a:endParaRPr sz="1500" dirty="0">
               <a:solidFill>
                 <a:schemeClr val="accent1"/>
               </a:solidFill>
@@ -10852,7 +11068,7 @@
             </a:endParaRPr>
           </a:p>
           <a:p>
-            <a:pPr indent="-330200" lvl="0" marL="457200" rtl="0" algn="l">
+            <a:pPr marL="412750" lvl="0" indent="-285750" algn="l" rtl="0">
               <a:spcBef>
                 <a:spcPts val="0"/>
               </a:spcBef>
@@ -10863,11 +11079,11 @@
                 <a:schemeClr val="accent1"/>
               </a:buClr>
               <a:buSzPts val="1600"/>
-              <a:buFont typeface="Lato"/>
-              <a:buChar char="●"/>
+              <a:buFont typeface="Arial" panose="020B0604020202020204" pitchFamily="34" charset="0"/>
+              <a:buChar char="•"/>
             </a:pPr>
             <a:r>
-              <a:rPr lang="en-GB" sz="1600">
+              <a:rPr lang="en-GB" sz="1500" dirty="0">
                 <a:solidFill>
                   <a:schemeClr val="accent1"/>
                 </a:solidFill>
@@ -10876,10 +11092,22 @@
                 <a:cs typeface="Lato"/>
                 <a:sym typeface="Lato"/>
               </a:rPr>
-              <a:t>Run cells with run button or shift+enter</a:t>
+              <a:t>Run cells with run button or </a:t>
+            </a:r>
+            <a:r>
+              <a:rPr lang="en-GB" sz="1500" dirty="0" err="1">
+                <a:solidFill>
+                  <a:schemeClr val="accent1"/>
+                </a:solidFill>
+                <a:latin typeface="Lato"/>
+                <a:ea typeface="Lato"/>
+                <a:cs typeface="Lato"/>
+                <a:sym typeface="Lato"/>
+              </a:rPr>
+              <a:t>shift+enter</a:t>
             </a:r>
             <a:br>
-              <a:rPr lang="en-GB" sz="1600">
+              <a:rPr lang="en-GB" sz="1500" dirty="0">
                 <a:solidFill>
                   <a:schemeClr val="accent1"/>
                 </a:solidFill>
@@ -10889,7 +11117,7 @@
                 <a:sym typeface="Lato"/>
               </a:rPr>
             </a:br>
-            <a:endParaRPr sz="1600">
+            <a:endParaRPr sz="1500" dirty="0">
               <a:solidFill>
                 <a:schemeClr val="accent1"/>
               </a:solidFill>
@@ -10900,7 +11128,7 @@
             </a:endParaRPr>
           </a:p>
           <a:p>
-            <a:pPr indent="-330200" lvl="0" marL="457200" rtl="0" algn="l">
+            <a:pPr marL="412750" lvl="0" indent="-285750" algn="l" rtl="0">
               <a:spcBef>
                 <a:spcPts val="0"/>
               </a:spcBef>
@@ -10911,11 +11139,11 @@
                 <a:schemeClr val="accent1"/>
               </a:buClr>
               <a:buSzPts val="1600"/>
-              <a:buFont typeface="Lato"/>
-              <a:buChar char="●"/>
+              <a:buFont typeface="Arial" panose="020B0604020202020204" pitchFamily="34" charset="0"/>
+              <a:buChar char="•"/>
             </a:pPr>
             <a:r>
-              <a:rPr lang="en-GB" sz="1600">
+              <a:rPr lang="en-GB" sz="1500" dirty="0">
                 <a:solidFill>
                   <a:schemeClr val="accent1"/>
                 </a:solidFill>
@@ -10926,7 +11154,7 @@
               </a:rPr>
               <a:t>Output appears below cell</a:t>
             </a:r>
-            <a:endParaRPr sz="1600">
+            <a:endParaRPr sz="1500" dirty="0">
               <a:solidFill>
                 <a:schemeClr val="accent1"/>
               </a:solidFill>
@@ -10954,8 +11182,8 @@
         </p:blipFill>
         <p:spPr>
           <a:xfrm>
-            <a:off x="402650" y="1252850"/>
-            <a:ext cx="6017726" cy="3733351"/>
+            <a:off x="599707" y="1331844"/>
+            <a:ext cx="5625246" cy="3435697"/>
           </a:xfrm>
           <a:prstGeom prst="rect">
             <a:avLst/>
@@ -10974,7 +11202,7 @@
         </p:nvSpPr>
         <p:spPr>
           <a:xfrm>
-            <a:off x="1583125" y="663900"/>
+            <a:off x="2457769" y="839094"/>
             <a:ext cx="4472100" cy="985500"/>
           </a:xfrm>
           <a:prstGeom prst="rect">
@@ -10986,12 +11214,12 @@
           </a:ln>
         </p:spPr>
         <p:txBody>
-          <a:bodyPr anchorCtr="0" anchor="t" bIns="91425" lIns="91425" spcFirstLastPara="1" rIns="91425" wrap="square" tIns="91425">
+          <a:bodyPr spcFirstLastPara="1" wrap="square" lIns="91425" tIns="91425" rIns="91425" bIns="91425" anchor="t" anchorCtr="0">
             <a:noAutofit/>
           </a:bodyPr>
           <a:lstStyle/>
           <a:p>
-            <a:pPr indent="0" lvl="0" marL="0" rtl="0" algn="l">
+            <a:pPr marL="0" lvl="0" indent="0" algn="l" rtl="0">
               <a:lnSpc>
                 <a:spcPct val="115000"/>
               </a:lnSpc>
@@ -11004,7 +11232,7 @@
               <a:buNone/>
             </a:pPr>
             <a:r>
-              <a:rPr lang="en-GB" sz="1800">
+              <a:rPr lang="en-GB" sz="1500" dirty="0">
                 <a:solidFill>
                   <a:schemeClr val="accent1"/>
                 </a:solidFill>
@@ -11013,9 +11241,33 @@
                 <a:cs typeface="Lato"/>
                 <a:sym typeface="Lato"/>
               </a:rPr>
-              <a:t>VS code can open ipython notebooks:</a:t>
+              <a:t>VS code can open </a:t>
             </a:r>
-            <a:endParaRPr sz="1800">
+            <a:r>
+              <a:rPr lang="en-GB" sz="1500" dirty="0" err="1">
+                <a:solidFill>
+                  <a:schemeClr val="accent1"/>
+                </a:solidFill>
+                <a:latin typeface="Lato"/>
+                <a:ea typeface="Lato"/>
+                <a:cs typeface="Lato"/>
+                <a:sym typeface="Lato"/>
+              </a:rPr>
+              <a:t>ipython</a:t>
+            </a:r>
+            <a:r>
+              <a:rPr lang="en-GB" sz="1500" dirty="0">
+                <a:solidFill>
+                  <a:schemeClr val="accent1"/>
+                </a:solidFill>
+                <a:latin typeface="Lato"/>
+                <a:ea typeface="Lato"/>
+                <a:cs typeface="Lato"/>
+                <a:sym typeface="Lato"/>
+              </a:rPr>
+              <a:t> notebooks:</a:t>
+            </a:r>
+            <a:endParaRPr sz="1500" dirty="0">
               <a:solidFill>
                 <a:schemeClr val="accent1"/>
               </a:solidFill>
@@ -11036,11 +11288,11 @@
 </file>
 
 <file path=ppt/slides/slide8.xml><?xml version="1.0" encoding="utf-8"?>
-<p:sld xmlns:a="http://schemas.openxmlformats.org/drawingml/2006/main" xmlns:r="http://schemas.openxmlformats.org/officeDocument/2006/relationships" xmlns:mc="http://schemas.openxmlformats.org/markup-compatibility/2006" xmlns:mv="urn:schemas-microsoft-com:mac:vml" xmlns:p="http://schemas.openxmlformats.org/presentationml/2006/main" xmlns:c="http://schemas.openxmlformats.org/drawingml/2006/chart" xmlns:dgm="http://schemas.openxmlformats.org/drawingml/2006/diagram" xmlns:o="urn:schemas-microsoft-com:office:office" xmlns:v="urn:schemas-microsoft-com:vml" xmlns:pvml="urn:schemas-microsoft-com:office:powerpoint" xmlns:com="http://schemas.openxmlformats.org/drawingml/2006/compatibility" xmlns:p14="http://schemas.microsoft.com/office/powerpoint/2010/main" xmlns:p15="http://schemas.microsoft.com/office/powerpoint/2012/main" xmlns:ahyp="http://schemas.microsoft.com/office/drawing/2018/hyperlinkcolor">
+<p:sld xmlns:a="http://schemas.openxmlformats.org/drawingml/2006/main" xmlns:r="http://schemas.openxmlformats.org/officeDocument/2006/relationships" xmlns:p="http://schemas.openxmlformats.org/presentationml/2006/main">
   <p:cSld>
     <p:spTree>
       <p:nvGrpSpPr>
-        <p:cNvPr id="151" name="Shape 151"/>
+        <p:cNvPr id="1" name="Shape 151"/>
         <p:cNvGrpSpPr/>
         <p:nvPr/>
       </p:nvGrpSpPr>
@@ -11068,8 +11320,8 @@
         </p:blipFill>
         <p:spPr>
           <a:xfrm>
-            <a:off x="457200" y="1024100"/>
-            <a:ext cx="6604423" cy="3966999"/>
+            <a:off x="1269789" y="1053549"/>
+            <a:ext cx="6154741" cy="3766930"/>
           </a:xfrm>
           <a:prstGeom prst="rect">
             <a:avLst/>
@@ -11083,7 +11335,9 @@
       <p:sp>
         <p:nvSpPr>
           <p:cNvPr id="153" name="Google Shape;153;p20"/>
-          <p:cNvSpPr txBox="1"/>
+          <p:cNvSpPr txBox="1">
+            <a:spLocks noGrp="1"/>
+          </p:cNvSpPr>
           <p:nvPr>
             <p:ph type="title"/>
           </p:nvPr>
@@ -11098,12 +11352,12 @@
           </a:prstGeom>
         </p:spPr>
         <p:txBody>
-          <a:bodyPr anchorCtr="0" anchor="t" bIns="91425" lIns="91425" spcFirstLastPara="1" rIns="91425" wrap="square" tIns="91425">
+          <a:bodyPr spcFirstLastPara="1" wrap="square" lIns="91425" tIns="91425" rIns="91425" bIns="91425" anchor="t" anchorCtr="0">
             <a:normAutofit fontScale="90000"/>
           </a:bodyPr>
           <a:lstStyle/>
           <a:p>
-            <a:pPr indent="0" lvl="0" marL="0" rtl="0" algn="l">
+            <a:pPr marL="0" lvl="0" indent="0" algn="l" rtl="0">
               <a:spcBef>
                 <a:spcPts val="0"/>
               </a:spcBef>
@@ -11128,30 +11382,30 @@
         </p:nvSpPr>
         <p:spPr>
           <a:xfrm>
-            <a:off x="1166575" y="2845150"/>
-            <a:ext cx="1066200" cy="324900"/>
+            <a:off x="1912009" y="2845149"/>
+            <a:ext cx="1066200" cy="226042"/>
           </a:xfrm>
           <a:prstGeom prst="ellipse">
             <a:avLst/>
           </a:prstGeom>
           <a:noFill/>
-          <a:ln cap="flat" cmpd="sng" w="38100">
+          <a:ln w="38100" cap="flat" cmpd="sng">
             <a:solidFill>
               <a:srgbClr val="CC0000"/>
             </a:solidFill>
             <a:prstDash val="solid"/>
             <a:round/>
-            <a:headEnd len="sm" w="sm" type="none"/>
-            <a:tailEnd len="sm" w="sm" type="none"/>
+            <a:headEnd type="none" w="sm" len="sm"/>
+            <a:tailEnd type="none" w="sm" len="sm"/>
           </a:ln>
         </p:spPr>
         <p:txBody>
-          <a:bodyPr anchorCtr="0" anchor="ctr" bIns="91425" lIns="91425" spcFirstLastPara="1" rIns="91425" wrap="square" tIns="91425">
+          <a:bodyPr spcFirstLastPara="1" wrap="square" lIns="91425" tIns="91425" rIns="91425" bIns="91425" anchor="ctr" anchorCtr="0">
             <a:noAutofit/>
           </a:bodyPr>
           <a:lstStyle/>
           <a:p>
-            <a:pPr indent="0" lvl="0" marL="0" rtl="0" algn="l">
+            <a:pPr marL="0" lvl="0" indent="0" algn="l" rtl="0">
               <a:spcBef>
                 <a:spcPts val="0"/>
               </a:spcBef>
@@ -11160,9 +11414,6 @@
               </a:spcAft>
               <a:buNone/>
             </a:pPr>
-            <a:r>
-              <a:t/>
-            </a:r>
             <a:endParaRPr/>
           </a:p>
         </p:txBody>
@@ -11176,11 +11427,11 @@
 </file>
 
 <file path=ppt/slides/slide9.xml><?xml version="1.0" encoding="utf-8"?>
-<p:sld xmlns:a="http://schemas.openxmlformats.org/drawingml/2006/main" xmlns:r="http://schemas.openxmlformats.org/officeDocument/2006/relationships" xmlns:mc="http://schemas.openxmlformats.org/markup-compatibility/2006" xmlns:mv="urn:schemas-microsoft-com:mac:vml" xmlns:p="http://schemas.openxmlformats.org/presentationml/2006/main" xmlns:c="http://schemas.openxmlformats.org/drawingml/2006/chart" xmlns:dgm="http://schemas.openxmlformats.org/drawingml/2006/diagram" xmlns:o="urn:schemas-microsoft-com:office:office" xmlns:v="urn:schemas-microsoft-com:vml" xmlns:pvml="urn:schemas-microsoft-com:office:powerpoint" xmlns:com="http://schemas.openxmlformats.org/drawingml/2006/compatibility" xmlns:p14="http://schemas.microsoft.com/office/powerpoint/2010/main" xmlns:p15="http://schemas.microsoft.com/office/powerpoint/2012/main" xmlns:ahyp="http://schemas.microsoft.com/office/drawing/2018/hyperlinkcolor">
+<p:sld xmlns:a="http://schemas.openxmlformats.org/drawingml/2006/main" xmlns:r="http://schemas.openxmlformats.org/officeDocument/2006/relationships" xmlns:p="http://schemas.openxmlformats.org/presentationml/2006/main">
   <p:cSld>
     <p:spTree>
       <p:nvGrpSpPr>
-        <p:cNvPr id="158" name="Shape 158"/>
+        <p:cNvPr id="1" name="Shape 158"/>
         <p:cNvGrpSpPr/>
         <p:nvPr/>
       </p:nvGrpSpPr>
@@ -11195,7 +11446,9 @@
       <p:sp>
         <p:nvSpPr>
           <p:cNvPr id="159" name="Google Shape;159;p21"/>
-          <p:cNvSpPr txBox="1"/>
+          <p:cNvSpPr txBox="1">
+            <a:spLocks noGrp="1"/>
+          </p:cNvSpPr>
           <p:nvPr>
             <p:ph type="title"/>
           </p:nvPr>
@@ -11210,12 +11463,12 @@
           </a:prstGeom>
         </p:spPr>
         <p:txBody>
-          <a:bodyPr anchorCtr="0" anchor="t" bIns="91425" lIns="91425" spcFirstLastPara="1" rIns="91425" wrap="square" tIns="91425">
+          <a:bodyPr spcFirstLastPara="1" wrap="square" lIns="91425" tIns="91425" rIns="91425" bIns="91425" anchor="t" anchorCtr="0">
             <a:normAutofit fontScale="90000"/>
           </a:bodyPr>
           <a:lstStyle/>
           <a:p>
-            <a:pPr indent="0" lvl="0" marL="0" rtl="0" algn="l">
+            <a:pPr marL="0" lvl="0" indent="0" algn="l" rtl="0">
               <a:spcBef>
                 <a:spcPts val="0"/>
               </a:spcBef>
@@ -11235,27 +11488,29 @@
       <p:sp>
         <p:nvSpPr>
           <p:cNvPr id="160" name="Google Shape;160;p21"/>
-          <p:cNvSpPr txBox="1"/>
+          <p:cNvSpPr txBox="1">
+            <a:spLocks noGrp="1"/>
+          </p:cNvSpPr>
           <p:nvPr>
-            <p:ph idx="1" type="body"/>
+            <p:ph type="body" idx="1"/>
           </p:nvPr>
         </p:nvSpPr>
         <p:spPr>
           <a:xfrm>
-            <a:off x="729450" y="1297975"/>
-            <a:ext cx="6813000" cy="3484500"/>
+            <a:off x="565675" y="1243382"/>
+            <a:ext cx="4866132" cy="3484500"/>
           </a:xfrm>
           <a:prstGeom prst="rect">
             <a:avLst/>
           </a:prstGeom>
         </p:spPr>
         <p:txBody>
-          <a:bodyPr anchorCtr="0" anchor="t" bIns="91425" lIns="91425" spcFirstLastPara="1" rIns="91425" wrap="square" tIns="91425">
-            <a:normAutofit lnSpcReduction="20000"/>
+          <a:bodyPr spcFirstLastPara="1" wrap="square" lIns="91425" tIns="91425" rIns="91425" bIns="91425" anchor="t" anchorCtr="0">
+            <a:normAutofit fontScale="92500"/>
           </a:bodyPr>
           <a:lstStyle/>
           <a:p>
-            <a:pPr indent="0" lvl="0" marL="0" rtl="0" algn="l">
+            <a:pPr marL="0" lvl="0" indent="0" algn="l" rtl="0">
               <a:lnSpc>
                 <a:spcPct val="115000"/>
               </a:lnSpc>
@@ -11268,37 +11523,32 @@
               <a:buNone/>
             </a:pPr>
             <a:r>
-              <a:rPr lang="en-GB" sz="2000"/>
-              <a:t>Packages are also called libraries. They are bundles of code that contain a certain functionality.</a:t>
+              <a:rPr lang="en-GB" sz="1500" dirty="0"/>
+              <a:t>Packages are also called libraries. </a:t>
             </a:r>
-            <a:endParaRPr sz="2000"/>
           </a:p>
           <a:p>
-            <a:pPr indent="0" lvl="0" marL="0" rtl="0" algn="l">
+            <a:pPr marL="0" lvl="0" indent="0" algn="l" rtl="0">
               <a:lnSpc>
                 <a:spcPct val="115000"/>
               </a:lnSpc>
               <a:spcBef>
-                <a:spcPts val="1200"/>
+                <a:spcPts val="0"/>
               </a:spcBef>
               <a:spcAft>
                 <a:spcPts val="0"/>
               </a:spcAft>
               <a:buNone/>
             </a:pPr>
-            <a:r>
-              <a:rPr lang="en-GB" sz="2000"/>
-              <a:t>You have already used packages:</a:t>
-            </a:r>
-            <a:endParaRPr sz="2000"/>
+            <a:endParaRPr lang="en-GB" sz="1500" dirty="0"/>
           </a:p>
           <a:p>
-            <a:pPr indent="0" lvl="0" marL="0" rtl="0" algn="l">
+            <a:pPr marL="0" lvl="0" indent="0" algn="l" rtl="0">
               <a:lnSpc>
                 <a:spcPct val="115000"/>
               </a:lnSpc>
               <a:spcBef>
-                <a:spcPts val="1200"/>
+                <a:spcPts val="0"/>
               </a:spcBef>
               <a:spcAft>
                 <a:spcPts val="0"/>
@@ -11306,24 +11556,68 @@
               <a:buNone/>
             </a:pPr>
             <a:r>
-              <a:rPr lang="en-GB" sz="2000">
+              <a:rPr lang="en-GB" sz="1500" dirty="0"/>
+              <a:t>They are bundles of code that contain a certain functionality.</a:t>
+            </a:r>
+            <a:endParaRPr sz="1500" dirty="0"/>
+          </a:p>
+          <a:p>
+            <a:pPr marL="0" lvl="0" indent="0" algn="l" rtl="0">
+              <a:lnSpc>
+                <a:spcPct val="115000"/>
+              </a:lnSpc>
+              <a:spcBef>
+                <a:spcPts val="1200"/>
+              </a:spcBef>
+              <a:spcAft>
+                <a:spcPts val="0"/>
+              </a:spcAft>
+              <a:buNone/>
+            </a:pPr>
+            <a:endParaRPr lang="en-GB" sz="1500" dirty="0"/>
+          </a:p>
+          <a:p>
+            <a:pPr marL="0" lvl="0" indent="0" algn="l" rtl="0">
+              <a:lnSpc>
+                <a:spcPct val="115000"/>
+              </a:lnSpc>
+              <a:spcBef>
+                <a:spcPts val="1200"/>
+              </a:spcBef>
+              <a:spcAft>
+                <a:spcPts val="0"/>
+              </a:spcAft>
+              <a:buNone/>
+            </a:pPr>
+            <a:r>
+              <a:rPr lang="en-GB" sz="1500" dirty="0"/>
+              <a:t>You have already used packages:</a:t>
+            </a:r>
+            <a:endParaRPr sz="1500" dirty="0"/>
+          </a:p>
+          <a:p>
+            <a:pPr marL="0" lvl="0" indent="0" algn="l" rtl="0">
+              <a:lnSpc>
+                <a:spcPct val="115000"/>
+              </a:lnSpc>
+              <a:spcBef>
+                <a:spcPts val="1200"/>
+              </a:spcBef>
+              <a:spcAft>
+                <a:spcPts val="0"/>
+              </a:spcAft>
+              <a:buNone/>
+            </a:pPr>
+            <a:r>
+              <a:rPr lang="en-GB" sz="1500" b="1" dirty="0">
                 <a:latin typeface="Courier New"/>
                 <a:ea typeface="Courier New"/>
                 <a:cs typeface="Courier New"/>
                 <a:sym typeface="Courier New"/>
               </a:rPr>
-              <a:t>i</a:t>
+              <a:t>import pandas as pd</a:t>
             </a:r>
-            <a:r>
-              <a:rPr lang="en-GB" sz="2000">
-                <a:latin typeface="Courier New"/>
-                <a:ea typeface="Courier New"/>
-                <a:cs typeface="Courier New"/>
-                <a:sym typeface="Courier New"/>
-              </a:rPr>
-              <a:t>mport pandas as pd</a:t>
-            </a:r>
-            <a:endParaRPr sz="2000">
+            <a:endParaRPr sz="1500" b="1" dirty="0">
               <a:latin typeface="Courier New"/>
               <a:ea typeface="Courier New"/>
               <a:cs typeface="Courier New"/>
@@ -11331,7 +11625,7 @@
             </a:endParaRPr>
           </a:p>
           <a:p>
-            <a:pPr indent="0" lvl="0" marL="0" rtl="0" algn="l">
+            <a:pPr marL="0" lvl="0" indent="0" algn="l" rtl="0">
               <a:lnSpc>
                 <a:spcPct val="115000"/>
               </a:lnSpc>
@@ -11344,15 +11638,42 @@
               <a:buNone/>
             </a:pPr>
             <a:r>
-              <a:rPr lang="en-GB" sz="2000">
+              <a:rPr lang="en-GB" sz="1500" b="1" dirty="0">
                 <a:latin typeface="Courier New"/>
                 <a:ea typeface="Courier New"/>
                 <a:cs typeface="Courier New"/>
                 <a:sym typeface="Courier New"/>
               </a:rPr>
-              <a:t>import plotly.express as px</a:t>
+              <a:t>import </a:t>
             </a:r>
-            <a:endParaRPr sz="2000">
+            <a:r>
+              <a:rPr lang="en-GB" sz="1500" b="1" dirty="0" err="1">
+                <a:latin typeface="Courier New"/>
+                <a:ea typeface="Courier New"/>
+                <a:cs typeface="Courier New"/>
+                <a:sym typeface="Courier New"/>
+              </a:rPr>
+              <a:t>plotly.express</a:t>
+            </a:r>
+            <a:r>
+              <a:rPr lang="en-GB" sz="1500" b="1" dirty="0">
+                <a:latin typeface="Courier New"/>
+                <a:ea typeface="Courier New"/>
+                <a:cs typeface="Courier New"/>
+                <a:sym typeface="Courier New"/>
+              </a:rPr>
+              <a:t> as </a:t>
+            </a:r>
+            <a:r>
+              <a:rPr lang="en-GB" sz="1500" b="1" dirty="0" err="1">
+                <a:latin typeface="Courier New"/>
+                <a:ea typeface="Courier New"/>
+                <a:cs typeface="Courier New"/>
+                <a:sym typeface="Courier New"/>
+              </a:rPr>
+              <a:t>px</a:t>
+            </a:r>
+            <a:endParaRPr sz="1500" b="1" dirty="0">
               <a:latin typeface="Courier New"/>
               <a:ea typeface="Courier New"/>
               <a:cs typeface="Courier New"/>
@@ -11360,43 +11681,20 @@
             </a:endParaRPr>
           </a:p>
           <a:p>
-            <a:pPr indent="0" lvl="0" marL="0" rtl="0" algn="l">
-              <a:lnSpc>
-                <a:spcPct val="115000"/>
-              </a:lnSpc>
+            <a:pPr marL="0" lvl="0" indent="0" algn="l" rtl="0">
               <a:spcBef>
                 <a:spcPts val="1200"/>
               </a:spcBef>
               <a:spcAft>
-                <a:spcPts val="0"/>
+                <a:spcPts val="1200"/>
               </a:spcAft>
               <a:buNone/>
             </a:pPr>
             <a:r>
-              <a:t/>
-            </a:r>
-            <a:endParaRPr sz="2000">
-              <a:latin typeface="Courier New"/>
-              <a:ea typeface="Courier New"/>
-              <a:cs typeface="Courier New"/>
-              <a:sym typeface="Courier New"/>
-            </a:endParaRPr>
-          </a:p>
-          <a:p>
-            <a:pPr indent="0" lvl="0" marL="0" rtl="0" algn="l">
-              <a:spcBef>
-                <a:spcPts val="1200"/>
-              </a:spcBef>
-              <a:spcAft>
-                <a:spcPts val="1200"/>
-              </a:spcAft>
-              <a:buNone/>
-            </a:pPr>
-            <a:r>
-              <a:rPr lang="en-GB" sz="2000"/>
+              <a:rPr lang="en-GB" sz="1500" dirty="0"/>
               <a:t>You’ll need to have a local install of the package before you can load and use it.</a:t>
             </a:r>
-            <a:endParaRPr sz="2000">
+            <a:endParaRPr sz="1500" dirty="0">
               <a:latin typeface="Courier New"/>
               <a:ea typeface="Courier New"/>
               <a:cs typeface="Courier New"/>
@@ -11405,6 +11703,37 @@
           </a:p>
         </p:txBody>
       </p:sp>
+      <p:pic>
+        <p:nvPicPr>
+          <p:cNvPr id="3" name="Picture 2" descr="A circular object with many icons&#10;&#10;AI-generated content may be incorrect.">
+            <a:extLst>
+              <a:ext uri="{FF2B5EF4-FFF2-40B4-BE49-F238E27FC236}">
+                <a16:creationId xmlns:a16="http://schemas.microsoft.com/office/drawing/2014/main" id="{B22E7592-BF48-DA27-2484-2A7A02C314E3}"/>
+              </a:ext>
+            </a:extLst>
+          </p:cNvPr>
+          <p:cNvPicPr>
+            <a:picLocks noChangeAspect="1"/>
+          </p:cNvPicPr>
+          <p:nvPr/>
+        </p:nvPicPr>
+        <p:blipFill>
+          <a:blip r:embed="rId3"/>
+          <a:srcRect l="12316" r="12664"/>
+          <a:stretch>
+            <a:fillRect/>
+          </a:stretch>
+        </p:blipFill>
+        <p:spPr>
+          <a:xfrm>
+            <a:off x="5636525" y="1344038"/>
+            <a:ext cx="3047769" cy="3064827"/>
+          </a:xfrm>
+          <a:prstGeom prst="rect">
+            <a:avLst/>
+          </a:prstGeom>
+        </p:spPr>
+      </p:pic>
     </p:spTree>
   </p:cSld>
   <p:clrMapOvr>
@@ -11414,7 +11743,7 @@
 </file>
 
 <file path=ppt/theme/theme1.xml><?xml version="1.0" encoding="utf-8"?>
-<a:theme xmlns:a="http://schemas.openxmlformats.org/drawingml/2006/main" xmlns:r="http://schemas.openxmlformats.org/officeDocument/2006/relationships" name="minimal">
+<a:theme xmlns:a="http://schemas.openxmlformats.org/drawingml/2006/main" name="minimal">
   <a:themeElements>
     <a:clrScheme name="Streamline">
       <a:dk1>
@@ -11689,11 +12018,13 @@
       </a:bgFillStyleLst>
     </a:fmtScheme>
   </a:themeElements>
+  <a:objectDefaults/>
+  <a:extraClrSchemeLst/>
 </a:theme>
 </file>
 
 <file path=ppt/theme/theme2.xml><?xml version="1.0" encoding="utf-8"?>
-<a:theme xmlns:a="http://schemas.openxmlformats.org/drawingml/2006/main" xmlns:r="http://schemas.openxmlformats.org/officeDocument/2006/relationships">
+<a:theme xmlns:a="http://schemas.openxmlformats.org/drawingml/2006/main">
   <a:themeElements>
     <a:clrScheme name="Default">
       <a:dk1>
@@ -11968,5 +12299,7 @@
       </a:bgFillStyleLst>
     </a:fmtScheme>
   </a:themeElements>
+  <a:objectDefaults/>
+  <a:extraClrSchemeLst/>
 </a:theme>
 </file>